--- a/docs/propuesta/defiendelo-pitch-jurado.pptx
+++ b/docs/propuesta/defiendelo-pitch-jurado.pptx
@@ -16,9 +16,10 @@
     <p:sldId id="264" r:id="rId10"/>
     <p:sldId id="265" r:id="rId11"/>
     <p:sldId id="266" r:id="rId12"/>
+    <p:sldId id="267" r:id="rId13"/>
   </p:sldIdLst>
   <p:notesMasterIdLst>
-    <p:notesMasterId r:id="rId13"/>
+    <p:notesMasterId r:id="rId14"/>
   </p:notesMasterIdLst>
   <p:sldSz cx="12192000" cy="6858000"/>
   <p:notesSz cx="6858000" cy="12192000"/>
@@ -117,39 +118,40 @@
   <p:extLst>
     <p:ext uri="{521415D9-36F7-43E2-AB2F-B90AF26B5E84}">
       <p14:sectionLst xmlns:p14="http://schemas.microsoft.com/office/powerpoint/2010/main">
-        <p14:section name="Apertura" id="{c62e9a8c-944e-1ac0-4f1a-48f4ef35308a}">
+        <p14:section name="Apertura" id="{a8a57c74-19af-9630-dcf7-874c2fd6a54e}">
           <p14:sldIdLst>
             <p14:sldId id="256"/>
           </p14:sldIdLst>
         </p14:section>
-        <p14:section name="Por qué" id="{50d0a1e1-e5c0-21a7-59c6-3d295f0fc333}">
+        <p14:section name="Por qué" id="{c7b7950a-5a14-37d1-3cfd-eb709a32a3b4}">
           <p14:sldIdLst>
             <p14:sldId id="257"/>
             <p14:sldId id="258"/>
             <p14:sldId id="259"/>
-          </p14:sldIdLst>
-        </p14:section>
-        <p14:section name="Cómo" id="{9f5fe661-a706-f4f6-479c-cfc89432f5e5}">
-          <p14:sldIdLst>
             <p14:sldId id="260"/>
           </p14:sldIdLst>
         </p14:section>
-        <p14:section name="Qué" id="{641654ff-ecae-d6e4-33f6-60384cc905df}">
+        <p14:section name="Cómo" id="{a7fa264f-b92e-1551-42ef-c2691bb377f8}">
           <p14:sldIdLst>
             <p14:sldId id="261"/>
+          </p14:sldIdLst>
+        </p14:section>
+        <p14:section name="Qué" id="{d69eace7-5c01-3228-1ea5-49274bf219d3}">
+          <p14:sldIdLst>
             <p14:sldId id="262"/>
             <p14:sldId id="263"/>
             <p14:sldId id="264"/>
-          </p14:sldIdLst>
-        </p14:section>
-        <p14:section name="Cierre" id="{6dc0fb12-2f19-d2ec-245e-1dba86b9f018}">
-          <p14:sldIdLst>
             <p14:sldId id="265"/>
           </p14:sldIdLst>
         </p14:section>
-        <p14:section name="Respaldo" id="{0f4fed3b-db25-5aa6-f13e-2aef5edf20af}">
+        <p14:section name="Cierre" id="{58cf59a4-35d5-0c72-40fc-784865eb9432}">
           <p14:sldIdLst>
             <p14:sldId id="266"/>
+          </p14:sldIdLst>
+        </p14:section>
+        <p14:section name="Respaldo" id="{51accab0-9f4b-3e1b-862c-43fd42fc5a76}">
+          <p14:sldIdLst>
+            <p14:sldId id="267"/>
           </p14:sldIdLst>
         </p14:section>
       </p14:sectionLst>
@@ -644,7 +646,7 @@
           <a:p>
             <a:r>
               <a:rPr lang="en-US" dirty="0"/>
-              <a:t>2:45–3:00. Para los docentes que ya no saben quién aprendió y quién le pidió la tarea a una IA, Defiéndelo rediseña sus tareas para que la nota se gane explicando el propio trabajo. A diferencia de los detectores, no acusa: pregunta. Y a diferencia de un examen oral, llega a toda la clase. Gracias.</a:t>
+              <a:t>2:30–2:42. Hoy el MVP funciona de punta a punta y está desplegado, y ya lo probó un docente de secundaria. El siguiente paso es ampliar a más docentes y estudiantes, y medir la brecha entre lo que entregan y lo que explican.</a:t>
             </a:r>
             <a:endParaRPr lang="en-US" dirty="0"/>
           </a:p>
@@ -732,7 +734,7 @@
           <a:p>
             <a:r>
               <a:rPr lang="en-US" dirty="0"/>
-              <a:t>Diapositiva de respaldo para las preguntas del jurado.</a:t>
+              <a:t>2:42–3:00. Para los docentes que ya no saben quién aprendió y quién le pidió la tarea a una IA, Defiéndelo rediseña sus tareas para que la nota se gane explicando el propio trabajo. A diferencia de los detectores, no acusa: pregunta. Y a diferencia de un examen oral, llega a toda la clase. Gracias.</a:t>
             </a:r>
             <a:endParaRPr lang="en-US" dirty="0"/>
           </a:p>
@@ -756,6 +758,94 @@
             <a:fld id="{F7021451-1387-4CA6-816F-3879F97B5CBC}" type="slidenum">
               <a:rPr lang="en-US"/>
               <a:t>11</a:t>
+            </a:fld>
+            <a:endParaRPr lang="en-US"/>
+          </a:p>
+        </p:txBody>
+      </p:sp>
+    </p:spTree>
+    <p:extLst>
+      <p:ext uri="{BB962C8B-B14F-4D97-AF65-F5344CB8AC3E}">
+        <p14:creationId xmlns:p14="http://schemas.microsoft.com/office/powerpoint/2010/main" val="1024086991"/>
+      </p:ext>
+    </p:extLst>
+  </p:cSld>
+  <p:clrMapOvr>
+    <a:masterClrMapping/>
+  </p:clrMapOvr>
+</p:notes>
+</file>
+
+<file path=ppt/notesSlides/notesSlide12.xml><?xml version="1.0" encoding="utf-8"?>
+<p:notes xmlns:a="http://schemas.openxmlformats.org/drawingml/2006/main" xmlns:r="http://schemas.openxmlformats.org/officeDocument/2006/relationships" xmlns:p="http://schemas.openxmlformats.org/presentationml/2006/main">
+  <p:cSld>
+    <p:spTree>
+      <p:nvGrpSpPr>
+        <p:cNvPr id="1" name=""/>
+        <p:cNvGrpSpPr/>
+        <p:nvPr/>
+      </p:nvGrpSpPr>
+      <p:grpSpPr>
+        <a:xfrm>
+          <a:off x="0" y="0"/>
+          <a:ext cx="0" cy="0"/>
+          <a:chOff x="0" y="0"/>
+          <a:chExt cx="0" cy="0"/>
+        </a:xfrm>
+      </p:grpSpPr>
+      <p:sp>
+        <p:nvSpPr>
+          <p:cNvPr id="2" name="Slide Image Placeholder 1"/>
+          <p:cNvSpPr>
+            <a:spLocks noGrp="1" noRot="1" noChangeAspect="1"/>
+          </p:cNvSpPr>
+          <p:nvPr>
+            <p:ph type="sldImg"/>
+          </p:nvPr>
+        </p:nvSpPr>
+        <p:spPr/>
+      </p:sp>
+      <p:sp>
+        <p:nvSpPr>
+          <p:cNvPr id="3" name="Notes Placeholder 2"/>
+          <p:cNvSpPr>
+            <a:spLocks noGrp="1"/>
+          </p:cNvSpPr>
+          <p:nvPr>
+            <p:ph type="body" idx="1"/>
+          </p:nvPr>
+        </p:nvSpPr>
+        <p:spPr/>
+        <p:txBody>
+          <a:bodyPr/>
+          <a:lstStyle/>
+          <a:p>
+            <a:r>
+              <a:rPr lang="en-US" dirty="0"/>
+              <a:t>Diapositiva de respaldo para las preguntas del jurado.</a:t>
+            </a:r>
+            <a:endParaRPr lang="en-US" dirty="0"/>
+          </a:p>
+        </p:txBody>
+      </p:sp>
+      <p:sp>
+        <p:nvSpPr>
+          <p:cNvPr id="4" name="Slide Number Placeholder 3"/>
+          <p:cNvSpPr>
+            <a:spLocks noGrp="1"/>
+          </p:cNvSpPr>
+          <p:nvPr>
+            <p:ph type="sldNum" sz="quarter" idx="10"/>
+          </p:nvPr>
+        </p:nvSpPr>
+        <p:spPr/>
+        <p:txBody>
+          <a:bodyPr/>
+          <a:lstStyle/>
+          <a:p>
+            <a:fld id="{F7021451-1387-4CA6-816F-3879F97B5CBC}" type="slidenum">
+              <a:rPr lang="en-US"/>
+              <a:t>12</a:t>
             </a:fld>
             <a:endParaRPr lang="en-US"/>
           </a:p>
@@ -820,7 +910,7 @@
           <a:p>
             <a:r>
               <a:rPr lang="en-US" dirty="0"/>
-              <a:t>0:10–0:35. El problema no es que los alumnos hagan trampa. Es que la IA mejora el producto sin mejorar el aprendizaje. En un ensayo con unos mil escolares, quienes practicaron con IA rindieron 17 % menos cuando se la quitaron. En otro, ChatGPT subió la nota del ensayo, pero no el conocimiento. Y el 54 % de nuestros alumnos ya la usa cada semana. La nota mide el producto; las tareas siguen diseñadas para un mundo sin IA.</a:t>
+              <a:t>0:10–0:30. El problema no es que los alumnos hagan trampa. Es que la IA mejora el producto sin mejorar el aprendizaje. En un ensayo con unos mil escolares, quienes practicaron con IA rindieron 17 % menos cuando se la quitaron. En otro, ChatGPT subió la nota del ensayo, pero no el conocimiento. Y el 54 % de nuestros alumnos ya la usa cada semana. La nota mide el producto; las tareas siguen diseñadas para un mundo sin IA.</a:t>
             </a:r>
             <a:endParaRPr lang="en-US" dirty="0"/>
           </a:p>
@@ -908,7 +998,7 @@
           <a:p>
             <a:r>
               <a:rPr lang="en-US" dirty="0"/>
-              <a:t>0:35–0:55. ¿Cómo llegamos aquí? Analizamos las cuatro grietas del reto y elegimos la 02. Vimos que el problema es de uso, no de acceso: casi todos usan IA, pocos bien. Que el alumno delega justo lo difícil: crear y analizar. Y que los modos de estudio no bastan: se apagan con un clic. Conclusión: la solución tiene que vivir en la evaluación, no ser otro tutor.</a:t>
+              <a:t>0:30–0:45. Lo validamos con un docente de un colegio público, donde los docentes no usan IA pero sus alumnos sí. Asumíamos que los alumnos resolvían todo con IA y no aprendían. Él nos dijo que la IA siempre va a estar presente y que hay que calificar a los alumnos por sus soluciones. Probó la plataforma: no sintió que la IA hiciera todo, sino una nueva forma de calificar. Se trabó porque veía muchas formas en pantalla, así que redujimos el ruido visual.</a:t>
             </a:r>
             <a:endParaRPr lang="en-US" dirty="0"/>
           </a:p>
@@ -996,7 +1086,7 @@
           <a:p>
             <a:r>
               <a:rPr lang="en-US" dirty="0"/>
-              <a:t>0:55–1:10. La defensa oral funciona: explicar lo propio resiste a la IA. Pero son 15 a 20 minutos por alumno, y uno de cada cinco docentes de secundaria tiene 55 años o más. Necesitamos la defensa, pero para toda la clase.</a:t>
+              <a:t>0:45–1:00. ¿Cómo llegamos aquí? Analizamos las cuatro grietas del reto y elegimos la 02. Vimos que el problema es de uso, no de acceso: casi todos usan IA, pocos bien. Que el alumno delega justo lo difícil: crear y analizar. Y que los modos de estudio no bastan: se apagan con un clic. Conclusión: la solución tiene que vivir en la evaluación, no ser otro tutor.</a:t>
             </a:r>
             <a:endParaRPr lang="en-US" dirty="0"/>
           </a:p>
@@ -1084,7 +1174,7 @@
           <a:p>
             <a:r>
               <a:rPr lang="en-US" dirty="0"/>
-              <a:t>1:10–1:25. Tres principios. Uno: la IA está permitida; no detectamos, preguntamos. Dos: defender enseña; explicar el propio trabajo tiene un efecto de medio desvío estándar. Tres: la IA sugiere y el docente decide, como pide el Reglamento peruano de IA para evaluar a menores.</a:t>
+              <a:t>1:00–1:10. La defensa oral funciona: explicar lo propio resiste a la IA. Pero son 15 a 20 minutos por alumno, y uno de cada cinco docentes de secundaria tiene 55 años o más. Necesitamos la defensa, pero para toda la clase.</a:t>
             </a:r>
             <a:endParaRPr lang="en-US" dirty="0"/>
           </a:p>
@@ -1172,7 +1262,7 @@
           <a:p>
             <a:r>
               <a:rPr lang="en-US" dirty="0"/>
-              <a:t>1:25–2:00 (aquí va la demo en vivo si hay tiempo). Cuatro pasos. El docente sube la tarea que ya usa y la IA la rediseña. La prueba de estrés le muestra cuánta nota saca una IA sola. El alumno entrega, puede usar IA, y recibe preguntas sobre su propio trabajo: en el celular, en papel o en voz alta. Y el docente decide la nota con la evidencia de cada criterio, y ve qué errores se repiten en la clase.</a:t>
+              <a:t>1:10–1:20. Tres principios. Uno: la IA está permitida; no detectamos, preguntamos. Dos: defender enseña; explicar el propio trabajo tiene un efecto de medio desvío estándar. Tres: la IA sugiere y el docente decide, como pide el Reglamento peruano de IA para evaluar a menores.</a:t>
             </a:r>
             <a:endParaRPr lang="en-US" dirty="0"/>
           </a:p>
@@ -1260,7 +1350,7 @@
           <a:p>
             <a:r>
               <a:rPr lang="en-US" dirty="0"/>
-              <a:t>2:00–2:15. ¿En qué somos distintos? Los detectores vigilan, no miden comprensión. Los modos de estudio son opcionales y al docente no le llega nada. Los exámenes orales con IA son por voz, uno a uno y en inglés. Nosotros rediseñamos la tarea, la probamos contra la IA y la defensa funciona incluso en papel.</a:t>
+              <a:t>1:20–1:55 (aquí va la demo en vivo si hay tiempo). Cuatro pasos. El docente sube la tarea que ya usa y la IA la rediseña. La prueba de estrés le muestra cuánta nota saca una IA sola. El alumno entrega, puede usar IA, y recibe preguntas sobre su propio trabajo: en el celular, en papel o en voz alta. Y el docente decide la nota con la evidencia de cada criterio, y ve qué errores se repiten en la clase.</a:t>
             </a:r>
             <a:endParaRPr lang="en-US" dirty="0"/>
           </a:p>
@@ -1348,7 +1438,7 @@
           <a:p>
             <a:r>
               <a:rPr lang="en-US" dirty="0"/>
-              <a:t>2:15–2:35. Los asistentes docentes ya son gratis, así que no competimos como otro asistente. Somos gratis para el docente y la institución paga por evidencia de comprensión, del presupuesto que hoy va a detectores: Turnitin cobra entre 1,79 y 6,50 dólares por alumno al año. Una defensa nos cuesta menos de medio centavo. Empezamos con docentes, seguimos con colegios y facultades, y luego el sector público.</a:t>
+              <a:t>1:55–2:10. ¿En qué somos distintos? Los detectores vigilan, no miden comprensión. Los modos de estudio son opcionales y al docente no le llega nada. Los exámenes orales con IA son por voz, uno a uno y en inglés. Nosotros rediseñamos la tarea, la probamos contra la IA y la defensa funciona incluso en papel.</a:t>
             </a:r>
             <a:endParaRPr lang="en-US" dirty="0"/>
           </a:p>
@@ -1436,7 +1526,7 @@
           <a:p>
             <a:r>
               <a:rPr lang="en-US" dirty="0"/>
-              <a:t>2:35–2:45. Hoy el MVP funciona de punta a punta y está desplegado. El siguiente paso es validarlo con docentes y estudiantes reales y medir la brecha entre lo que entregan y lo que explican. [Si tienen un hallazgo real con usuarios, reemplazar esta nota y la columna derecha por ese dato: es lo que más pesa en Problemática.]</a:t>
+              <a:t>2:10–2:30. Los asistentes docentes ya son gratis, así que no competimos como otro asistente. Somos gratis para el docente y la institución paga por evidencia de comprensión, del presupuesto que hoy va a detectores: Turnitin cobra entre 1,79 y 6,50 dólares por alumno al año. Una defensa nos cuesta menos de medio centavo. Empezamos con docentes, seguimos con colegios y facultades, y luego el sector público.</a:t>
             </a:r>
             <a:endParaRPr lang="en-US" dirty="0"/>
           </a:p>
@@ -2344,8 +2434,8 @@
         </p:nvSpPr>
         <p:spPr>
           <a:xfrm>
-            <a:off x="548640" y="502920"/>
-            <a:ext cx="7315200" cy="365760"/>
+            <a:off x="548640" y="365760"/>
+            <a:ext cx="8229600" cy="320040"/>
           </a:xfrm>
           <a:prstGeom prst="rect">
             <a:avLst/>
@@ -2354,34 +2444,36 @@
           <a:ln/>
         </p:spPr>
         <p:txBody>
-          <a:bodyPr wrap="square" rtlCol="0"/>
+          <a:bodyPr wrap="square" lIns="0" tIns="0" rIns="0" bIns="0" rtlCol="0"/>
           <a:lstStyle/>
           <a:p>
             <a:pPr indent="0" marL="0">
               <a:buNone/>
             </a:pPr>
             <a:r>
-              <a:rPr lang="en-US" sz="1400" b="1" spc="200" kern="0" dirty="0">
-                <a:solidFill>
-                  <a:schemeClr val="accent2"/>
-                </a:solidFill>
-              </a:rPr>
-              <a:t>EN 30 SEGUNDOS</a:t>
-            </a:r>
-            <a:endParaRPr lang="en-US" sz="1400" dirty="0"/>
-          </a:p>
-        </p:txBody>
-      </p:sp>
-      <p:sp>
-        <p:nvSpPr>
-          <p:cNvPr id="3" name="Elevator pitch"/>
-          <p:cNvSpPr txBox="1"/>
-          <p:nvPr/>
-        </p:nvSpPr>
-        <p:spPr>
-          <a:xfrm>
-            <a:off x="548640" y="1280160"/>
-            <a:ext cx="10424160" cy="3108960"/>
+              <a:rPr lang="en-US" sz="1300" b="1" spc="200" kern="0" dirty="0">
+                <a:solidFill>
+                  <a:schemeClr val="accent1"/>
+                </a:solidFill>
+              </a:rPr>
+              <a:t>QUÉ · DÓNDE ESTAMOS</a:t>
+            </a:r>
+            <a:endParaRPr lang="en-US" sz="1300" dirty="0"/>
+          </a:p>
+        </p:txBody>
+      </p:sp>
+      <p:sp>
+        <p:nvSpPr>
+          <p:cNvPr id="3" name="Text 0"/>
+          <p:cNvSpPr/>
+          <p:nvPr>
+            <p:ph idx="101" type="title" hasCustomPrompt="1"/>
+          </p:nvPr>
+        </p:nvSpPr>
+        <p:spPr>
+          <a:xfrm>
+            <a:off x="548640" y="685800"/>
+            <a:ext cx="11094415" cy="777240"/>
           </a:xfrm>
           <a:prstGeom prst="rect">
             <a:avLst/>
@@ -2393,53 +2485,33 @@
           <a:bodyPr wrap="square" lIns="0" tIns="0" rIns="0" bIns="0" rtlCol="0" anchor="t"/>
           <a:lstStyle/>
           <a:p>
-            <a:pPr indent="0" marL="0">
-              <a:buNone/>
-            </a:pPr>
-            <a:r>
-              <a:rPr lang="en-US" sz="3000" dirty="0">
-                <a:solidFill>
-                  <a:srgbClr val="E7ECFB"/>
-                </a:solidFill>
-              </a:rPr>
-              <a:t>Para los docentes que ya no saben quién aprendió y quién le pidió la tarea a una IA, </a:t>
-            </a:r>
-            <a:pPr indent="0" marL="0">
-              <a:buNone/>
-            </a:pPr>
-            <a:r>
-              <a:rPr lang="en-US" sz="3000" b="1" dirty="0">
-                <a:solidFill>
-                  <a:srgbClr val="FFFFFF"/>
-                </a:solidFill>
-              </a:rPr>
-              <a:t>Defiéndelo rediseña sus tareas para que la nota se gane explicando el propio trabajo. </a:t>
-            </a:r>
-            <a:pPr indent="0" marL="0">
-              <a:buNone/>
-            </a:pPr>
-            <a:r>
-              <a:rPr lang="en-US" sz="3000" dirty="0">
-                <a:solidFill>
-                  <a:srgbClr val="E7ECFB"/>
-                </a:solidFill>
-              </a:rPr>
-              <a:t>A diferencia de los detectores, no acusa: pregunta. Y a diferencia de un examen oral, llega a toda la clase.</a:t>
-            </a:r>
-            <a:endParaRPr lang="en-US" sz="3000" dirty="0"/>
-          </a:p>
-        </p:txBody>
-      </p:sp>
-      <p:sp>
-        <p:nvSpPr>
-          <p:cNvPr id="4" name="Closing URL"/>
-          <p:cNvSpPr txBox="1"/>
-          <p:nvPr/>
-        </p:nvSpPr>
-        <p:spPr>
-          <a:xfrm>
-            <a:off x="548640" y="5120640"/>
-            <a:ext cx="7315200" cy="548640"/>
+            <a:pPr algn="l" indent="0" marL="0">
+              <a:buNone/>
+            </a:pPr>
+            <a:r>
+              <a:rPr lang="en-US" sz="3400" b="1" dirty="0">
+                <a:solidFill>
+                  <a:schemeClr val="tx1"/>
+                </a:solidFill>
+              </a:rPr>
+              <a:t>Un MVP que funciona hoy, ya probado por un docente</a:t>
+            </a:r>
+            <a:endParaRPr lang="en-US" sz="3400" dirty="0"/>
+          </a:p>
+        </p:txBody>
+      </p:sp>
+      <p:sp>
+        <p:nvSpPr>
+          <p:cNvPr id="4" name="Text 0"/>
+          <p:cNvSpPr/>
+          <p:nvPr>
+            <p:ph idx="102" type="body" hasCustomPrompt="1"/>
+          </p:nvPr>
+        </p:nvSpPr>
+        <p:spPr>
+          <a:xfrm>
+            <a:off x="548640" y="6355080"/>
+            <a:ext cx="10180015" cy="320040"/>
           </a:xfrm>
           <a:prstGeom prst="rect">
             <a:avLst/>
@@ -2448,6 +2520,42 @@
           <a:ln/>
         </p:spPr>
         <p:txBody>
+          <a:bodyPr wrap="square" lIns="0" tIns="0" rIns="0" bIns="0" rtlCol="0"/>
+          <a:lstStyle/>
+          <a:p>
+            <a:pPr indent="0" marL="0">
+              <a:buNone/>
+            </a:pPr>
+            <a:r>
+              <a:rPr lang="en-US" sz="1000" dirty="0">
+                <a:solidFill>
+                  <a:schemeClr val="accent4"/>
+                </a:solidFill>
+              </a:rPr>
+              <a:t>Validación sin menores de edad. Métricas del piloto definidas en el README del repositorio.</a:t>
+            </a:r>
+            <a:endParaRPr lang="en-US" sz="1000" dirty="0"/>
+          </a:p>
+        </p:txBody>
+      </p:sp>
+      <p:sp>
+        <p:nvSpPr>
+          <p:cNvPr id="5" name="Done title"/>
+          <p:cNvSpPr txBox="1"/>
+          <p:nvPr/>
+        </p:nvSpPr>
+        <p:spPr>
+          <a:xfrm>
+            <a:off x="548640" y="1783080"/>
+            <a:ext cx="5303520" cy="502920"/>
+          </a:xfrm>
+          <a:prstGeom prst="rect">
+            <a:avLst/>
+          </a:prstGeom>
+          <a:noFill/>
+          <a:ln/>
+        </p:spPr>
+        <p:txBody>
           <a:bodyPr wrap="square" lIns="0" tIns="0" rIns="0" bIns="0" rtlCol="0" anchor="ctr"/>
           <a:lstStyle/>
           <a:p>
@@ -2455,14 +2563,321 @@
               <a:buNone/>
             </a:pPr>
             <a:r>
-              <a:rPr lang="en-US" sz="2400" b="1" dirty="0">
-                <a:solidFill>
-                  <a:srgbClr val="E9B949"/>
-                </a:solidFill>
-              </a:rPr>
-              <a:t>Pruébalo: defiendelo.vercel.app</a:t>
-            </a:r>
-            <a:endParaRPr lang="en-US" sz="2400" dirty="0"/>
+              <a:rPr lang="en-US" sz="2200" b="1" dirty="0">
+                <a:solidFill>
+                  <a:srgbClr val="2340B8"/>
+                </a:solidFill>
+              </a:rPr>
+              <a:t>Ya funciona</a:t>
+            </a:r>
+            <a:endParaRPr lang="en-US" sz="2200" dirty="0"/>
+          </a:p>
+        </p:txBody>
+      </p:sp>
+      <p:sp>
+        <p:nvSpPr>
+          <p:cNvPr id="6" name="Done list"/>
+          <p:cNvSpPr txBox="1"/>
+          <p:nvPr/>
+        </p:nvSpPr>
+        <p:spPr>
+          <a:xfrm>
+            <a:off x="548640" y="2377440"/>
+            <a:ext cx="5303520" cy="2743200"/>
+          </a:xfrm>
+          <a:prstGeom prst="rect">
+            <a:avLst/>
+          </a:prstGeom>
+          <a:noFill/>
+          <a:ln/>
+        </p:spPr>
+        <p:txBody>
+          <a:bodyPr wrap="square" rtlCol="0" anchor="t"/>
+          <a:lstStyle/>
+          <a:p>
+            <a:pPr marL="342900" indent="-342900">
+              <a:spcAft>
+                <a:spcPts val="1200"/>
+              </a:spcAft>
+              <a:buSzPct val="100000"/>
+              <a:buChar char="•"/>
+            </a:pPr>
+            <a:r>
+              <a:rPr lang="en-US" sz="1700" dirty="0">
+                <a:solidFill>
+                  <a:srgbClr val="141B34"/>
+                </a:solidFill>
+              </a:rPr>
+              <a:t>MVP desplegado: rediseño, prueba de estrés, defensa y revisión docente</a:t>
+            </a:r>
+            <a:endParaRPr lang="en-US" sz="1700" dirty="0"/>
+          </a:p>
+          <a:p>
+            <a:pPr marL="342900" indent="-342900">
+              <a:spcAft>
+                <a:spcPts val="1200"/>
+              </a:spcAft>
+              <a:buSzPct val="100000"/>
+              <a:buChar char="•"/>
+            </a:pPr>
+            <a:r>
+              <a:rPr lang="en-US" sz="1700" dirty="0">
+                <a:solidFill>
+                  <a:srgbClr val="141B34"/>
+                </a:solidFill>
+              </a:rPr>
+              <a:t>9 tareas de ejemplo de 8 cursos, con PDF y clases simuladas</a:t>
+            </a:r>
+            <a:endParaRPr lang="en-US" sz="1700" dirty="0"/>
+          </a:p>
+          <a:p>
+            <a:pPr marL="342900" indent="-342900">
+              <a:spcAft>
+                <a:spcPts val="1200"/>
+              </a:spcAft>
+              <a:buSzPct val="100000"/>
+              <a:buChar char="•"/>
+            </a:pPr>
+            <a:r>
+              <a:rPr lang="en-US" sz="1700" dirty="0">
+                <a:solidFill>
+                  <a:srgbClr val="141B34"/>
+                </a:solidFill>
+              </a:rPr>
+              <a:t>154 tests automáticos; funciona sin clave de IA en modo demo</a:t>
+            </a:r>
+            <a:endParaRPr lang="en-US" sz="1700" dirty="0"/>
+          </a:p>
+        </p:txBody>
+      </p:sp>
+      <p:sp>
+        <p:nvSpPr>
+          <p:cNvPr id="7" name="Next title"/>
+          <p:cNvSpPr txBox="1"/>
+          <p:nvPr/>
+        </p:nvSpPr>
+        <p:spPr>
+          <a:xfrm>
+            <a:off x="6309360" y="1783080"/>
+            <a:ext cx="5303520" cy="502920"/>
+          </a:xfrm>
+          <a:prstGeom prst="rect">
+            <a:avLst/>
+          </a:prstGeom>
+          <a:noFill/>
+          <a:ln/>
+        </p:spPr>
+        <p:txBody>
+          <a:bodyPr wrap="square" lIns="0" tIns="0" rIns="0" bIns="0" rtlCol="0" anchor="ctr"/>
+          <a:lstStyle/>
+          <a:p>
+            <a:pPr indent="0" marL="0">
+              <a:buNone/>
+            </a:pPr>
+            <a:r>
+              <a:rPr lang="en-US" sz="2200" b="1" dirty="0">
+                <a:solidFill>
+                  <a:srgbClr val="B8461F"/>
+                </a:solidFill>
+              </a:rPr>
+              <a:t>Validación: en marcha</a:t>
+            </a:r>
+            <a:endParaRPr lang="en-US" sz="2200" dirty="0"/>
+          </a:p>
+        </p:txBody>
+      </p:sp>
+      <p:sp>
+        <p:nvSpPr>
+          <p:cNvPr id="8" name="Next list"/>
+          <p:cNvSpPr txBox="1"/>
+          <p:nvPr/>
+        </p:nvSpPr>
+        <p:spPr>
+          <a:xfrm>
+            <a:off x="6309360" y="2377440"/>
+            <a:ext cx="5303520" cy="2743200"/>
+          </a:xfrm>
+          <a:prstGeom prst="rect">
+            <a:avLst/>
+          </a:prstGeom>
+          <a:noFill/>
+          <a:ln/>
+        </p:spPr>
+        <p:txBody>
+          <a:bodyPr wrap="square" rtlCol="0" anchor="t"/>
+          <a:lstStyle/>
+          <a:p>
+            <a:pPr marL="342900" indent="-342900">
+              <a:spcAft>
+                <a:spcPts val="1200"/>
+              </a:spcAft>
+              <a:buSzPct val="100000"/>
+              <a:buChar char="•"/>
+            </a:pPr>
+            <a:r>
+              <a:rPr lang="en-US" sz="1700" dirty="0">
+                <a:solidFill>
+                  <a:srgbClr val="141B34"/>
+                </a:solidFill>
+              </a:rPr>
+              <a:t>1 docente de secundaria ya probó la plataforma y cambiamos el diseño</a:t>
+            </a:r>
+            <a:endParaRPr lang="en-US" sz="1700" dirty="0"/>
+          </a:p>
+          <a:p>
+            <a:pPr marL="342900" indent="-342900">
+              <a:spcAft>
+                <a:spcPts val="1200"/>
+              </a:spcAft>
+              <a:buSzPct val="100000"/>
+              <a:buChar char="•"/>
+            </a:pPr>
+            <a:r>
+              <a:rPr lang="en-US" sz="1700" dirty="0">
+                <a:solidFill>
+                  <a:srgbClr val="141B34"/>
+                </a:solidFill>
+              </a:rPr>
+              <a:t>Ampliar a más docentes y a 5–10 estudiantes</a:t>
+            </a:r>
+            <a:endParaRPr lang="en-US" sz="1700" dirty="0"/>
+          </a:p>
+          <a:p>
+            <a:pPr marL="342900" indent="-342900">
+              <a:spcAft>
+                <a:spcPts val="1200"/>
+              </a:spcAft>
+              <a:buSzPct val="100000"/>
+              <a:buChar char="•"/>
+            </a:pPr>
+            <a:r>
+              <a:rPr lang="en-US" sz="1700" dirty="0">
+                <a:solidFill>
+                  <a:srgbClr val="141B34"/>
+                </a:solidFill>
+              </a:rPr>
+              <a:t>Medir la brecha entre lo entregado y lo explicado</a:t>
+            </a:r>
+            <a:endParaRPr lang="en-US" sz="1700" dirty="0"/>
+          </a:p>
+        </p:txBody>
+      </p:sp>
+      <p:sp>
+        <p:nvSpPr>
+          <p:cNvPr id="9" name="Pilot goal card"/>
+          <p:cNvSpPr/>
+          <p:nvPr/>
+        </p:nvSpPr>
+        <p:spPr>
+          <a:xfrm>
+            <a:off x="548640" y="5212080"/>
+            <a:ext cx="11094415" cy="868680"/>
+          </a:xfrm>
+          <a:prstGeom prst="roundRect">
+            <a:avLst>
+              <a:gd name="adj" fmla="val 12632"/>
+            </a:avLst>
+          </a:prstGeom>
+          <a:solidFill>
+            <a:srgbClr val="FBF0D4"/>
+          </a:solidFill>
+          <a:ln w="12700">
+            <a:solidFill>
+              <a:srgbClr val="FBF0D4"/>
+            </a:solidFill>
+            <a:prstDash val="solid"/>
+          </a:ln>
+        </p:spPr>
+      </p:sp>
+      <p:sp>
+        <p:nvSpPr>
+          <p:cNvPr id="10" name="Pilot goal"/>
+          <p:cNvSpPr txBox="1"/>
+          <p:nvPr/>
+        </p:nvSpPr>
+        <p:spPr>
+          <a:xfrm>
+            <a:off x="822960" y="5257800"/>
+            <a:ext cx="10545775" cy="777240"/>
+          </a:xfrm>
+          <a:prstGeom prst="rect">
+            <a:avLst/>
+          </a:prstGeom>
+          <a:noFill/>
+          <a:ln/>
+        </p:spPr>
+        <p:txBody>
+          <a:bodyPr wrap="square" lIns="0" tIns="0" rIns="0" bIns="0" rtlCol="0" anchor="ctr"/>
+          <a:lstStyle/>
+          <a:p>
+            <a:pPr indent="0" marL="0">
+              <a:buNone/>
+            </a:pPr>
+            <a:r>
+              <a:rPr lang="en-US" sz="1800" b="1" dirty="0">
+                <a:solidFill>
+                  <a:srgbClr val="141B34"/>
+                </a:solidFill>
+              </a:rPr>
+              <a:t>Meta del piloto: </a:t>
+            </a:r>
+            <a:pPr indent="0" marL="0">
+              <a:buNone/>
+            </a:pPr>
+            <a:r>
+              <a:rPr lang="en-US" sz="1800" dirty="0">
+                <a:solidFill>
+                  <a:srgbClr val="141B34"/>
+                </a:solidFill>
+              </a:rPr>
+              <a:t>que la IA sola saque menos de la mitad de la nota en la tarea rediseñada.</a:t>
+            </a:r>
+            <a:endParaRPr lang="en-US" sz="1800" dirty="0"/>
+          </a:p>
+        </p:txBody>
+      </p:sp>
+      <p:sp>
+        <p:nvSpPr>
+          <p:cNvPr id="25" name="Slide Number Placeholder 0"/>
+          <p:cNvSpPr>
+            <a:spLocks noGrp="1"/>
+          </p:cNvSpPr>
+          <p:nvPr>
+            <p:ph type="sldNum" sz="quarter" idx="4294967295"/>
+          </p:nvPr>
+        </p:nvSpPr>
+        <p:spPr>
+          <a:xfrm>
+            <a:off x="11277295" y="6355080"/>
+            <a:ext cx="411480" cy="320040"/>
+          </a:xfrm>
+          <a:prstGeom prst="rect">
+            <a:avLst/>
+          </a:prstGeom>
+          <a:extLst>
+            <a:ext uri="{C572A759-6A51-4108-AA02-DFA0A04FC94B}">
+              <ma14:wrappingTextBoxFlag xmlns:ma14="http://schemas.microsoft.com/office/mac/drawingml/2011/main" val="0"/>
+            </a:ext>
+          </a:extLst>
+        </p:spPr>
+        <p:txBody>
+          <a:bodyPr/>
+          <a:lstStyle>
+            <a:lvl1pPr>
+              <a:defRPr sz="1000">
+                <a:solidFill>
+                  <a:srgbClr val="4F5568"/>
+                </a:solidFill>
+              </a:defRPr>
+            </a:lvl1pPr>
+          </a:lstStyle>
+          <a:p>
+            <a:pPr algn="r"/>
+            <a:fld id="{F7021451-1387-4CA6-816F-3879F97B5CBC}" type="slidenum">
+              <a:rPr b="0" lang="en-US"/>
+              <a:t>10</a:t>
+            </a:fld>
+            <a:endParaRPr lang="en-US"/>
           </a:p>
         </p:txBody>
       </p:sp>
@@ -2501,6 +2916,163 @@
         </p:nvSpPr>
         <p:spPr>
           <a:xfrm>
+            <a:off x="548640" y="502920"/>
+            <a:ext cx="7315200" cy="365760"/>
+          </a:xfrm>
+          <a:prstGeom prst="rect">
+            <a:avLst/>
+          </a:prstGeom>
+          <a:noFill/>
+          <a:ln/>
+        </p:spPr>
+        <p:txBody>
+          <a:bodyPr wrap="square" rtlCol="0"/>
+          <a:lstStyle/>
+          <a:p>
+            <a:pPr indent="0" marL="0">
+              <a:buNone/>
+            </a:pPr>
+            <a:r>
+              <a:rPr lang="en-US" sz="1400" b="1" spc="200" kern="0" dirty="0">
+                <a:solidFill>
+                  <a:schemeClr val="accent2"/>
+                </a:solidFill>
+              </a:rPr>
+              <a:t>EN 30 SEGUNDOS</a:t>
+            </a:r>
+            <a:endParaRPr lang="en-US" sz="1400" dirty="0"/>
+          </a:p>
+        </p:txBody>
+      </p:sp>
+      <p:sp>
+        <p:nvSpPr>
+          <p:cNvPr id="3" name="Elevator pitch"/>
+          <p:cNvSpPr txBox="1"/>
+          <p:nvPr/>
+        </p:nvSpPr>
+        <p:spPr>
+          <a:xfrm>
+            <a:off x="548640" y="1280160"/>
+            <a:ext cx="10424160" cy="3108960"/>
+          </a:xfrm>
+          <a:prstGeom prst="rect">
+            <a:avLst/>
+          </a:prstGeom>
+          <a:noFill/>
+          <a:ln/>
+        </p:spPr>
+        <p:txBody>
+          <a:bodyPr wrap="square" lIns="0" tIns="0" rIns="0" bIns="0" rtlCol="0" anchor="t"/>
+          <a:lstStyle/>
+          <a:p>
+            <a:pPr indent="0" marL="0">
+              <a:buNone/>
+            </a:pPr>
+            <a:r>
+              <a:rPr lang="en-US" sz="3000" dirty="0">
+                <a:solidFill>
+                  <a:srgbClr val="E7ECFB"/>
+                </a:solidFill>
+              </a:rPr>
+              <a:t>Para los docentes que ya no saben quién aprendió y quién le pidió la tarea a una IA, </a:t>
+            </a:r>
+            <a:pPr indent="0" marL="0">
+              <a:buNone/>
+            </a:pPr>
+            <a:r>
+              <a:rPr lang="en-US" sz="3000" b="1" dirty="0">
+                <a:solidFill>
+                  <a:srgbClr val="FFFFFF"/>
+                </a:solidFill>
+              </a:rPr>
+              <a:t>Defiéndelo rediseña sus tareas para que la nota se gane explicando el propio trabajo. </a:t>
+            </a:r>
+            <a:pPr indent="0" marL="0">
+              <a:buNone/>
+            </a:pPr>
+            <a:r>
+              <a:rPr lang="en-US" sz="3000" dirty="0">
+                <a:solidFill>
+                  <a:srgbClr val="E7ECFB"/>
+                </a:solidFill>
+              </a:rPr>
+              <a:t>A diferencia de los detectores, no acusa: pregunta. Y a diferencia de un examen oral, llega a toda la clase.</a:t>
+            </a:r>
+            <a:endParaRPr lang="en-US" sz="3000" dirty="0"/>
+          </a:p>
+        </p:txBody>
+      </p:sp>
+      <p:sp>
+        <p:nvSpPr>
+          <p:cNvPr id="4" name="Closing URL"/>
+          <p:cNvSpPr txBox="1"/>
+          <p:nvPr/>
+        </p:nvSpPr>
+        <p:spPr>
+          <a:xfrm>
+            <a:off x="548640" y="5120640"/>
+            <a:ext cx="7315200" cy="548640"/>
+          </a:xfrm>
+          <a:prstGeom prst="rect">
+            <a:avLst/>
+          </a:prstGeom>
+          <a:noFill/>
+          <a:ln/>
+        </p:spPr>
+        <p:txBody>
+          <a:bodyPr wrap="square" lIns="0" tIns="0" rIns="0" bIns="0" rtlCol="0" anchor="ctr"/>
+          <a:lstStyle/>
+          <a:p>
+            <a:pPr indent="0" marL="0">
+              <a:buNone/>
+            </a:pPr>
+            <a:r>
+              <a:rPr lang="en-US" sz="2400" b="1" dirty="0">
+                <a:solidFill>
+                  <a:srgbClr val="E9B949"/>
+                </a:solidFill>
+              </a:rPr>
+              <a:t>Pruébalo: defiendelo.vercel.app</a:t>
+            </a:r>
+            <a:endParaRPr lang="en-US" sz="2400" dirty="0"/>
+          </a:p>
+        </p:txBody>
+      </p:sp>
+    </p:spTree>
+  </p:cSld>
+  <p:clrMapOvr>
+    <a:masterClrMapping/>
+  </p:clrMapOvr>
+</p:sld>
+</file>
+
+<file path=ppt/slides/slide12.xml><?xml version="1.0" encoding="utf-8"?>
+<p:sld xmlns:a="http://schemas.openxmlformats.org/drawingml/2006/main" xmlns:r="http://schemas.openxmlformats.org/officeDocument/2006/relationships" xmlns:p="http://schemas.openxmlformats.org/presentationml/2006/main">
+  <p:cSld name="Slide 12">
+    <p:spTree>
+      <p:nvGrpSpPr>
+        <p:cNvPr id="1" name=""/>
+        <p:cNvGrpSpPr/>
+        <p:nvPr/>
+      </p:nvGrpSpPr>
+      <p:grpSpPr>
+        <a:xfrm>
+          <a:off x="0" y="0"/>
+          <a:ext cx="0" cy="0"/>
+          <a:chOff x="0" y="0"/>
+          <a:chExt cx="0" cy="0"/>
+        </a:xfrm>
+      </p:grpSpPr>
+      <p:sp>
+        <p:nvSpPr>
+          <p:cNvPr id="2" name="Text 0"/>
+          <p:cNvSpPr/>
+          <p:nvPr>
+            <p:ph idx="100" type="body" hasCustomPrompt="1"/>
+          </p:nvPr>
+        </p:nvSpPr>
+        <p:spPr>
+          <a:xfrm>
             <a:off x="548640" y="365760"/>
             <a:ext cx="8229600" cy="320040"/>
           </a:xfrm>
@@ -2607,7 +3179,7 @@
       </p:sp>
       <p:graphicFrame>
         <p:nvGraphicFramePr>
-          <p:cNvPr id="12" name="Jury Q&amp;A table"/>
+          <p:cNvPr id="13" name="Jury Q&amp;A table"/>
           <p:cNvGraphicFramePr>
             <a:graphicFrameLocks noGrp="1"/>
           </p:cNvGraphicFramePr>
@@ -3334,7 +3906,7 @@
             <a:pPr algn="r"/>
             <a:fld id="{F7021451-1387-4CA6-816F-3879F97B5CBC}" type="slidenum">
               <a:rPr b="0" lang="en-US"/>
-              <a:t>11</a:t>
+              <a:t>12</a:t>
             </a:fld>
             <a:endParaRPr lang="en-US"/>
           </a:p>
@@ -3925,7 +4497,7 @@
                   <a:schemeClr val="accent1"/>
                 </a:solidFill>
               </a:rPr>
-              <a:t>POR QUÉ · CÓMO LLEGAMOS AQUÍ</a:t>
+              <a:t>POR QUÉ · LO QUE NOS DIJO UN DOCENTE</a:t>
             </a:r>
             <a:endParaRPr lang="en-US" sz="1300" dirty="0"/>
           </a:p>
@@ -3963,7 +4535,7 @@
                   <a:schemeClr val="tx1"/>
                 </a:solidFill>
               </a:rPr>
-              <a:t>De cuatro grietas a una conclusión</a:t>
+              <a:t>Validamos el problema con un docente de secundaria</a:t>
             </a:r>
             <a:endParaRPr lang="en-US" sz="3400" dirty="0"/>
           </a:p>
@@ -4001,7 +4573,7 @@
                   <a:schemeClr val="accent4"/>
                 </a:solidFill>
               </a:rPr>
-              <a:t>Fuentes: uDocz vía El Peruano · Anthropic Education Report 2025 · Bastani et al. 2025 · InfoQ 2025. Detalle en docs/investigacion/</a:t>
+              <a:t>Conversación y prueba por Meet con C., docente de un colegio público de secundaria. Registro completo en docs/validacion/</a:t>
             </a:r>
             <a:endParaRPr lang="en-US" sz="1000" dirty="0"/>
           </a:p>
@@ -4009,32 +4581,59 @@
       </p:sp>
       <p:sp>
         <p:nvSpPr>
-          <p:cNvPr id="5" name="Analizamos las 4 grietas del reto circle"/>
+          <p:cNvPr id="5" name="Teacher profile card"/>
           <p:cNvSpPr/>
           <p:nvPr/>
         </p:nvSpPr>
         <p:spPr>
           <a:xfrm>
             <a:off x="548640" y="1783080"/>
-            <a:ext cx="822960" cy="822960"/>
-          </a:xfrm>
-          <a:prstGeom prst="ellipse">
-            <a:avLst/>
+            <a:ext cx="3566160" cy="4206240"/>
+          </a:xfrm>
+          <a:prstGeom prst="roundRect">
+            <a:avLst>
+              <a:gd name="adj" fmla="val 3077"/>
+            </a:avLst>
           </a:prstGeom>
           <a:solidFill>
-            <a:srgbClr val="E7ECFB"/>
+            <a:srgbClr val="141B34"/>
           </a:solidFill>
           <a:ln w="12700">
             <a:solidFill>
-              <a:srgbClr val="E7ECFB"/>
+              <a:srgbClr val="141B34"/>
             </a:solidFill>
             <a:prstDash val="solid"/>
           </a:ln>
         </p:spPr>
       </p:sp>
+      <p:sp>
+        <p:nvSpPr>
+          <p:cNvPr id="6" name="Teacher circle"/>
+          <p:cNvSpPr/>
+          <p:nvPr/>
+        </p:nvSpPr>
+        <p:spPr>
+          <a:xfrm>
+            <a:off x="868680" y="2103120"/>
+            <a:ext cx="1005840" cy="1005840"/>
+          </a:xfrm>
+          <a:prstGeom prst="ellipse">
+            <a:avLst/>
+          </a:prstGeom>
+          <a:solidFill>
+            <a:srgbClr val="2340B8"/>
+          </a:solidFill>
+          <a:ln w="12700">
+            <a:solidFill>
+              <a:srgbClr val="2340B8"/>
+            </a:solidFill>
+            <a:prstDash val="solid"/>
+          </a:ln>
+        </p:spPr>
+      </p:sp>
       <p:pic>
         <p:nvPicPr>
-          <p:cNvPr id="6" name="Image 0" descr="Analizamos las 4 grietas del reto">    </p:cNvPr>
+          <p:cNvPr id="7" name="Image 0" descr="Teacher">    </p:cNvPr>
           <p:cNvPicPr>
             <a:picLocks noChangeAspect="1"/>
           </p:cNvPicPr>
@@ -4048,8 +4647,8 @@
         </p:blipFill>
         <p:spPr>
           <a:xfrm>
-            <a:off x="746150" y="1980590"/>
-            <a:ext cx="427939" cy="427939"/>
+            <a:off x="1110082" y="2344522"/>
+            <a:ext cx="523037" cy="523037"/>
           </a:xfrm>
           <a:prstGeom prst="rect">
             <a:avLst/>
@@ -4058,14 +4657,14 @@
       </p:pic>
       <p:sp>
         <p:nvSpPr>
-          <p:cNvPr id="7" name="Step 1 title"/>
+          <p:cNvPr id="8" name="Teacher name"/>
           <p:cNvSpPr txBox="1"/>
           <p:nvPr/>
         </p:nvSpPr>
         <p:spPr>
           <a:xfrm>
-            <a:off x="548640" y="2743200"/>
-            <a:ext cx="2560320" cy="868680"/>
+            <a:off x="868680" y="3291840"/>
+            <a:ext cx="3017520" cy="822960"/>
           </a:xfrm>
           <a:prstGeom prst="rect">
             <a:avLst/>
@@ -4081,27 +4680,27 @@
               <a:buNone/>
             </a:pPr>
             <a:r>
-              <a:rPr lang="en-US" sz="1700" b="1" dirty="0">
-                <a:solidFill>
-                  <a:srgbClr val="141B34"/>
-                </a:solidFill>
-              </a:rPr>
-              <a:t>1. Analizamos las 4 grietas del reto</a:t>
-            </a:r>
-            <a:endParaRPr lang="en-US" sz="1700" dirty="0"/>
-          </a:p>
-        </p:txBody>
-      </p:sp>
-      <p:sp>
-        <p:nvSpPr>
-          <p:cNvPr id="8" name="Step 1 detail"/>
+              <a:rPr lang="en-US" sz="2100" b="1" dirty="0">
+                <a:solidFill>
+                  <a:srgbClr val="FFFFFF"/>
+                </a:solidFill>
+              </a:rPr>
+              <a:t>C., docente de secundaria</a:t>
+            </a:r>
+            <a:endParaRPr lang="en-US" sz="2100" dirty="0"/>
+          </a:p>
+        </p:txBody>
+      </p:sp>
+      <p:sp>
+        <p:nvSpPr>
+          <p:cNvPr id="9" name="Teacher profile"/>
           <p:cNvSpPr txBox="1"/>
           <p:nvPr/>
         </p:nvSpPr>
         <p:spPr>
           <a:xfrm>
-            <a:off x="548640" y="3611880"/>
-            <a:ext cx="2560320" cy="1097280"/>
+            <a:off x="868680" y="4114800"/>
+            <a:ext cx="3017520" cy="1645920"/>
           </a:xfrm>
           <a:prstGeom prst="rect">
             <a:avLst/>
@@ -4117,101 +4716,27 @@
               <a:buNone/>
             </a:pPr>
             <a:r>
-              <a:rPr lang="en-US" sz="1400" dirty="0">
-                <a:solidFill>
-                  <a:srgbClr val="4F5568"/>
-                </a:solidFill>
-              </a:rPr>
-              <a:t>Elegimos la 02: es la de prueba más limpia, con trabajos reales en el evento</a:t>
-            </a:r>
-            <a:endParaRPr lang="en-US" sz="1400" dirty="0"/>
-          </a:p>
-        </p:txBody>
-      </p:sp>
-      <p:sp>
-        <p:nvSpPr>
-          <p:cNvPr id="9" name="Arrow 1"/>
-          <p:cNvSpPr/>
-          <p:nvPr/>
-        </p:nvSpPr>
-        <p:spPr>
-          <a:xfrm>
-            <a:off x="1600200" y="2011680"/>
-            <a:ext cx="1463040" cy="365760"/>
-          </a:xfrm>
-          <a:prstGeom prst="rightArrow">
-            <a:avLst/>
-          </a:prstGeom>
-          <a:solidFill>
-            <a:srgbClr val="D9DCE5"/>
-          </a:solidFill>
-          <a:ln w="12700">
-            <a:solidFill>
-              <a:srgbClr val="D9DCE5"/>
-            </a:solidFill>
-            <a:prstDash val="solid"/>
-          </a:ln>
-        </p:spPr>
-      </p:sp>
-      <p:sp>
-        <p:nvSpPr>
-          <p:cNvPr id="10" name="El problema es de uso, no de acceso circle"/>
-          <p:cNvSpPr/>
-          <p:nvPr/>
-        </p:nvSpPr>
-        <p:spPr>
-          <a:xfrm>
-            <a:off x="3355848" y="1783080"/>
-            <a:ext cx="822960" cy="822960"/>
-          </a:xfrm>
-          <a:prstGeom prst="ellipse">
-            <a:avLst/>
-          </a:prstGeom>
-          <a:solidFill>
-            <a:srgbClr val="E7ECFB"/>
-          </a:solidFill>
-          <a:ln w="12700">
-            <a:solidFill>
-              <a:srgbClr val="E7ECFB"/>
-            </a:solidFill>
-            <a:prstDash val="solid"/>
-          </a:ln>
-        </p:spPr>
-      </p:sp>
-      <p:pic>
-        <p:nvPicPr>
-          <p:cNvPr id="11" name="Image 1" descr="El problema es de uso, no de acceso">    </p:cNvPr>
-          <p:cNvPicPr>
-            <a:picLocks noChangeAspect="1"/>
-          </p:cNvPicPr>
-          <p:nvPr/>
-        </p:nvPicPr>
-        <p:blipFill>
-          <a:blip r:embed="rId2"/>
-          <a:stretch>
-            <a:fillRect/>
-          </a:stretch>
-        </p:blipFill>
-        <p:spPr>
-          <a:xfrm>
-            <a:off x="3553358" y="1980590"/>
-            <a:ext cx="427939" cy="427939"/>
-          </a:xfrm>
-          <a:prstGeom prst="rect">
-            <a:avLst/>
-          </a:prstGeom>
-        </p:spPr>
-      </p:pic>
-      <p:sp>
-        <p:nvSpPr>
-          <p:cNvPr id="12" name="Step 2 title"/>
+              <a:rPr lang="en-US" sz="1500" dirty="0">
+                <a:solidFill>
+                  <a:srgbClr val="E7ECFB"/>
+                </a:solidFill>
+              </a:rPr>
+              <a:t>Colegio público. Sus colegas no usan IA de forma habitual; sus alumnos sí. Probó la plataforma.</a:t>
+            </a:r>
+            <a:endParaRPr lang="en-US" sz="1500" dirty="0"/>
+          </a:p>
+        </p:txBody>
+      </p:sp>
+      <p:sp>
+        <p:nvSpPr>
+          <p:cNvPr id="10" name="Learning 1 label"/>
           <p:cNvSpPr txBox="1"/>
           <p:nvPr/>
         </p:nvSpPr>
         <p:spPr>
           <a:xfrm>
-            <a:off x="3355848" y="2743200"/>
-            <a:ext cx="2560320" cy="868680"/>
+            <a:off x="4434840" y="1783080"/>
+            <a:ext cx="1737360" cy="914400"/>
           </a:xfrm>
           <a:prstGeom prst="rect">
             <a:avLst/>
@@ -4227,27 +4752,27 @@
               <a:buNone/>
             </a:pPr>
             <a:r>
-              <a:rPr lang="en-US" sz="1700" b="1" dirty="0">
-                <a:solidFill>
-                  <a:srgbClr val="141B34"/>
-                </a:solidFill>
-              </a:rPr>
-              <a:t>2. El problema es de uso, no de acceso</a:t>
-            </a:r>
-            <a:endParaRPr lang="en-US" sz="1700" dirty="0"/>
-          </a:p>
-        </p:txBody>
-      </p:sp>
-      <p:sp>
-        <p:nvSpPr>
-          <p:cNvPr id="13" name="Step 2 detail"/>
+              <a:rPr lang="en-US" sz="1800" b="1" dirty="0">
+                <a:solidFill>
+                  <a:srgbClr val="4F5568"/>
+                </a:solidFill>
+              </a:rPr>
+              <a:t>Asumíamos</a:t>
+            </a:r>
+            <a:endParaRPr lang="en-US" sz="1800" dirty="0"/>
+          </a:p>
+        </p:txBody>
+      </p:sp>
+      <p:sp>
+        <p:nvSpPr>
+          <p:cNvPr id="11" name="Learning 1 text"/>
           <p:cNvSpPr txBox="1"/>
           <p:nvPr/>
         </p:nvSpPr>
         <p:spPr>
           <a:xfrm>
-            <a:off x="3355848" y="3611880"/>
-            <a:ext cx="2560320" cy="1097280"/>
+            <a:off x="6263640" y="1783080"/>
+            <a:ext cx="5394960" cy="914400"/>
           </a:xfrm>
           <a:prstGeom prst="rect">
             <a:avLst/>
@@ -4263,101 +4788,27 @@
               <a:buNone/>
             </a:pPr>
             <a:r>
-              <a:rPr lang="en-US" sz="1400" dirty="0">
-                <a:solidFill>
-                  <a:srgbClr val="4F5568"/>
-                </a:solidFill>
-              </a:rPr>
-              <a:t>95 % de universitarios usa IA; solo 41 % de forma efectiva (uDocz)</a:t>
-            </a:r>
-            <a:endParaRPr lang="en-US" sz="1400" dirty="0"/>
-          </a:p>
-        </p:txBody>
-      </p:sp>
-      <p:sp>
-        <p:nvSpPr>
-          <p:cNvPr id="14" name="Arrow 2"/>
-          <p:cNvSpPr/>
-          <p:nvPr/>
-        </p:nvSpPr>
-        <p:spPr>
-          <a:xfrm>
-            <a:off x="4407408" y="2011680"/>
-            <a:ext cx="1463040" cy="365760"/>
-          </a:xfrm>
-          <a:prstGeom prst="rightArrow">
-            <a:avLst/>
-          </a:prstGeom>
-          <a:solidFill>
-            <a:srgbClr val="D9DCE5"/>
-          </a:solidFill>
-          <a:ln w="12700">
-            <a:solidFill>
-              <a:srgbClr val="D9DCE5"/>
-            </a:solidFill>
-            <a:prstDash val="solid"/>
-          </a:ln>
-        </p:spPr>
-      </p:sp>
-      <p:sp>
-        <p:nvSpPr>
-          <p:cNvPr id="15" name="Se delega lo difícil circle"/>
-          <p:cNvSpPr/>
-          <p:nvPr/>
-        </p:nvSpPr>
-        <p:spPr>
-          <a:xfrm>
-            <a:off x="6163056" y="1783080"/>
-            <a:ext cx="822960" cy="822960"/>
-          </a:xfrm>
-          <a:prstGeom prst="ellipse">
-            <a:avLst/>
-          </a:prstGeom>
-          <a:solidFill>
-            <a:srgbClr val="E7ECFB"/>
-          </a:solidFill>
-          <a:ln w="12700">
-            <a:solidFill>
-              <a:srgbClr val="E7ECFB"/>
-            </a:solidFill>
-            <a:prstDash val="solid"/>
-          </a:ln>
-        </p:spPr>
-      </p:sp>
-      <p:pic>
-        <p:nvPicPr>
-          <p:cNvPr id="16" name="Image 2" descr="Se delega lo difícil">    </p:cNvPr>
-          <p:cNvPicPr>
-            <a:picLocks noChangeAspect="1"/>
-          </p:cNvPicPr>
-          <p:nvPr/>
-        </p:nvPicPr>
-        <p:blipFill>
-          <a:blip r:embed="rId3"/>
-          <a:stretch>
-            <a:fillRect/>
-          </a:stretch>
-        </p:blipFill>
-        <p:spPr>
-          <a:xfrm>
-            <a:off x="6360566" y="1980590"/>
-            <a:ext cx="427939" cy="427939"/>
-          </a:xfrm>
-          <a:prstGeom prst="rect">
-            <a:avLst/>
-          </a:prstGeom>
-        </p:spPr>
-      </p:pic>
-      <p:sp>
-        <p:nvSpPr>
-          <p:cNvPr id="17" name="Step 3 title"/>
+              <a:rPr lang="en-US" sz="1500" dirty="0">
+                <a:solidFill>
+                  <a:srgbClr val="141B34"/>
+                </a:solidFill>
+              </a:rPr>
+              <a:t>Que los alumnos resolvían todas sus tareas con IA y no les quedaba el aprendizaje.</a:t>
+            </a:r>
+            <a:endParaRPr lang="en-US" sz="1500" dirty="0"/>
+          </a:p>
+        </p:txBody>
+      </p:sp>
+      <p:sp>
+        <p:nvSpPr>
+          <p:cNvPr id="12" name="Learning 2 label"/>
           <p:cNvSpPr txBox="1"/>
           <p:nvPr/>
         </p:nvSpPr>
         <p:spPr>
           <a:xfrm>
-            <a:off x="6163056" y="2743200"/>
-            <a:ext cx="2560320" cy="868680"/>
+            <a:off x="4434840" y="2852928"/>
+            <a:ext cx="1737360" cy="914400"/>
           </a:xfrm>
           <a:prstGeom prst="rect">
             <a:avLst/>
@@ -4373,27 +4824,27 @@
               <a:buNone/>
             </a:pPr>
             <a:r>
-              <a:rPr lang="en-US" sz="1700" b="1" dirty="0">
-                <a:solidFill>
-                  <a:srgbClr val="141B34"/>
-                </a:solidFill>
-              </a:rPr>
-              <a:t>3. Se delega lo difícil</a:t>
-            </a:r>
-            <a:endParaRPr lang="en-US" sz="1700" dirty="0"/>
-          </a:p>
-        </p:txBody>
-      </p:sp>
-      <p:sp>
-        <p:nvSpPr>
-          <p:cNvPr id="18" name="Step 3 detail"/>
+              <a:rPr lang="en-US" sz="1800" b="1" dirty="0">
+                <a:solidFill>
+                  <a:srgbClr val="2340B8"/>
+                </a:solidFill>
+              </a:rPr>
+              <a:t>Aprendimos</a:t>
+            </a:r>
+            <a:endParaRPr lang="en-US" sz="1800" dirty="0"/>
+          </a:p>
+        </p:txBody>
+      </p:sp>
+      <p:sp>
+        <p:nvSpPr>
+          <p:cNvPr id="13" name="Learning 2 text"/>
           <p:cNvSpPr txBox="1"/>
           <p:nvPr/>
         </p:nvSpPr>
         <p:spPr>
           <a:xfrm>
-            <a:off x="6163056" y="3611880"/>
-            <a:ext cx="2560320" cy="1097280"/>
+            <a:off x="6263640" y="2852928"/>
+            <a:ext cx="5394960" cy="914400"/>
           </a:xfrm>
           <a:prstGeom prst="rect">
             <a:avLst/>
@@ -4409,101 +4860,27 @@
               <a:buNone/>
             </a:pPr>
             <a:r>
-              <a:rPr lang="en-US" sz="1400" dirty="0">
-                <a:solidFill>
-                  <a:srgbClr val="4F5568"/>
-                </a:solidFill>
-              </a:rPr>
-              <a:t>≈47 % de las conversaciones piden la respuesta directa; la IA crea y analiza</a:t>
-            </a:r>
-            <a:endParaRPr lang="en-US" sz="1400" dirty="0"/>
-          </a:p>
-        </p:txBody>
-      </p:sp>
-      <p:sp>
-        <p:nvSpPr>
-          <p:cNvPr id="19" name="Arrow 3"/>
-          <p:cNvSpPr/>
-          <p:nvPr/>
-        </p:nvSpPr>
-        <p:spPr>
-          <a:xfrm>
-            <a:off x="7214616" y="2011680"/>
-            <a:ext cx="1463040" cy="365760"/>
-          </a:xfrm>
-          <a:prstGeom prst="rightArrow">
-            <a:avLst/>
-          </a:prstGeom>
-          <a:solidFill>
-            <a:srgbClr val="D9DCE5"/>
-          </a:solidFill>
-          <a:ln w="12700">
-            <a:solidFill>
-              <a:srgbClr val="D9DCE5"/>
-            </a:solidFill>
-            <a:prstDash val="solid"/>
-          </a:ln>
-        </p:spPr>
-      </p:sp>
-      <p:sp>
-        <p:nvSpPr>
-          <p:cNvPr id="20" name="Los tutores no bastan circle"/>
-          <p:cNvSpPr/>
-          <p:nvPr/>
-        </p:nvSpPr>
-        <p:spPr>
-          <a:xfrm>
-            <a:off x="8970264" y="1783080"/>
-            <a:ext cx="822960" cy="822960"/>
-          </a:xfrm>
-          <a:prstGeom prst="ellipse">
-            <a:avLst/>
-          </a:prstGeom>
-          <a:solidFill>
-            <a:srgbClr val="E7ECFB"/>
-          </a:solidFill>
-          <a:ln w="12700">
-            <a:solidFill>
-              <a:srgbClr val="E7ECFB"/>
-            </a:solidFill>
-            <a:prstDash val="solid"/>
-          </a:ln>
-        </p:spPr>
-      </p:sp>
-      <p:pic>
-        <p:nvPicPr>
-          <p:cNvPr id="21" name="Image 3" descr="Los tutores no bastan">    </p:cNvPr>
-          <p:cNvPicPr>
-            <a:picLocks noChangeAspect="1"/>
-          </p:cNvPicPr>
-          <p:nvPr/>
-        </p:nvPicPr>
-        <p:blipFill>
-          <a:blip r:embed="rId4"/>
-          <a:stretch>
-            <a:fillRect/>
-          </a:stretch>
-        </p:blipFill>
-        <p:spPr>
-          <a:xfrm>
-            <a:off x="9167774" y="1980590"/>
-            <a:ext cx="427939" cy="427939"/>
-          </a:xfrm>
-          <a:prstGeom prst="rect">
-            <a:avLst/>
-          </a:prstGeom>
-        </p:spPr>
-      </p:pic>
-      <p:sp>
-        <p:nvSpPr>
-          <p:cNvPr id="22" name="Step 4 title"/>
+              <a:rPr lang="en-US" sz="1500" dirty="0">
+                <a:solidFill>
+                  <a:srgbClr val="141B34"/>
+                </a:solidFill>
+              </a:rPr>
+              <a:t>La IA siempre va a estar presente: hay que calificar a los alumnos por sus soluciones. No sintió que la IA hiciera todo, sino una nueva forma de calificar.</a:t>
+            </a:r>
+            <a:endParaRPr lang="en-US" sz="1500" dirty="0"/>
+          </a:p>
+        </p:txBody>
+      </p:sp>
+      <p:sp>
+        <p:nvSpPr>
+          <p:cNvPr id="14" name="Learning 3 label"/>
           <p:cNvSpPr txBox="1"/>
           <p:nvPr/>
         </p:nvSpPr>
         <p:spPr>
           <a:xfrm>
-            <a:off x="8970264" y="2743200"/>
-            <a:ext cx="2560320" cy="868680"/>
+            <a:off x="4434840" y="3922776"/>
+            <a:ext cx="1737360" cy="914400"/>
           </a:xfrm>
           <a:prstGeom prst="rect">
             <a:avLst/>
@@ -4519,27 +4896,27 @@
               <a:buNone/>
             </a:pPr>
             <a:r>
-              <a:rPr lang="en-US" sz="1700" b="1" dirty="0">
-                <a:solidFill>
-                  <a:srgbClr val="141B34"/>
-                </a:solidFill>
-              </a:rPr>
-              <a:t>4. Los tutores no bastan</a:t>
-            </a:r>
-            <a:endParaRPr lang="en-US" sz="1700" dirty="0"/>
-          </a:p>
-        </p:txBody>
-      </p:sp>
-      <p:sp>
-        <p:nvSpPr>
-          <p:cNvPr id="23" name="Step 4 detail"/>
+              <a:rPr lang="en-US" sz="1800" b="1" dirty="0">
+                <a:solidFill>
+                  <a:srgbClr val="B8461F"/>
+                </a:solidFill>
+              </a:rPr>
+              <a:t>Se trabó</a:t>
+            </a:r>
+            <a:endParaRPr lang="en-US" sz="1800" dirty="0"/>
+          </a:p>
+        </p:txBody>
+      </p:sp>
+      <p:sp>
+        <p:nvSpPr>
+          <p:cNvPr id="15" name="Learning 3 text"/>
           <p:cNvSpPr txBox="1"/>
           <p:nvPr/>
         </p:nvSpPr>
         <p:spPr>
           <a:xfrm>
-            <a:off x="8970264" y="3611880"/>
-            <a:ext cx="2560320" cy="1097280"/>
+            <a:off x="6263640" y="3922776"/>
+            <a:ext cx="5394960" cy="914400"/>
           </a:xfrm>
           <a:prstGeom prst="rect">
             <a:avLst/>
@@ -4555,54 +4932,27 @@
               <a:buNone/>
             </a:pPr>
             <a:r>
-              <a:rPr lang="en-US" sz="1400" dirty="0">
-                <a:solidFill>
-                  <a:srgbClr val="4F5568"/>
-                </a:solidFill>
-              </a:rPr>
-              <a:t>El modo estudio se apaga con un clic y al docente no le llega nada</a:t>
-            </a:r>
-            <a:endParaRPr lang="en-US" sz="1400" dirty="0"/>
-          </a:p>
-        </p:txBody>
-      </p:sp>
-      <p:sp>
-        <p:nvSpPr>
-          <p:cNvPr id="24" name="Conclusion card"/>
-          <p:cNvSpPr/>
-          <p:nvPr/>
-        </p:nvSpPr>
-        <p:spPr>
-          <a:xfrm>
-            <a:off x="548640" y="4937760"/>
-            <a:ext cx="11094415" cy="1005840"/>
-          </a:xfrm>
-          <a:prstGeom prst="roundRect">
-            <a:avLst>
-              <a:gd name="adj" fmla="val 10909"/>
-            </a:avLst>
-          </a:prstGeom>
-          <a:solidFill>
-            <a:srgbClr val="FBF0D4"/>
-          </a:solidFill>
-          <a:ln w="12700">
-            <a:solidFill>
-              <a:srgbClr val="FBF0D4"/>
-            </a:solidFill>
-            <a:prstDash val="solid"/>
-          </a:ln>
-        </p:spPr>
-      </p:sp>
-      <p:sp>
-        <p:nvSpPr>
-          <p:cNvPr id="25" name="Research conclusion"/>
+              <a:rPr lang="en-US" sz="1500" dirty="0">
+                <a:solidFill>
+                  <a:srgbClr val="141B34"/>
+                </a:solidFill>
+              </a:rPr>
+              <a:t>Primero pensó que era para el alumno, y veía muchas formas en la pantalla.</a:t>
+            </a:r>
+            <a:endParaRPr lang="en-US" sz="1500" dirty="0"/>
+          </a:p>
+        </p:txBody>
+      </p:sp>
+      <p:sp>
+        <p:nvSpPr>
+          <p:cNvPr id="16" name="Learning 4 label"/>
           <p:cNvSpPr txBox="1"/>
           <p:nvPr/>
         </p:nvSpPr>
         <p:spPr>
           <a:xfrm>
-            <a:off x="822960" y="5029200"/>
-            <a:ext cx="10545775" cy="822960"/>
+            <a:off x="4434840" y="4992624"/>
+            <a:ext cx="1737360" cy="914400"/>
           </a:xfrm>
           <a:prstGeom prst="rect">
             <a:avLst/>
@@ -4611,32 +4961,57 @@
           <a:ln/>
         </p:spPr>
         <p:txBody>
-          <a:bodyPr wrap="square" lIns="0" tIns="0" rIns="0" bIns="0" rtlCol="0" anchor="ctr"/>
+          <a:bodyPr wrap="square" lIns="0" tIns="0" rIns="0" bIns="0" rtlCol="0" anchor="t"/>
           <a:lstStyle/>
           <a:p>
             <a:pPr indent="0" marL="0">
               <a:buNone/>
             </a:pPr>
             <a:r>
-              <a:rPr lang="en-US" sz="1900" b="1" dirty="0">
+              <a:rPr lang="en-US" sz="1800" b="1" dirty="0">
                 <a:solidFill>
                   <a:srgbClr val="141B34"/>
                 </a:solidFill>
               </a:rPr>
-              <a:t>Conclusión: </a:t>
-            </a:r>
+              <a:t>Cambiamos</a:t>
+            </a:r>
+            <a:endParaRPr lang="en-US" sz="1800" dirty="0"/>
+          </a:p>
+        </p:txBody>
+      </p:sp>
+      <p:sp>
+        <p:nvSpPr>
+          <p:cNvPr id="17" name="Learning 4 text"/>
+          <p:cNvSpPr txBox="1"/>
+          <p:nvPr/>
+        </p:nvSpPr>
+        <p:spPr>
+          <a:xfrm>
+            <a:off x="6263640" y="4992624"/>
+            <a:ext cx="5394960" cy="914400"/>
+          </a:xfrm>
+          <a:prstGeom prst="rect">
+            <a:avLst/>
+          </a:prstGeom>
+          <a:noFill/>
+          <a:ln/>
+        </p:spPr>
+        <p:txBody>
+          <a:bodyPr wrap="square" lIns="0" tIns="0" rIns="0" bIns="0" rtlCol="0" anchor="t"/>
+          <a:lstStyle/>
+          <a:p>
             <a:pPr indent="0" marL="0">
               <a:buNone/>
             </a:pPr>
             <a:r>
-              <a:rPr lang="en-US" sz="1900" dirty="0">
+              <a:rPr lang="en-US" sz="1500" dirty="0">
                 <a:solidFill>
                   <a:srgbClr val="141B34"/>
                 </a:solidFill>
               </a:rPr>
-              <a:t>la solución tiene que vivir en la evaluación y en el flujo del docente, no ser otro tutor más.</a:t>
-            </a:r>
-            <a:endParaRPr lang="en-US" sz="1900" dirty="0"/>
+              <a:t>Redujimos el ruido visual de la tarea rediseñada para un docente que no usa estas herramientas.</a:t>
+            </a:r>
+            <a:endParaRPr lang="en-US" sz="1500" dirty="0"/>
           </a:p>
         </p:txBody>
       </p:sp>
@@ -4742,7 +5117,7 @@
                   <a:schemeClr val="accent1"/>
                 </a:solidFill>
               </a:rPr>
-              <a:t>POR QUÉ · POR QUÉ AHORA</a:t>
+              <a:t>POR QUÉ · CÓMO LLEGAMOS AQUÍ</a:t>
             </a:r>
             <a:endParaRPr lang="en-US" sz="1300" dirty="0"/>
           </a:p>
@@ -4780,7 +5155,7 @@
                   <a:schemeClr val="tx1"/>
                 </a:solidFill>
               </a:rPr>
-              <a:t>La defensa oral funciona, pero no escala</a:t>
+              <a:t>De cuatro grietas a una conclusión</a:t>
             </a:r>
             <a:endParaRPr lang="en-US" sz="3400" dirty="0"/>
           </a:p>
@@ -4818,7 +5193,7 @@
                   <a:schemeClr val="accent4"/>
                 </a:solidFill>
               </a:rPr>
-              <a:t>Fuentes: Universidad de Adelaide · CAUSE / ASEE · OCDE EAG 2026 vía Gestión</a:t>
+              <a:t>Fuentes: uDocz vía El Peruano · Anthropic Education Report 2025 · Bastani et al. 2025 · InfoQ 2025. Detalle en docs/investigacion/</a:t>
             </a:r>
             <a:endParaRPr lang="en-US" sz="1000" dirty="0"/>
           </a:p>
@@ -4826,19 +5201,17 @@
       </p:sp>
       <p:sp>
         <p:nvSpPr>
-          <p:cNvPr id="5" name="Works card"/>
+          <p:cNvPr id="5" name="Analizamos las 4 grietas del reto circle"/>
           <p:cNvSpPr/>
           <p:nvPr/>
         </p:nvSpPr>
         <p:spPr>
           <a:xfrm>
             <a:off x="548640" y="1783080"/>
-            <a:ext cx="5394960" cy="3566160"/>
-          </a:xfrm>
-          <a:prstGeom prst="roundRect">
-            <a:avLst>
-              <a:gd name="adj" fmla="val 3077"/>
-            </a:avLst>
+            <a:ext cx="822960" cy="822960"/>
+          </a:xfrm>
+          <a:prstGeom prst="ellipse">
+            <a:avLst/>
           </a:prstGeom>
           <a:solidFill>
             <a:srgbClr val="E7ECFB"/>
@@ -4851,70 +5224,9 @@
           </a:ln>
         </p:spPr>
       </p:sp>
-      <p:sp>
-        <p:nvSpPr>
-          <p:cNvPr id="6" name="Works takeaway"/>
-          <p:cNvSpPr txBox="1"/>
-          <p:nvPr/>
-        </p:nvSpPr>
-        <p:spPr>
-          <a:xfrm>
-            <a:off x="868680" y="4526280"/>
-            <a:ext cx="4754880" cy="640080"/>
-          </a:xfrm>
-          <a:prstGeom prst="rect">
-            <a:avLst/>
-          </a:prstGeom>
-          <a:noFill/>
-          <a:ln/>
-        </p:spPr>
-        <p:txBody>
-          <a:bodyPr wrap="square" lIns="0" tIns="0" rIns="0" bIns="0" rtlCol="0" anchor="t"/>
-          <a:lstStyle/>
-          <a:p>
-            <a:pPr indent="0" marL="0">
-              <a:buNone/>
-            </a:pPr>
-            <a:r>
-              <a:rPr lang="en-US" sz="1600" b="1" dirty="0">
-                <a:solidFill>
-                  <a:srgbClr val="1B2F8F"/>
-                </a:solidFill>
-              </a:rPr>
-              <a:t>La evidencia apunta a explicar lo propio, no a vigilar.</a:t>
-            </a:r>
-            <a:endParaRPr lang="en-US" sz="1600" dirty="0"/>
-          </a:p>
-        </p:txBody>
-      </p:sp>
-      <p:sp>
-        <p:nvSpPr>
-          <p:cNvPr id="7" name="Oral defense works circle"/>
-          <p:cNvSpPr/>
-          <p:nvPr/>
-        </p:nvSpPr>
-        <p:spPr>
-          <a:xfrm>
-            <a:off x="868680" y="2057400"/>
-            <a:ext cx="731520" cy="731520"/>
-          </a:xfrm>
-          <a:prstGeom prst="ellipse">
-            <a:avLst/>
-          </a:prstGeom>
-          <a:solidFill>
-            <a:srgbClr val="2340B8"/>
-          </a:solidFill>
-          <a:ln w="12700">
-            <a:solidFill>
-              <a:srgbClr val="2340B8"/>
-            </a:solidFill>
-            <a:prstDash val="solid"/>
-          </a:ln>
-        </p:spPr>
-      </p:sp>
       <p:pic>
         <p:nvPicPr>
-          <p:cNvPr id="8" name="Image 0" descr="Oral defense works">    </p:cNvPr>
+          <p:cNvPr id="6" name="Image 0" descr="Analizamos las 4 grietas del reto">    </p:cNvPr>
           <p:cNvPicPr>
             <a:picLocks noChangeAspect="1"/>
           </p:cNvPicPr>
@@ -4928,8 +5240,8 @@
         </p:blipFill>
         <p:spPr>
           <a:xfrm>
-            <a:off x="1044245" y="2232965"/>
-            <a:ext cx="380390" cy="380390"/>
+            <a:off x="746150" y="1980590"/>
+            <a:ext cx="427939" cy="427939"/>
           </a:xfrm>
           <a:prstGeom prst="rect">
             <a:avLst/>
@@ -4938,14 +5250,14 @@
       </p:pic>
       <p:sp>
         <p:nvSpPr>
-          <p:cNvPr id="9" name="Works title"/>
+          <p:cNvPr id="7" name="Step 1 title"/>
           <p:cNvSpPr txBox="1"/>
           <p:nvPr/>
         </p:nvSpPr>
         <p:spPr>
           <a:xfrm>
-            <a:off x="1783080" y="2103120"/>
-            <a:ext cx="3657600" cy="640080"/>
+            <a:off x="548640" y="2743200"/>
+            <a:ext cx="2560320" cy="868680"/>
           </a:xfrm>
           <a:prstGeom prst="rect">
             <a:avLst/>
@@ -4954,34 +5266,34 @@
           <a:ln/>
         </p:spPr>
         <p:txBody>
-          <a:bodyPr wrap="square" lIns="0" tIns="0" rIns="0" bIns="0" rtlCol="0" anchor="ctr"/>
+          <a:bodyPr wrap="square" lIns="0" tIns="0" rIns="0" bIns="0" rtlCol="0" anchor="t"/>
           <a:lstStyle/>
           <a:p>
             <a:pPr indent="0" marL="0">
               <a:buNone/>
             </a:pPr>
             <a:r>
-              <a:rPr lang="en-US" sz="2400" b="1" dirty="0">
-                <a:solidFill>
-                  <a:srgbClr val="1B2F8F"/>
-                </a:solidFill>
-              </a:rPr>
-              <a:t>Funciona</a:t>
-            </a:r>
-            <a:endParaRPr lang="en-US" sz="2400" dirty="0"/>
-          </a:p>
-        </p:txBody>
-      </p:sp>
-      <p:sp>
-        <p:nvSpPr>
-          <p:cNvPr id="10" name="Works detail"/>
+              <a:rPr lang="en-US" sz="1700" b="1" dirty="0">
+                <a:solidFill>
+                  <a:srgbClr val="141B34"/>
+                </a:solidFill>
+              </a:rPr>
+              <a:t>1. Analizamos las 4 grietas del reto</a:t>
+            </a:r>
+            <a:endParaRPr lang="en-US" sz="1700" dirty="0"/>
+          </a:p>
+        </p:txBody>
+      </p:sp>
+      <p:sp>
+        <p:nvSpPr>
+          <p:cNvPr id="8" name="Step 1 detail"/>
           <p:cNvSpPr txBox="1"/>
           <p:nvPr/>
         </p:nvSpPr>
         <p:spPr>
           <a:xfrm>
-            <a:off x="868680" y="3017520"/>
-            <a:ext cx="4754880" cy="1371600"/>
+            <a:off x="548640" y="3611880"/>
+            <a:ext cx="2560320" cy="1097280"/>
           </a:xfrm>
           <a:prstGeom prst="rect">
             <a:avLst/>
@@ -4997,39 +5309,37 @@
               <a:buNone/>
             </a:pPr>
             <a:r>
-              <a:rPr lang="en-US" sz="1700" dirty="0">
-                <a:solidFill>
-                  <a:srgbClr val="141B34"/>
-                </a:solidFill>
-              </a:rPr>
-              <a:t>Explicar lo propio resiste el mal uso de la IA: en Adelaide, la evaluación oral fue resistente y la ansiedad inicial no bajó el desempeño.</a:t>
-            </a:r>
-            <a:endParaRPr lang="en-US" sz="1700" dirty="0"/>
-          </a:p>
-        </p:txBody>
-      </p:sp>
-      <p:sp>
-        <p:nvSpPr>
-          <p:cNvPr id="11" name="Scale card"/>
+              <a:rPr lang="en-US" sz="1400" dirty="0">
+                <a:solidFill>
+                  <a:srgbClr val="4F5568"/>
+                </a:solidFill>
+              </a:rPr>
+              <a:t>Elegimos la 02: es la de prueba más limpia, con trabajos reales en el evento</a:t>
+            </a:r>
+            <a:endParaRPr lang="en-US" sz="1400" dirty="0"/>
+          </a:p>
+        </p:txBody>
+      </p:sp>
+      <p:sp>
+        <p:nvSpPr>
+          <p:cNvPr id="9" name="Arrow 1"/>
           <p:cNvSpPr/>
           <p:nvPr/>
         </p:nvSpPr>
         <p:spPr>
           <a:xfrm>
-            <a:off x="6263640" y="1783080"/>
-            <a:ext cx="5376672" cy="3566160"/>
-          </a:xfrm>
-          <a:prstGeom prst="roundRect">
-            <a:avLst>
-              <a:gd name="adj" fmla="val 3077"/>
-            </a:avLst>
+            <a:off x="1600200" y="2011680"/>
+            <a:ext cx="1463040" cy="365760"/>
+          </a:xfrm>
+          <a:prstGeom prst="rightArrow">
+            <a:avLst/>
           </a:prstGeom>
           <a:solidFill>
-            <a:srgbClr val="F3F4F8"/>
+            <a:srgbClr val="D9DCE5"/>
           </a:solidFill>
           <a:ln w="12700">
             <a:solidFill>
-              <a:srgbClr val="F3F4F8"/>
+              <a:srgbClr val="D9DCE5"/>
             </a:solidFill>
             <a:prstDash val="solid"/>
           </a:ln>
@@ -5037,14 +5347,63 @@
       </p:sp>
       <p:sp>
         <p:nvSpPr>
-          <p:cNvPr id="12" name="Minutes stat"/>
+          <p:cNvPr id="10" name="El problema es de uso, no de acceso circle"/>
+          <p:cNvSpPr/>
+          <p:nvPr/>
+        </p:nvSpPr>
+        <p:spPr>
+          <a:xfrm>
+            <a:off x="3355848" y="1783080"/>
+            <a:ext cx="822960" cy="822960"/>
+          </a:xfrm>
+          <a:prstGeom prst="ellipse">
+            <a:avLst/>
+          </a:prstGeom>
+          <a:solidFill>
+            <a:srgbClr val="E7ECFB"/>
+          </a:solidFill>
+          <a:ln w="12700">
+            <a:solidFill>
+              <a:srgbClr val="E7ECFB"/>
+            </a:solidFill>
+            <a:prstDash val="solid"/>
+          </a:ln>
+        </p:spPr>
+      </p:sp>
+      <p:pic>
+        <p:nvPicPr>
+          <p:cNvPr id="11" name="Image 1" descr="El problema es de uso, no de acceso">    </p:cNvPr>
+          <p:cNvPicPr>
+            <a:picLocks noChangeAspect="1"/>
+          </p:cNvPicPr>
+          <p:nvPr/>
+        </p:nvPicPr>
+        <p:blipFill>
+          <a:blip r:embed="rId2"/>
+          <a:stretch>
+            <a:fillRect/>
+          </a:stretch>
+        </p:blipFill>
+        <p:spPr>
+          <a:xfrm>
+            <a:off x="3553358" y="1980590"/>
+            <a:ext cx="427939" cy="427939"/>
+          </a:xfrm>
+          <a:prstGeom prst="rect">
+            <a:avLst/>
+          </a:prstGeom>
+        </p:spPr>
+      </p:pic>
+      <p:sp>
+        <p:nvSpPr>
+          <p:cNvPr id="12" name="Step 2 title"/>
           <p:cNvSpPr txBox="1"/>
           <p:nvPr/>
         </p:nvSpPr>
         <p:spPr>
           <a:xfrm>
-            <a:off x="6583680" y="1965960"/>
-            <a:ext cx="4754880" cy="914400"/>
+            <a:off x="3355848" y="2743200"/>
+            <a:ext cx="2560320" cy="868680"/>
           </a:xfrm>
           <a:prstGeom prst="rect">
             <a:avLst/>
@@ -5053,34 +5412,34 @@
           <a:ln/>
         </p:spPr>
         <p:txBody>
-          <a:bodyPr wrap="square" lIns="0" tIns="0" rIns="0" bIns="0" rtlCol="0" anchor="ctr"/>
+          <a:bodyPr wrap="square" lIns="0" tIns="0" rIns="0" bIns="0" rtlCol="0" anchor="t"/>
           <a:lstStyle/>
           <a:p>
             <a:pPr indent="0" marL="0">
               <a:buNone/>
             </a:pPr>
             <a:r>
-              <a:rPr lang="en-US" sz="4800" b="1" dirty="0">
-                <a:solidFill>
-                  <a:srgbClr val="B8461F"/>
-                </a:solidFill>
-              </a:rPr>
-              <a:t>15–20 min</a:t>
-            </a:r>
-            <a:endParaRPr lang="en-US" sz="4800" dirty="0"/>
-          </a:p>
-        </p:txBody>
-      </p:sp>
-      <p:sp>
-        <p:nvSpPr>
-          <p:cNvPr id="13" name="Minutes label"/>
+              <a:rPr lang="en-US" sz="1700" b="1" dirty="0">
+                <a:solidFill>
+                  <a:srgbClr val="141B34"/>
+                </a:solidFill>
+              </a:rPr>
+              <a:t>2. El problema es de uso, no de acceso</a:t>
+            </a:r>
+            <a:endParaRPr lang="en-US" sz="1700" dirty="0"/>
+          </a:p>
+        </p:txBody>
+      </p:sp>
+      <p:sp>
+        <p:nvSpPr>
+          <p:cNvPr id="13" name="Step 2 detail"/>
           <p:cNvSpPr txBox="1"/>
           <p:nvPr/>
         </p:nvSpPr>
         <p:spPr>
           <a:xfrm>
-            <a:off x="6583680" y="2880360"/>
-            <a:ext cx="4754880" cy="731520"/>
+            <a:off x="3355848" y="3611880"/>
+            <a:ext cx="2560320" cy="1097280"/>
           </a:xfrm>
           <a:prstGeom prst="rect">
             <a:avLst/>
@@ -5096,27 +5455,101 @@
               <a:buNone/>
             </a:pPr>
             <a:r>
-              <a:rPr lang="en-US" sz="1600" dirty="0">
-                <a:solidFill>
-                  <a:srgbClr val="141B34"/>
-                </a:solidFill>
-              </a:rPr>
-              <a:t>por alumno: con 150 alumnos, imposible para un docente</a:t>
-            </a:r>
-            <a:endParaRPr lang="en-US" sz="1600" dirty="0"/>
-          </a:p>
-        </p:txBody>
-      </p:sp>
-      <p:sp>
-        <p:nvSpPr>
-          <p:cNvPr id="14" name="Teachers stat"/>
+              <a:rPr lang="en-US" sz="1400" dirty="0">
+                <a:solidFill>
+                  <a:srgbClr val="4F5568"/>
+                </a:solidFill>
+              </a:rPr>
+              <a:t>95 % de universitarios usa IA; solo 41 % de forma efectiva (uDocz)</a:t>
+            </a:r>
+            <a:endParaRPr lang="en-US" sz="1400" dirty="0"/>
+          </a:p>
+        </p:txBody>
+      </p:sp>
+      <p:sp>
+        <p:nvSpPr>
+          <p:cNvPr id="14" name="Arrow 2"/>
+          <p:cNvSpPr/>
+          <p:nvPr/>
+        </p:nvSpPr>
+        <p:spPr>
+          <a:xfrm>
+            <a:off x="4407408" y="2011680"/>
+            <a:ext cx="1463040" cy="365760"/>
+          </a:xfrm>
+          <a:prstGeom prst="rightArrow">
+            <a:avLst/>
+          </a:prstGeom>
+          <a:solidFill>
+            <a:srgbClr val="D9DCE5"/>
+          </a:solidFill>
+          <a:ln w="12700">
+            <a:solidFill>
+              <a:srgbClr val="D9DCE5"/>
+            </a:solidFill>
+            <a:prstDash val="solid"/>
+          </a:ln>
+        </p:spPr>
+      </p:sp>
+      <p:sp>
+        <p:nvSpPr>
+          <p:cNvPr id="15" name="Se delega lo difícil circle"/>
+          <p:cNvSpPr/>
+          <p:nvPr/>
+        </p:nvSpPr>
+        <p:spPr>
+          <a:xfrm>
+            <a:off x="6163056" y="1783080"/>
+            <a:ext cx="822960" cy="822960"/>
+          </a:xfrm>
+          <a:prstGeom prst="ellipse">
+            <a:avLst/>
+          </a:prstGeom>
+          <a:solidFill>
+            <a:srgbClr val="E7ECFB"/>
+          </a:solidFill>
+          <a:ln w="12700">
+            <a:solidFill>
+              <a:srgbClr val="E7ECFB"/>
+            </a:solidFill>
+            <a:prstDash val="solid"/>
+          </a:ln>
+        </p:spPr>
+      </p:sp>
+      <p:pic>
+        <p:nvPicPr>
+          <p:cNvPr id="16" name="Image 2" descr="Se delega lo difícil">    </p:cNvPr>
+          <p:cNvPicPr>
+            <a:picLocks noChangeAspect="1"/>
+          </p:cNvPicPr>
+          <p:nvPr/>
+        </p:nvPicPr>
+        <p:blipFill>
+          <a:blip r:embed="rId3"/>
+          <a:stretch>
+            <a:fillRect/>
+          </a:stretch>
+        </p:blipFill>
+        <p:spPr>
+          <a:xfrm>
+            <a:off x="6360566" y="1980590"/>
+            <a:ext cx="427939" cy="427939"/>
+          </a:xfrm>
+          <a:prstGeom prst="rect">
+            <a:avLst/>
+          </a:prstGeom>
+        </p:spPr>
+      </p:pic>
+      <p:sp>
+        <p:nvSpPr>
+          <p:cNvPr id="17" name="Step 3 title"/>
           <p:cNvSpPr txBox="1"/>
           <p:nvPr/>
         </p:nvSpPr>
         <p:spPr>
           <a:xfrm>
-            <a:off x="6583680" y="3657600"/>
-            <a:ext cx="4754880" cy="822960"/>
+            <a:off x="6163056" y="2743200"/>
+            <a:ext cx="2560320" cy="868680"/>
           </a:xfrm>
           <a:prstGeom prst="rect">
             <a:avLst/>
@@ -5125,34 +5558,34 @@
           <a:ln/>
         </p:spPr>
         <p:txBody>
-          <a:bodyPr wrap="square" lIns="0" tIns="0" rIns="0" bIns="0" rtlCol="0" anchor="ctr"/>
+          <a:bodyPr wrap="square" lIns="0" tIns="0" rIns="0" bIns="0" rtlCol="0" anchor="t"/>
           <a:lstStyle/>
           <a:p>
             <a:pPr indent="0" marL="0">
               <a:buNone/>
             </a:pPr>
             <a:r>
-              <a:rPr lang="en-US" sz="4000" b="1" dirty="0">
+              <a:rPr lang="en-US" sz="1700" b="1" dirty="0">
                 <a:solidFill>
                   <a:srgbClr val="141B34"/>
                 </a:solidFill>
               </a:rPr>
-              <a:t>1 de cada 5</a:t>
-            </a:r>
-            <a:endParaRPr lang="en-US" sz="4000" dirty="0"/>
-          </a:p>
-        </p:txBody>
-      </p:sp>
-      <p:sp>
-        <p:nvSpPr>
-          <p:cNvPr id="15" name="Teachers label"/>
+              <a:t>3. Se delega lo difícil</a:t>
+            </a:r>
+            <a:endParaRPr lang="en-US" sz="1700" dirty="0"/>
+          </a:p>
+        </p:txBody>
+      </p:sp>
+      <p:sp>
+        <p:nvSpPr>
+          <p:cNvPr id="18" name="Step 3 detail"/>
           <p:cNvSpPr txBox="1"/>
           <p:nvPr/>
         </p:nvSpPr>
         <p:spPr>
           <a:xfrm>
-            <a:off x="6583680" y="4480560"/>
-            <a:ext cx="4754880" cy="731520"/>
+            <a:off x="6163056" y="3611880"/>
+            <a:ext cx="2560320" cy="1097280"/>
           </a:xfrm>
           <a:prstGeom prst="rect">
             <a:avLst/>
@@ -5168,27 +5601,101 @@
               <a:buNone/>
             </a:pPr>
             <a:r>
-              <a:rPr lang="en-US" sz="1600" dirty="0">
-                <a:solidFill>
-                  <a:srgbClr val="141B34"/>
-                </a:solidFill>
-              </a:rPr>
-              <a:t>docentes de secundaria tiene 55 años o más: hacia 2036, menos docentes</a:t>
-            </a:r>
-            <a:endParaRPr lang="en-US" sz="1600" dirty="0"/>
-          </a:p>
-        </p:txBody>
-      </p:sp>
-      <p:sp>
-        <p:nvSpPr>
-          <p:cNvPr id="16" name="Scale takeaway"/>
+              <a:rPr lang="en-US" sz="1400" dirty="0">
+                <a:solidFill>
+                  <a:srgbClr val="4F5568"/>
+                </a:solidFill>
+              </a:rPr>
+              <a:t>≈47 % de las conversaciones piden la respuesta directa; la IA crea y analiza</a:t>
+            </a:r>
+            <a:endParaRPr lang="en-US" sz="1400" dirty="0"/>
+          </a:p>
+        </p:txBody>
+      </p:sp>
+      <p:sp>
+        <p:nvSpPr>
+          <p:cNvPr id="19" name="Arrow 3"/>
+          <p:cNvSpPr/>
+          <p:nvPr/>
+        </p:nvSpPr>
+        <p:spPr>
+          <a:xfrm>
+            <a:off x="7214616" y="2011680"/>
+            <a:ext cx="1463040" cy="365760"/>
+          </a:xfrm>
+          <a:prstGeom prst="rightArrow">
+            <a:avLst/>
+          </a:prstGeom>
+          <a:solidFill>
+            <a:srgbClr val="D9DCE5"/>
+          </a:solidFill>
+          <a:ln w="12700">
+            <a:solidFill>
+              <a:srgbClr val="D9DCE5"/>
+            </a:solidFill>
+            <a:prstDash val="solid"/>
+          </a:ln>
+        </p:spPr>
+      </p:sp>
+      <p:sp>
+        <p:nvSpPr>
+          <p:cNvPr id="20" name="Los tutores no bastan circle"/>
+          <p:cNvSpPr/>
+          <p:nvPr/>
+        </p:nvSpPr>
+        <p:spPr>
+          <a:xfrm>
+            <a:off x="8970264" y="1783080"/>
+            <a:ext cx="822960" cy="822960"/>
+          </a:xfrm>
+          <a:prstGeom prst="ellipse">
+            <a:avLst/>
+          </a:prstGeom>
+          <a:solidFill>
+            <a:srgbClr val="E7ECFB"/>
+          </a:solidFill>
+          <a:ln w="12700">
+            <a:solidFill>
+              <a:srgbClr val="E7ECFB"/>
+            </a:solidFill>
+            <a:prstDash val="solid"/>
+          </a:ln>
+        </p:spPr>
+      </p:sp>
+      <p:pic>
+        <p:nvPicPr>
+          <p:cNvPr id="21" name="Image 3" descr="Los tutores no bastan">    </p:cNvPr>
+          <p:cNvPicPr>
+            <a:picLocks noChangeAspect="1"/>
+          </p:cNvPicPr>
+          <p:nvPr/>
+        </p:nvPicPr>
+        <p:blipFill>
+          <a:blip r:embed="rId4"/>
+          <a:stretch>
+            <a:fillRect/>
+          </a:stretch>
+        </p:blipFill>
+        <p:spPr>
+          <a:xfrm>
+            <a:off x="9167774" y="1980590"/>
+            <a:ext cx="427939" cy="427939"/>
+          </a:xfrm>
+          <a:prstGeom prst="rect">
+            <a:avLst/>
+          </a:prstGeom>
+        </p:spPr>
+      </p:pic>
+      <p:sp>
+        <p:nvSpPr>
+          <p:cNvPr id="22" name="Step 4 title"/>
           <p:cNvSpPr txBox="1"/>
           <p:nvPr/>
         </p:nvSpPr>
         <p:spPr>
           <a:xfrm>
-            <a:off x="548640" y="5577840"/>
-            <a:ext cx="11094415" cy="502920"/>
+            <a:off x="8970264" y="2743200"/>
+            <a:ext cx="2560320" cy="868680"/>
           </a:xfrm>
           <a:prstGeom prst="rect">
             <a:avLst/>
@@ -5197,6 +5704,105 @@
           <a:ln/>
         </p:spPr>
         <p:txBody>
+          <a:bodyPr wrap="square" lIns="0" tIns="0" rIns="0" bIns="0" rtlCol="0" anchor="t"/>
+          <a:lstStyle/>
+          <a:p>
+            <a:pPr indent="0" marL="0">
+              <a:buNone/>
+            </a:pPr>
+            <a:r>
+              <a:rPr lang="en-US" sz="1700" b="1" dirty="0">
+                <a:solidFill>
+                  <a:srgbClr val="141B34"/>
+                </a:solidFill>
+              </a:rPr>
+              <a:t>4. Los tutores no bastan</a:t>
+            </a:r>
+            <a:endParaRPr lang="en-US" sz="1700" dirty="0"/>
+          </a:p>
+        </p:txBody>
+      </p:sp>
+      <p:sp>
+        <p:nvSpPr>
+          <p:cNvPr id="23" name="Step 4 detail"/>
+          <p:cNvSpPr txBox="1"/>
+          <p:nvPr/>
+        </p:nvSpPr>
+        <p:spPr>
+          <a:xfrm>
+            <a:off x="8970264" y="3611880"/>
+            <a:ext cx="2560320" cy="1097280"/>
+          </a:xfrm>
+          <a:prstGeom prst="rect">
+            <a:avLst/>
+          </a:prstGeom>
+          <a:noFill/>
+          <a:ln/>
+        </p:spPr>
+        <p:txBody>
+          <a:bodyPr wrap="square" lIns="0" tIns="0" rIns="0" bIns="0" rtlCol="0" anchor="t"/>
+          <a:lstStyle/>
+          <a:p>
+            <a:pPr indent="0" marL="0">
+              <a:buNone/>
+            </a:pPr>
+            <a:r>
+              <a:rPr lang="en-US" sz="1400" dirty="0">
+                <a:solidFill>
+                  <a:srgbClr val="4F5568"/>
+                </a:solidFill>
+              </a:rPr>
+              <a:t>El modo estudio se apaga con un clic y al docente no le llega nada</a:t>
+            </a:r>
+            <a:endParaRPr lang="en-US" sz="1400" dirty="0"/>
+          </a:p>
+        </p:txBody>
+      </p:sp>
+      <p:sp>
+        <p:nvSpPr>
+          <p:cNvPr id="24" name="Conclusion card"/>
+          <p:cNvSpPr/>
+          <p:nvPr/>
+        </p:nvSpPr>
+        <p:spPr>
+          <a:xfrm>
+            <a:off x="548640" y="4937760"/>
+            <a:ext cx="11094415" cy="1005840"/>
+          </a:xfrm>
+          <a:prstGeom prst="roundRect">
+            <a:avLst>
+              <a:gd name="adj" fmla="val 10909"/>
+            </a:avLst>
+          </a:prstGeom>
+          <a:solidFill>
+            <a:srgbClr val="FBF0D4"/>
+          </a:solidFill>
+          <a:ln w="12700">
+            <a:solidFill>
+              <a:srgbClr val="FBF0D4"/>
+            </a:solidFill>
+            <a:prstDash val="solid"/>
+          </a:ln>
+        </p:spPr>
+      </p:sp>
+      <p:sp>
+        <p:nvSpPr>
+          <p:cNvPr id="25" name="Research conclusion"/>
+          <p:cNvSpPr txBox="1"/>
+          <p:nvPr/>
+        </p:nvSpPr>
+        <p:spPr>
+          <a:xfrm>
+            <a:off x="822960" y="5029200"/>
+            <a:ext cx="10545775" cy="822960"/>
+          </a:xfrm>
+          <a:prstGeom prst="rect">
+            <a:avLst/>
+          </a:prstGeom>
+          <a:noFill/>
+          <a:ln/>
+        </p:spPr>
+        <p:txBody>
           <a:bodyPr wrap="square" lIns="0" tIns="0" rIns="0" bIns="0" rtlCol="0" anchor="ctr"/>
           <a:lstStyle/>
           <a:p>
@@ -5204,14 +5810,25 @@
               <a:buNone/>
             </a:pPr>
             <a:r>
-              <a:rPr lang="en-US" sz="2000" b="1" dirty="0">
+              <a:rPr lang="en-US" sz="1900" b="1" dirty="0">
                 <a:solidFill>
                   <a:srgbClr val="141B34"/>
                 </a:solidFill>
               </a:rPr>
-              <a:t>Necesitamos la defensa, pero para toda la clase.</a:t>
-            </a:r>
-            <a:endParaRPr lang="en-US" sz="2000" dirty="0"/>
+              <a:t>Conclusión: </a:t>
+            </a:r>
+            <a:pPr indent="0" marL="0">
+              <a:buNone/>
+            </a:pPr>
+            <a:r>
+              <a:rPr lang="en-US" sz="1900" dirty="0">
+                <a:solidFill>
+                  <a:srgbClr val="141B34"/>
+                </a:solidFill>
+              </a:rPr>
+              <a:t>la solución tiene que vivir en la evaluación y en el flujo del docente, no ser otro tutor más.</a:t>
+            </a:r>
+            <a:endParaRPr lang="en-US" sz="1900" dirty="0"/>
           </a:p>
         </p:txBody>
       </p:sp>
@@ -5317,7 +5934,7 @@
                   <a:schemeClr val="accent1"/>
                 </a:solidFill>
               </a:rPr>
-              <a:t>CÓMO · NUESTROS PRINCIPIOS</a:t>
+              <a:t>POR QUÉ · POR QUÉ AHORA</a:t>
             </a:r>
             <a:endParaRPr lang="en-US" sz="1300" dirty="0"/>
           </a:p>
@@ -5355,7 +5972,7 @@
                   <a:schemeClr val="tx1"/>
                 </a:solidFill>
               </a:rPr>
-              <a:t>Tres principios guían cada decisión</a:t>
+              <a:t>La defensa oral funciona, pero no escala</a:t>
             </a:r>
             <a:endParaRPr lang="en-US" sz="3400" dirty="0"/>
           </a:p>
@@ -5393,7 +6010,7 @@
                   <a:schemeClr val="accent4"/>
                 </a:solidFill>
               </a:rPr>
-              <a:t>Fuentes: Bisra et al. 2018 (64 estudios) · D.S. 115-2025-PCM, art. 24.1 b) · RVM 094-2020-MINEDU</a:t>
+              <a:t>Fuentes: Universidad de Adelaide · CAUSE / ASEE · OCDE EAG 2026 vía Gestión</a:t>
             </a:r>
             <a:endParaRPr lang="en-US" sz="1000" dirty="0"/>
           </a:p>
@@ -5401,18 +6018,202 @@
       </p:sp>
       <p:sp>
         <p:nvSpPr>
-          <p:cNvPr id="5" name="Principle 1 card"/>
+          <p:cNvPr id="5" name="Works card"/>
           <p:cNvSpPr/>
           <p:nvPr/>
         </p:nvSpPr>
         <p:spPr>
           <a:xfrm>
             <a:off x="548640" y="1783080"/>
-            <a:ext cx="3474720" cy="3383280"/>
+            <a:ext cx="5394960" cy="3566160"/>
           </a:xfrm>
           <a:prstGeom prst="roundRect">
             <a:avLst>
-              <a:gd name="adj" fmla="val 3243"/>
+              <a:gd name="adj" fmla="val 3077"/>
+            </a:avLst>
+          </a:prstGeom>
+          <a:solidFill>
+            <a:srgbClr val="E7ECFB"/>
+          </a:solidFill>
+          <a:ln w="12700">
+            <a:solidFill>
+              <a:srgbClr val="E7ECFB"/>
+            </a:solidFill>
+            <a:prstDash val="solid"/>
+          </a:ln>
+        </p:spPr>
+      </p:sp>
+      <p:sp>
+        <p:nvSpPr>
+          <p:cNvPr id="6" name="Works takeaway"/>
+          <p:cNvSpPr txBox="1"/>
+          <p:nvPr/>
+        </p:nvSpPr>
+        <p:spPr>
+          <a:xfrm>
+            <a:off x="868680" y="4526280"/>
+            <a:ext cx="4754880" cy="640080"/>
+          </a:xfrm>
+          <a:prstGeom prst="rect">
+            <a:avLst/>
+          </a:prstGeom>
+          <a:noFill/>
+          <a:ln/>
+        </p:spPr>
+        <p:txBody>
+          <a:bodyPr wrap="square" lIns="0" tIns="0" rIns="0" bIns="0" rtlCol="0" anchor="t"/>
+          <a:lstStyle/>
+          <a:p>
+            <a:pPr indent="0" marL="0">
+              <a:buNone/>
+            </a:pPr>
+            <a:r>
+              <a:rPr lang="en-US" sz="1600" b="1" dirty="0">
+                <a:solidFill>
+                  <a:srgbClr val="1B2F8F"/>
+                </a:solidFill>
+              </a:rPr>
+              <a:t>La evidencia apunta a explicar lo propio, no a vigilar.</a:t>
+            </a:r>
+            <a:endParaRPr lang="en-US" sz="1600" dirty="0"/>
+          </a:p>
+        </p:txBody>
+      </p:sp>
+      <p:sp>
+        <p:nvSpPr>
+          <p:cNvPr id="7" name="Oral defense works circle"/>
+          <p:cNvSpPr/>
+          <p:nvPr/>
+        </p:nvSpPr>
+        <p:spPr>
+          <a:xfrm>
+            <a:off x="868680" y="2057400"/>
+            <a:ext cx="731520" cy="731520"/>
+          </a:xfrm>
+          <a:prstGeom prst="ellipse">
+            <a:avLst/>
+          </a:prstGeom>
+          <a:solidFill>
+            <a:srgbClr val="2340B8"/>
+          </a:solidFill>
+          <a:ln w="12700">
+            <a:solidFill>
+              <a:srgbClr val="2340B8"/>
+            </a:solidFill>
+            <a:prstDash val="solid"/>
+          </a:ln>
+        </p:spPr>
+      </p:sp>
+      <p:pic>
+        <p:nvPicPr>
+          <p:cNvPr id="8" name="Image 0" descr="Oral defense works">    </p:cNvPr>
+          <p:cNvPicPr>
+            <a:picLocks noChangeAspect="1"/>
+          </p:cNvPicPr>
+          <p:nvPr/>
+        </p:nvPicPr>
+        <p:blipFill>
+          <a:blip r:embed="rId1"/>
+          <a:stretch>
+            <a:fillRect/>
+          </a:stretch>
+        </p:blipFill>
+        <p:spPr>
+          <a:xfrm>
+            <a:off x="1044245" y="2232965"/>
+            <a:ext cx="380390" cy="380390"/>
+          </a:xfrm>
+          <a:prstGeom prst="rect">
+            <a:avLst/>
+          </a:prstGeom>
+        </p:spPr>
+      </p:pic>
+      <p:sp>
+        <p:nvSpPr>
+          <p:cNvPr id="9" name="Works title"/>
+          <p:cNvSpPr txBox="1"/>
+          <p:nvPr/>
+        </p:nvSpPr>
+        <p:spPr>
+          <a:xfrm>
+            <a:off x="1783080" y="2103120"/>
+            <a:ext cx="3657600" cy="640080"/>
+          </a:xfrm>
+          <a:prstGeom prst="rect">
+            <a:avLst/>
+          </a:prstGeom>
+          <a:noFill/>
+          <a:ln/>
+        </p:spPr>
+        <p:txBody>
+          <a:bodyPr wrap="square" lIns="0" tIns="0" rIns="0" bIns="0" rtlCol="0" anchor="ctr"/>
+          <a:lstStyle/>
+          <a:p>
+            <a:pPr indent="0" marL="0">
+              <a:buNone/>
+            </a:pPr>
+            <a:r>
+              <a:rPr lang="en-US" sz="2400" b="1" dirty="0">
+                <a:solidFill>
+                  <a:srgbClr val="1B2F8F"/>
+                </a:solidFill>
+              </a:rPr>
+              <a:t>Funciona</a:t>
+            </a:r>
+            <a:endParaRPr lang="en-US" sz="2400" dirty="0"/>
+          </a:p>
+        </p:txBody>
+      </p:sp>
+      <p:sp>
+        <p:nvSpPr>
+          <p:cNvPr id="10" name="Works detail"/>
+          <p:cNvSpPr txBox="1"/>
+          <p:nvPr/>
+        </p:nvSpPr>
+        <p:spPr>
+          <a:xfrm>
+            <a:off x="868680" y="3017520"/>
+            <a:ext cx="4754880" cy="1371600"/>
+          </a:xfrm>
+          <a:prstGeom prst="rect">
+            <a:avLst/>
+          </a:prstGeom>
+          <a:noFill/>
+          <a:ln/>
+        </p:spPr>
+        <p:txBody>
+          <a:bodyPr wrap="square" lIns="0" tIns="0" rIns="0" bIns="0" rtlCol="0" anchor="t"/>
+          <a:lstStyle/>
+          <a:p>
+            <a:pPr indent="0" marL="0">
+              <a:buNone/>
+            </a:pPr>
+            <a:r>
+              <a:rPr lang="en-US" sz="1700" dirty="0">
+                <a:solidFill>
+                  <a:srgbClr val="141B34"/>
+                </a:solidFill>
+              </a:rPr>
+              <a:t>Explicar lo propio resiste el mal uso de la IA: en Adelaide, la evaluación oral fue resistente y la ansiedad inicial no bajó el desempeño.</a:t>
+            </a:r>
+            <a:endParaRPr lang="en-US" sz="1700" dirty="0"/>
+          </a:p>
+        </p:txBody>
+      </p:sp>
+      <p:sp>
+        <p:nvSpPr>
+          <p:cNvPr id="11" name="Scale card"/>
+          <p:cNvSpPr/>
+          <p:nvPr/>
+        </p:nvSpPr>
+        <p:spPr>
+          <a:xfrm>
+            <a:off x="6263640" y="1783080"/>
+            <a:ext cx="5376672" cy="3566160"/>
+          </a:xfrm>
+          <a:prstGeom prst="roundRect">
+            <a:avLst>
+              <a:gd name="adj" fmla="val 3077"/>
             </a:avLst>
           </a:prstGeom>
           <a:solidFill>
@@ -5428,63 +6229,14 @@
       </p:sp>
       <p:sp>
         <p:nvSpPr>
-          <p:cNvPr id="6" name="La IA está permitida circle"/>
-          <p:cNvSpPr/>
-          <p:nvPr/>
-        </p:nvSpPr>
-        <p:spPr>
-          <a:xfrm>
-            <a:off x="868680" y="2103120"/>
-            <a:ext cx="914400" cy="914400"/>
-          </a:xfrm>
-          <a:prstGeom prst="ellipse">
-            <a:avLst/>
-          </a:prstGeom>
-          <a:solidFill>
-            <a:srgbClr val="2340B8"/>
-          </a:solidFill>
-          <a:ln w="12700">
-            <a:solidFill>
-              <a:srgbClr val="2340B8"/>
-            </a:solidFill>
-            <a:prstDash val="solid"/>
-          </a:ln>
-        </p:spPr>
-      </p:sp>
-      <p:pic>
-        <p:nvPicPr>
-          <p:cNvPr id="7" name="Image 0" descr="La IA está permitida">    </p:cNvPr>
-          <p:cNvPicPr>
-            <a:picLocks noChangeAspect="1"/>
-          </p:cNvPicPr>
-          <p:nvPr/>
-        </p:nvPicPr>
-        <p:blipFill>
-          <a:blip r:embed="rId1"/>
-          <a:stretch>
-            <a:fillRect/>
-          </a:stretch>
-        </p:blipFill>
-        <p:spPr>
-          <a:xfrm>
-            <a:off x="1088136" y="2322576"/>
-            <a:ext cx="475488" cy="475488"/>
-          </a:xfrm>
-          <a:prstGeom prst="rect">
-            <a:avLst/>
-          </a:prstGeom>
-        </p:spPr>
-      </p:pic>
-      <p:sp>
-        <p:nvSpPr>
-          <p:cNvPr id="8" name="Principle 1 title"/>
+          <p:cNvPr id="12" name="Minutes stat"/>
           <p:cNvSpPr txBox="1"/>
           <p:nvPr/>
         </p:nvSpPr>
         <p:spPr>
           <a:xfrm>
-            <a:off x="868680" y="3246120"/>
-            <a:ext cx="2834640" cy="822960"/>
+            <a:off x="6583680" y="1965960"/>
+            <a:ext cx="4754880" cy="914400"/>
           </a:xfrm>
           <a:prstGeom prst="rect">
             <a:avLst/>
@@ -5493,34 +6245,34 @@
           <a:ln/>
         </p:spPr>
         <p:txBody>
-          <a:bodyPr wrap="square" lIns="0" tIns="0" rIns="0" bIns="0" rtlCol="0" anchor="t"/>
+          <a:bodyPr wrap="square" lIns="0" tIns="0" rIns="0" bIns="0" rtlCol="0" anchor="ctr"/>
           <a:lstStyle/>
           <a:p>
             <a:pPr indent="0" marL="0">
               <a:buNone/>
             </a:pPr>
             <a:r>
-              <a:rPr lang="en-US" sz="2100" b="1" dirty="0">
-                <a:solidFill>
-                  <a:srgbClr val="141B34"/>
-                </a:solidFill>
-              </a:rPr>
-              <a:t>La IA está permitida</a:t>
-            </a:r>
-            <a:endParaRPr lang="en-US" sz="2100" dirty="0"/>
-          </a:p>
-        </p:txBody>
-      </p:sp>
-      <p:sp>
-        <p:nvSpPr>
-          <p:cNvPr id="9" name="Principle 1 detail"/>
+              <a:rPr lang="en-US" sz="4800" b="1" dirty="0">
+                <a:solidFill>
+                  <a:srgbClr val="B8461F"/>
+                </a:solidFill>
+              </a:rPr>
+              <a:t>15–20 min</a:t>
+            </a:r>
+            <a:endParaRPr lang="en-US" sz="4800" dirty="0"/>
+          </a:p>
+        </p:txBody>
+      </p:sp>
+      <p:sp>
+        <p:nvSpPr>
+          <p:cNvPr id="13" name="Minutes label"/>
           <p:cNvSpPr txBox="1"/>
           <p:nvPr/>
         </p:nvSpPr>
         <p:spPr>
           <a:xfrm>
-            <a:off x="868680" y="4069080"/>
-            <a:ext cx="2834640" cy="1554480"/>
+            <a:off x="6583680" y="2880360"/>
+            <a:ext cx="4754880" cy="731520"/>
           </a:xfrm>
           <a:prstGeom prst="rect">
             <a:avLst/>
@@ -5536,103 +6288,27 @@
               <a:buNone/>
             </a:pPr>
             <a:r>
-              <a:rPr lang="en-US" sz="1500" dirty="0">
-                <a:solidFill>
-                  <a:srgbClr val="4F5568"/>
-                </a:solidFill>
-              </a:rPr>
-              <a:t>No detectamos ni acusamos. Preguntamos si entiende lo que entregó.</a:t>
-            </a:r>
-            <a:endParaRPr lang="en-US" sz="1500" dirty="0"/>
-          </a:p>
-        </p:txBody>
-      </p:sp>
-      <p:sp>
-        <p:nvSpPr>
-          <p:cNvPr id="10" name="Principle 2 card"/>
-          <p:cNvSpPr/>
-          <p:nvPr/>
-        </p:nvSpPr>
-        <p:spPr>
-          <a:xfrm>
-            <a:off x="4297680" y="1783080"/>
-            <a:ext cx="3474720" cy="3383280"/>
-          </a:xfrm>
-          <a:prstGeom prst="roundRect">
-            <a:avLst>
-              <a:gd name="adj" fmla="val 3243"/>
-            </a:avLst>
-          </a:prstGeom>
-          <a:solidFill>
-            <a:srgbClr val="F3F4F8"/>
-          </a:solidFill>
-          <a:ln w="12700">
-            <a:solidFill>
-              <a:srgbClr val="F3F4F8"/>
-            </a:solidFill>
-            <a:prstDash val="solid"/>
-          </a:ln>
-        </p:spPr>
-      </p:sp>
-      <p:sp>
-        <p:nvSpPr>
-          <p:cNvPr id="11" name="Defender enseña circle"/>
-          <p:cNvSpPr/>
-          <p:nvPr/>
-        </p:nvSpPr>
-        <p:spPr>
-          <a:xfrm>
-            <a:off x="4617720" y="2103120"/>
-            <a:ext cx="914400" cy="914400"/>
-          </a:xfrm>
-          <a:prstGeom prst="ellipse">
-            <a:avLst/>
-          </a:prstGeom>
-          <a:solidFill>
-            <a:srgbClr val="2340B8"/>
-          </a:solidFill>
-          <a:ln w="12700">
-            <a:solidFill>
-              <a:srgbClr val="2340B8"/>
-            </a:solidFill>
-            <a:prstDash val="solid"/>
-          </a:ln>
-        </p:spPr>
-      </p:sp>
-      <p:pic>
-        <p:nvPicPr>
-          <p:cNvPr id="12" name="Image 1" descr="Defender enseña">    </p:cNvPr>
-          <p:cNvPicPr>
-            <a:picLocks noChangeAspect="1"/>
-          </p:cNvPicPr>
-          <p:nvPr/>
-        </p:nvPicPr>
-        <p:blipFill>
-          <a:blip r:embed="rId2"/>
-          <a:stretch>
-            <a:fillRect/>
-          </a:stretch>
-        </p:blipFill>
-        <p:spPr>
-          <a:xfrm>
-            <a:off x="4837176" y="2322576"/>
-            <a:ext cx="475488" cy="475488"/>
-          </a:xfrm>
-          <a:prstGeom prst="rect">
-            <a:avLst/>
-          </a:prstGeom>
-        </p:spPr>
-      </p:pic>
-      <p:sp>
-        <p:nvSpPr>
-          <p:cNvPr id="13" name="Principle 2 title"/>
+              <a:rPr lang="en-US" sz="1600" dirty="0">
+                <a:solidFill>
+                  <a:srgbClr val="141B34"/>
+                </a:solidFill>
+              </a:rPr>
+              <a:t>por alumno: con 150 alumnos, imposible para un docente</a:t>
+            </a:r>
+            <a:endParaRPr lang="en-US" sz="1600" dirty="0"/>
+          </a:p>
+        </p:txBody>
+      </p:sp>
+      <p:sp>
+        <p:nvSpPr>
+          <p:cNvPr id="14" name="Teachers stat"/>
           <p:cNvSpPr txBox="1"/>
           <p:nvPr/>
         </p:nvSpPr>
         <p:spPr>
           <a:xfrm>
-            <a:off x="4617720" y="3246120"/>
-            <a:ext cx="2834640" cy="822960"/>
+            <a:off x="6583680" y="3657600"/>
+            <a:ext cx="4754880" cy="822960"/>
           </a:xfrm>
           <a:prstGeom prst="rect">
             <a:avLst/>
@@ -5641,34 +6317,34 @@
           <a:ln/>
         </p:spPr>
         <p:txBody>
-          <a:bodyPr wrap="square" lIns="0" tIns="0" rIns="0" bIns="0" rtlCol="0" anchor="t"/>
+          <a:bodyPr wrap="square" lIns="0" tIns="0" rIns="0" bIns="0" rtlCol="0" anchor="ctr"/>
           <a:lstStyle/>
           <a:p>
             <a:pPr indent="0" marL="0">
               <a:buNone/>
             </a:pPr>
             <a:r>
-              <a:rPr lang="en-US" sz="2100" b="1" dirty="0">
+              <a:rPr lang="en-US" sz="4000" b="1" dirty="0">
                 <a:solidFill>
                   <a:srgbClr val="141B34"/>
                 </a:solidFill>
               </a:rPr>
-              <a:t>Defender enseña</a:t>
-            </a:r>
-            <a:endParaRPr lang="en-US" sz="2100" dirty="0"/>
-          </a:p>
-        </p:txBody>
-      </p:sp>
-      <p:sp>
-        <p:nvSpPr>
-          <p:cNvPr id="14" name="Principle 2 detail"/>
+              <a:t>1 de cada 5</a:t>
+            </a:r>
+            <a:endParaRPr lang="en-US" sz="4000" dirty="0"/>
+          </a:p>
+        </p:txBody>
+      </p:sp>
+      <p:sp>
+        <p:nvSpPr>
+          <p:cNvPr id="15" name="Teachers label"/>
           <p:cNvSpPr txBox="1"/>
           <p:nvPr/>
         </p:nvSpPr>
         <p:spPr>
           <a:xfrm>
-            <a:off x="4617720" y="4069080"/>
-            <a:ext cx="2834640" cy="1554480"/>
+            <a:off x="6583680" y="4480560"/>
+            <a:ext cx="4754880" cy="731520"/>
           </a:xfrm>
           <a:prstGeom prst="rect">
             <a:avLst/>
@@ -5684,103 +6360,27 @@
               <a:buNone/>
             </a:pPr>
             <a:r>
-              <a:rPr lang="en-US" sz="1500" dirty="0">
-                <a:solidFill>
-                  <a:srgbClr val="4F5568"/>
-                </a:solidFill>
-              </a:rPr>
-              <a:t>Explicar el propio trabajo es autoexplicación: ≈ medio desvío estándar de efecto (g = 0,55).</a:t>
-            </a:r>
-            <a:endParaRPr lang="en-US" sz="1500" dirty="0"/>
-          </a:p>
-        </p:txBody>
-      </p:sp>
-      <p:sp>
-        <p:nvSpPr>
-          <p:cNvPr id="15" name="Principle 3 card"/>
-          <p:cNvSpPr/>
-          <p:nvPr/>
-        </p:nvSpPr>
-        <p:spPr>
-          <a:xfrm>
-            <a:off x="8046720" y="1783080"/>
-            <a:ext cx="3474720" cy="3383280"/>
-          </a:xfrm>
-          <a:prstGeom prst="roundRect">
-            <a:avLst>
-              <a:gd name="adj" fmla="val 3243"/>
-            </a:avLst>
-          </a:prstGeom>
-          <a:solidFill>
-            <a:srgbClr val="F3F4F8"/>
-          </a:solidFill>
-          <a:ln w="12700">
-            <a:solidFill>
-              <a:srgbClr val="F3F4F8"/>
-            </a:solidFill>
-            <a:prstDash val="solid"/>
-          </a:ln>
-        </p:spPr>
-      </p:sp>
-      <p:sp>
-        <p:nvSpPr>
-          <p:cNvPr id="16" name="La IA sugiere, el docente decide circle"/>
-          <p:cNvSpPr/>
-          <p:nvPr/>
-        </p:nvSpPr>
-        <p:spPr>
-          <a:xfrm>
-            <a:off x="8366760" y="2103120"/>
-            <a:ext cx="914400" cy="914400"/>
-          </a:xfrm>
-          <a:prstGeom prst="ellipse">
-            <a:avLst/>
-          </a:prstGeom>
-          <a:solidFill>
-            <a:srgbClr val="2340B8"/>
-          </a:solidFill>
-          <a:ln w="12700">
-            <a:solidFill>
-              <a:srgbClr val="2340B8"/>
-            </a:solidFill>
-            <a:prstDash val="solid"/>
-          </a:ln>
-        </p:spPr>
-      </p:sp>
-      <p:pic>
-        <p:nvPicPr>
-          <p:cNvPr id="17" name="Image 2" descr="La IA sugiere, el docente decide">    </p:cNvPr>
-          <p:cNvPicPr>
-            <a:picLocks noChangeAspect="1"/>
-          </p:cNvPicPr>
-          <p:nvPr/>
-        </p:nvPicPr>
-        <p:blipFill>
-          <a:blip r:embed="rId3"/>
-          <a:stretch>
-            <a:fillRect/>
-          </a:stretch>
-        </p:blipFill>
-        <p:spPr>
-          <a:xfrm>
-            <a:off x="8586216" y="2322576"/>
-            <a:ext cx="475488" cy="475488"/>
-          </a:xfrm>
-          <a:prstGeom prst="rect">
-            <a:avLst/>
-          </a:prstGeom>
-        </p:spPr>
-      </p:pic>
-      <p:sp>
-        <p:nvSpPr>
-          <p:cNvPr id="18" name="Principle 3 title"/>
+              <a:rPr lang="en-US" sz="1600" dirty="0">
+                <a:solidFill>
+                  <a:srgbClr val="141B34"/>
+                </a:solidFill>
+              </a:rPr>
+              <a:t>docentes de secundaria tiene 55 años o más: hacia 2036, menos docentes</a:t>
+            </a:r>
+            <a:endParaRPr lang="en-US" sz="1600" dirty="0"/>
+          </a:p>
+        </p:txBody>
+      </p:sp>
+      <p:sp>
+        <p:nvSpPr>
+          <p:cNvPr id="16" name="Scale takeaway"/>
           <p:cNvSpPr txBox="1"/>
           <p:nvPr/>
         </p:nvSpPr>
         <p:spPr>
           <a:xfrm>
-            <a:off x="8366760" y="3246120"/>
-            <a:ext cx="2834640" cy="822960"/>
+            <a:off x="548640" y="5577840"/>
+            <a:ext cx="11094415" cy="502920"/>
           </a:xfrm>
           <a:prstGeom prst="rect">
             <a:avLst/>
@@ -5789,57 +6389,21 @@
           <a:ln/>
         </p:spPr>
         <p:txBody>
-          <a:bodyPr wrap="square" lIns="0" tIns="0" rIns="0" bIns="0" rtlCol="0" anchor="t"/>
+          <a:bodyPr wrap="square" lIns="0" tIns="0" rIns="0" bIns="0" rtlCol="0" anchor="ctr"/>
           <a:lstStyle/>
           <a:p>
             <a:pPr indent="0" marL="0">
               <a:buNone/>
             </a:pPr>
             <a:r>
-              <a:rPr lang="en-US" sz="2100" b="1" dirty="0">
+              <a:rPr lang="en-US" sz="2000" b="1" dirty="0">
                 <a:solidFill>
                   <a:srgbClr val="141B34"/>
                 </a:solidFill>
               </a:rPr>
-              <a:t>La IA sugiere, el docente decide</a:t>
-            </a:r>
-            <a:endParaRPr lang="en-US" sz="2100" dirty="0"/>
-          </a:p>
-        </p:txBody>
-      </p:sp>
-      <p:sp>
-        <p:nvSpPr>
-          <p:cNvPr id="19" name="Principle 3 detail"/>
-          <p:cNvSpPr txBox="1"/>
-          <p:nvPr/>
-        </p:nvSpPr>
-        <p:spPr>
-          <a:xfrm>
-            <a:off x="8366760" y="4069080"/>
-            <a:ext cx="2834640" cy="1554480"/>
-          </a:xfrm>
-          <a:prstGeom prst="rect">
-            <a:avLst/>
-          </a:prstGeom>
-          <a:noFill/>
-          <a:ln/>
-        </p:spPr>
-        <p:txBody>
-          <a:bodyPr wrap="square" lIns="0" tIns="0" rIns="0" bIns="0" rtlCol="0" anchor="t"/>
-          <a:lstStyle/>
-          <a:p>
-            <a:pPr indent="0" marL="0">
-              <a:buNone/>
-            </a:pPr>
-            <a:r>
-              <a:rPr lang="en-US" sz="1500" dirty="0">
-                <a:solidFill>
-                  <a:srgbClr val="4F5568"/>
-                </a:solidFill>
-              </a:rPr>
-              <a:t>Diseñado para quedar fuera del riesgo alto del Reglamento peruano de IA: complementa, no reemplaza.</a:t>
-            </a:r>
-            <a:endParaRPr lang="en-US" sz="1500" dirty="0"/>
+              <a:t>Necesitamos la defensa, pero para toda la clase.</a:t>
+            </a:r>
+            <a:endParaRPr lang="en-US" sz="2000" dirty="0"/>
           </a:p>
         </p:txBody>
       </p:sp>
@@ -5945,7 +6509,7 @@
                   <a:schemeClr val="accent1"/>
                 </a:solidFill>
               </a:rPr>
-              <a:t>QUÉ · LA SOLUCIÓN</a:t>
+              <a:t>CÓMO · NUESTROS PRINCIPIOS</a:t>
             </a:r>
             <a:endParaRPr lang="en-US" sz="1300" dirty="0"/>
           </a:p>
@@ -5983,7 +6547,7 @@
                   <a:schemeClr val="tx1"/>
                 </a:solidFill>
               </a:rPr>
-              <a:t>De la tarea de siempre a una defensa para toda la clase</a:t>
+              <a:t>Tres principios guían cada decisión</a:t>
             </a:r>
             <a:endParaRPr lang="en-US" sz="3400" dirty="0"/>
           </a:p>
@@ -6021,7 +6585,7 @@
                   <a:schemeClr val="accent4"/>
                 </a:solidFill>
               </a:rPr>
-              <a:t>Demo: defiendelo.vercel.app · 9 tareas de ejemplo de 8 cursos, con su PDF</a:t>
+              <a:t>Fuentes: Bisra et al. 2018 (64 estudios) · D.S. 115-2025-PCM, art. 24.1 b) · RVM 094-2020-MINEDU</a:t>
             </a:r>
             <a:endParaRPr lang="en-US" sz="1000" dirty="0"/>
           </a:p>
@@ -6029,18 +6593,18 @@
       </p:sp>
       <p:sp>
         <p:nvSpPr>
-          <p:cNvPr id="5" name="Solution step 1 card"/>
+          <p:cNvPr id="5" name="Principle 1 card"/>
           <p:cNvSpPr/>
           <p:nvPr/>
         </p:nvSpPr>
         <p:spPr>
           <a:xfrm>
             <a:off x="548640" y="1783080"/>
-            <a:ext cx="2606040" cy="3246120"/>
+            <a:ext cx="3474720" cy="3383280"/>
           </a:xfrm>
           <a:prstGeom prst="roundRect">
             <a:avLst>
-              <a:gd name="adj" fmla="val 4211"/>
+              <a:gd name="adj" fmla="val 3243"/>
             </a:avLst>
           </a:prstGeom>
           <a:solidFill>
@@ -6056,43 +6620,32 @@
       </p:sp>
       <p:sp>
         <p:nvSpPr>
-          <p:cNvPr id="6" name="Solution step 1 number"/>
-          <p:cNvSpPr txBox="1"/>
-          <p:nvPr/>
-        </p:nvSpPr>
-        <p:spPr>
-          <a:xfrm>
-            <a:off x="822960" y="1965960"/>
-            <a:ext cx="731520" cy="731520"/>
-          </a:xfrm>
-          <a:prstGeom prst="rect">
-            <a:avLst/>
-          </a:prstGeom>
-          <a:noFill/>
-          <a:ln/>
-        </p:spPr>
-        <p:txBody>
-          <a:bodyPr wrap="square" lIns="0" tIns="0" rIns="0" bIns="0" rtlCol="0" anchor="ctr"/>
-          <a:lstStyle/>
-          <a:p>
-            <a:pPr indent="0" marL="0">
-              <a:buNone/>
-            </a:pPr>
-            <a:r>
-              <a:rPr lang="en-US" sz="4000" b="1" dirty="0">
-                <a:solidFill>
-                  <a:srgbClr val="2340B8"/>
-                </a:solidFill>
-              </a:rPr>
-              <a:t>1</a:t>
-            </a:r>
-            <a:endParaRPr lang="en-US" sz="4000" dirty="0"/>
-          </a:p>
-        </p:txBody>
+          <p:cNvPr id="6" name="La IA está permitida circle"/>
+          <p:cNvSpPr/>
+          <p:nvPr/>
+        </p:nvSpPr>
+        <p:spPr>
+          <a:xfrm>
+            <a:off x="868680" y="2103120"/>
+            <a:ext cx="914400" cy="914400"/>
+          </a:xfrm>
+          <a:prstGeom prst="ellipse">
+            <a:avLst/>
+          </a:prstGeom>
+          <a:solidFill>
+            <a:srgbClr val="2340B8"/>
+          </a:solidFill>
+          <a:ln w="12700">
+            <a:solidFill>
+              <a:srgbClr val="2340B8"/>
+            </a:solidFill>
+            <a:prstDash val="solid"/>
+          </a:ln>
+        </p:spPr>
       </p:sp>
       <p:pic>
         <p:nvPicPr>
-          <p:cNvPr id="7" name="Image 0" descr="Rediseña">    </p:cNvPr>
+          <p:cNvPr id="7" name="Image 0" descr="La IA está permitida">    </p:cNvPr>
           <p:cNvPicPr>
             <a:picLocks noChangeAspect="1"/>
           </p:cNvPicPr>
@@ -6106,8 +6659,8 @@
         </p:blipFill>
         <p:spPr>
           <a:xfrm>
-            <a:off x="2331720" y="2103120"/>
-            <a:ext cx="548640" cy="548640"/>
+            <a:off x="1088136" y="2322576"/>
+            <a:ext cx="475488" cy="475488"/>
           </a:xfrm>
           <a:prstGeom prst="rect">
             <a:avLst/>
@@ -6116,14 +6669,14 @@
       </p:pic>
       <p:sp>
         <p:nvSpPr>
-          <p:cNvPr id="8" name="Solution step 1 title"/>
+          <p:cNvPr id="8" name="Principle 1 title"/>
           <p:cNvSpPr txBox="1"/>
           <p:nvPr/>
         </p:nvSpPr>
         <p:spPr>
           <a:xfrm>
-            <a:off x="822960" y="2834640"/>
-            <a:ext cx="2103120" cy="731520"/>
+            <a:off x="868680" y="3246120"/>
+            <a:ext cx="2834640" cy="822960"/>
           </a:xfrm>
           <a:prstGeom prst="rect">
             <a:avLst/>
@@ -6139,27 +6692,27 @@
               <a:buNone/>
             </a:pPr>
             <a:r>
-              <a:rPr lang="en-US" sz="2000" b="1" dirty="0">
+              <a:rPr lang="en-US" sz="2100" b="1" dirty="0">
                 <a:solidFill>
                   <a:srgbClr val="141B34"/>
                 </a:solidFill>
               </a:rPr>
-              <a:t>Rediseña</a:t>
-            </a:r>
-            <a:endParaRPr lang="en-US" sz="2000" dirty="0"/>
-          </a:p>
-        </p:txBody>
-      </p:sp>
-      <p:sp>
-        <p:nvSpPr>
-          <p:cNvPr id="9" name="Solution step 1 detail"/>
+              <a:t>La IA está permitida</a:t>
+            </a:r>
+            <a:endParaRPr lang="en-US" sz="2100" dirty="0"/>
+          </a:p>
+        </p:txBody>
+      </p:sp>
+      <p:sp>
+        <p:nvSpPr>
+          <p:cNvPr id="9" name="Principle 1 detail"/>
           <p:cNvSpPr txBox="1"/>
           <p:nvPr/>
         </p:nvSpPr>
         <p:spPr>
           <a:xfrm>
-            <a:off x="822960" y="3566160"/>
-            <a:ext cx="2103120" cy="1371600"/>
+            <a:off x="868680" y="4069080"/>
+            <a:ext cx="2834640" cy="1554480"/>
           </a:xfrm>
           <a:prstGeom prst="rect">
             <a:avLst/>
@@ -6175,31 +6728,31 @@
               <a:buNone/>
             </a:pPr>
             <a:r>
-              <a:rPr lang="en-US" sz="1400" dirty="0">
+              <a:rPr lang="en-US" sz="1500" dirty="0">
                 <a:solidFill>
                   <a:srgbClr val="4F5568"/>
                 </a:solidFill>
               </a:rPr>
-              <a:t>El docente sube su tarea (PDF o Word). La IA mueve la nota hacia decisiones que el alumno defiende.</a:t>
-            </a:r>
-            <a:endParaRPr lang="en-US" sz="1400" dirty="0"/>
-          </a:p>
-        </p:txBody>
-      </p:sp>
-      <p:sp>
-        <p:nvSpPr>
-          <p:cNvPr id="10" name="Solution step 2 card"/>
+              <a:t>No detectamos ni acusamos. Preguntamos si entiende lo que entregó.</a:t>
+            </a:r>
+            <a:endParaRPr lang="en-US" sz="1500" dirty="0"/>
+          </a:p>
+        </p:txBody>
+      </p:sp>
+      <p:sp>
+        <p:nvSpPr>
+          <p:cNvPr id="10" name="Principle 2 card"/>
           <p:cNvSpPr/>
           <p:nvPr/>
         </p:nvSpPr>
         <p:spPr>
           <a:xfrm>
-            <a:off x="3355848" y="1783080"/>
-            <a:ext cx="2606040" cy="3246120"/>
+            <a:off x="4297680" y="1783080"/>
+            <a:ext cx="3474720" cy="3383280"/>
           </a:xfrm>
           <a:prstGeom prst="roundRect">
             <a:avLst>
-              <a:gd name="adj" fmla="val 4211"/>
+              <a:gd name="adj" fmla="val 3243"/>
             </a:avLst>
           </a:prstGeom>
           <a:solidFill>
@@ -6215,43 +6768,32 @@
       </p:sp>
       <p:sp>
         <p:nvSpPr>
-          <p:cNvPr id="11" name="Solution step 2 number"/>
-          <p:cNvSpPr txBox="1"/>
-          <p:nvPr/>
-        </p:nvSpPr>
-        <p:spPr>
-          <a:xfrm>
-            <a:off x="3630168" y="1965960"/>
-            <a:ext cx="731520" cy="731520"/>
-          </a:xfrm>
-          <a:prstGeom prst="rect">
-            <a:avLst/>
-          </a:prstGeom>
-          <a:noFill/>
-          <a:ln/>
-        </p:spPr>
-        <p:txBody>
-          <a:bodyPr wrap="square" lIns="0" tIns="0" rIns="0" bIns="0" rtlCol="0" anchor="ctr"/>
-          <a:lstStyle/>
-          <a:p>
-            <a:pPr indent="0" marL="0">
-              <a:buNone/>
-            </a:pPr>
-            <a:r>
-              <a:rPr lang="en-US" sz="4000" b="1" dirty="0">
-                <a:solidFill>
-                  <a:srgbClr val="2340B8"/>
-                </a:solidFill>
-              </a:rPr>
-              <a:t>2</a:t>
-            </a:r>
-            <a:endParaRPr lang="en-US" sz="4000" dirty="0"/>
-          </a:p>
-        </p:txBody>
+          <p:cNvPr id="11" name="Defender enseña circle"/>
+          <p:cNvSpPr/>
+          <p:nvPr/>
+        </p:nvSpPr>
+        <p:spPr>
+          <a:xfrm>
+            <a:off x="4617720" y="2103120"/>
+            <a:ext cx="914400" cy="914400"/>
+          </a:xfrm>
+          <a:prstGeom prst="ellipse">
+            <a:avLst/>
+          </a:prstGeom>
+          <a:solidFill>
+            <a:srgbClr val="2340B8"/>
+          </a:solidFill>
+          <a:ln w="12700">
+            <a:solidFill>
+              <a:srgbClr val="2340B8"/>
+            </a:solidFill>
+            <a:prstDash val="solid"/>
+          </a:ln>
+        </p:spPr>
       </p:sp>
       <p:pic>
         <p:nvPicPr>
-          <p:cNvPr id="12" name="Image 1" descr="Prueba de estrés">    </p:cNvPr>
+          <p:cNvPr id="12" name="Image 1" descr="Defender enseña">    </p:cNvPr>
           <p:cNvPicPr>
             <a:picLocks noChangeAspect="1"/>
           </p:cNvPicPr>
@@ -6265,8 +6807,8 @@
         </p:blipFill>
         <p:spPr>
           <a:xfrm>
-            <a:off x="5138928" y="2103120"/>
-            <a:ext cx="548640" cy="548640"/>
+            <a:off x="4837176" y="2322576"/>
+            <a:ext cx="475488" cy="475488"/>
           </a:xfrm>
           <a:prstGeom prst="rect">
             <a:avLst/>
@@ -6275,14 +6817,14 @@
       </p:pic>
       <p:sp>
         <p:nvSpPr>
-          <p:cNvPr id="13" name="Solution step 2 title"/>
+          <p:cNvPr id="13" name="Principle 2 title"/>
           <p:cNvSpPr txBox="1"/>
           <p:nvPr/>
         </p:nvSpPr>
         <p:spPr>
           <a:xfrm>
-            <a:off x="3630168" y="2834640"/>
-            <a:ext cx="2103120" cy="731520"/>
+            <a:off x="4617720" y="3246120"/>
+            <a:ext cx="2834640" cy="822960"/>
           </a:xfrm>
           <a:prstGeom prst="rect">
             <a:avLst/>
@@ -6298,27 +6840,27 @@
               <a:buNone/>
             </a:pPr>
             <a:r>
-              <a:rPr lang="en-US" sz="2000" b="1" dirty="0">
+              <a:rPr lang="en-US" sz="2100" b="1" dirty="0">
                 <a:solidFill>
                   <a:srgbClr val="141B34"/>
                 </a:solidFill>
               </a:rPr>
-              <a:t>Prueba de estrés</a:t>
-            </a:r>
-            <a:endParaRPr lang="en-US" sz="2000" dirty="0"/>
-          </a:p>
-        </p:txBody>
-      </p:sp>
-      <p:sp>
-        <p:nvSpPr>
-          <p:cNvPr id="14" name="Solution step 2 detail"/>
+              <a:t>Defender enseña</a:t>
+            </a:r>
+            <a:endParaRPr lang="en-US" sz="2100" dirty="0"/>
+          </a:p>
+        </p:txBody>
+      </p:sp>
+      <p:sp>
+        <p:nvSpPr>
+          <p:cNvPr id="14" name="Principle 2 detail"/>
           <p:cNvSpPr txBox="1"/>
           <p:nvPr/>
         </p:nvSpPr>
         <p:spPr>
           <a:xfrm>
-            <a:off x="3630168" y="3566160"/>
-            <a:ext cx="2103120" cy="1371600"/>
+            <a:off x="4617720" y="4069080"/>
+            <a:ext cx="2834640" cy="1554480"/>
           </a:xfrm>
           <a:prstGeom prst="rect">
             <a:avLst/>
@@ -6334,31 +6876,31 @@
               <a:buNone/>
             </a:pPr>
             <a:r>
-              <a:rPr lang="en-US" sz="1400" dirty="0">
+              <a:rPr lang="en-US" sz="1500" dirty="0">
                 <a:solidFill>
                   <a:srgbClr val="4F5568"/>
                 </a:solidFill>
               </a:rPr>
-              <a:t>La IA resuelve la tarea sola: el docente ve cuánta nota saca antes y después.</a:t>
-            </a:r>
-            <a:endParaRPr lang="en-US" sz="1400" dirty="0"/>
-          </a:p>
-        </p:txBody>
-      </p:sp>
-      <p:sp>
-        <p:nvSpPr>
-          <p:cNvPr id="15" name="Solution step 3 card"/>
+              <a:t>Explicar el propio trabajo es autoexplicación: ≈ medio desvío estándar de efecto (g = 0,55).</a:t>
+            </a:r>
+            <a:endParaRPr lang="en-US" sz="1500" dirty="0"/>
+          </a:p>
+        </p:txBody>
+      </p:sp>
+      <p:sp>
+        <p:nvSpPr>
+          <p:cNvPr id="15" name="Principle 3 card"/>
           <p:cNvSpPr/>
           <p:nvPr/>
         </p:nvSpPr>
         <p:spPr>
           <a:xfrm>
-            <a:off x="6163056" y="1783080"/>
-            <a:ext cx="2606040" cy="3246120"/>
+            <a:off x="8046720" y="1783080"/>
+            <a:ext cx="3474720" cy="3383280"/>
           </a:xfrm>
           <a:prstGeom prst="roundRect">
             <a:avLst>
-              <a:gd name="adj" fmla="val 4211"/>
+              <a:gd name="adj" fmla="val 3243"/>
             </a:avLst>
           </a:prstGeom>
           <a:solidFill>
@@ -6374,43 +6916,32 @@
       </p:sp>
       <p:sp>
         <p:nvSpPr>
-          <p:cNvPr id="16" name="Solution step 3 number"/>
-          <p:cNvSpPr txBox="1"/>
-          <p:nvPr/>
-        </p:nvSpPr>
-        <p:spPr>
-          <a:xfrm>
-            <a:off x="6437376" y="1965960"/>
-            <a:ext cx="731520" cy="731520"/>
-          </a:xfrm>
-          <a:prstGeom prst="rect">
-            <a:avLst/>
-          </a:prstGeom>
-          <a:noFill/>
-          <a:ln/>
-        </p:spPr>
-        <p:txBody>
-          <a:bodyPr wrap="square" lIns="0" tIns="0" rIns="0" bIns="0" rtlCol="0" anchor="ctr"/>
-          <a:lstStyle/>
-          <a:p>
-            <a:pPr indent="0" marL="0">
-              <a:buNone/>
-            </a:pPr>
-            <a:r>
-              <a:rPr lang="en-US" sz="4000" b="1" dirty="0">
-                <a:solidFill>
-                  <a:srgbClr val="2340B8"/>
-                </a:solidFill>
-              </a:rPr>
-              <a:t>3</a:t>
-            </a:r>
-            <a:endParaRPr lang="en-US" sz="4000" dirty="0"/>
-          </a:p>
-        </p:txBody>
+          <p:cNvPr id="16" name="La IA sugiere, el docente decide circle"/>
+          <p:cNvSpPr/>
+          <p:nvPr/>
+        </p:nvSpPr>
+        <p:spPr>
+          <a:xfrm>
+            <a:off x="8366760" y="2103120"/>
+            <a:ext cx="914400" cy="914400"/>
+          </a:xfrm>
+          <a:prstGeom prst="ellipse">
+            <a:avLst/>
+          </a:prstGeom>
+          <a:solidFill>
+            <a:srgbClr val="2340B8"/>
+          </a:solidFill>
+          <a:ln w="12700">
+            <a:solidFill>
+              <a:srgbClr val="2340B8"/>
+            </a:solidFill>
+            <a:prstDash val="solid"/>
+          </a:ln>
+        </p:spPr>
       </p:sp>
       <p:pic>
         <p:nvPicPr>
-          <p:cNvPr id="17" name="Image 2" descr="Entrega y defiende">    </p:cNvPr>
+          <p:cNvPr id="17" name="Image 2" descr="La IA sugiere, el docente decide">    </p:cNvPr>
           <p:cNvPicPr>
             <a:picLocks noChangeAspect="1"/>
           </p:cNvPicPr>
@@ -6424,8 +6955,8 @@
         </p:blipFill>
         <p:spPr>
           <a:xfrm>
-            <a:off x="7946136" y="2103120"/>
-            <a:ext cx="548640" cy="548640"/>
+            <a:off x="8586216" y="2322576"/>
+            <a:ext cx="475488" cy="475488"/>
           </a:xfrm>
           <a:prstGeom prst="rect">
             <a:avLst/>
@@ -6434,14 +6965,14 @@
       </p:pic>
       <p:sp>
         <p:nvSpPr>
-          <p:cNvPr id="18" name="Solution step 3 title"/>
+          <p:cNvPr id="18" name="Principle 3 title"/>
           <p:cNvSpPr txBox="1"/>
           <p:nvPr/>
         </p:nvSpPr>
         <p:spPr>
           <a:xfrm>
-            <a:off x="6437376" y="2834640"/>
-            <a:ext cx="2103120" cy="731520"/>
+            <a:off x="8366760" y="3246120"/>
+            <a:ext cx="2834640" cy="822960"/>
           </a:xfrm>
           <a:prstGeom prst="rect">
             <a:avLst/>
@@ -6457,27 +6988,27 @@
               <a:buNone/>
             </a:pPr>
             <a:r>
-              <a:rPr lang="en-US" sz="2000" b="1" dirty="0">
+              <a:rPr lang="en-US" sz="2100" b="1" dirty="0">
                 <a:solidFill>
                   <a:srgbClr val="141B34"/>
                 </a:solidFill>
               </a:rPr>
-              <a:t>Entrega y defiende</a:t>
-            </a:r>
-            <a:endParaRPr lang="en-US" sz="2000" dirty="0"/>
-          </a:p>
-        </p:txBody>
-      </p:sp>
-      <p:sp>
-        <p:nvSpPr>
-          <p:cNvPr id="19" name="Solution step 3 detail"/>
+              <a:t>La IA sugiere, el docente decide</a:t>
+            </a:r>
+            <a:endParaRPr lang="en-US" sz="2100" dirty="0"/>
+          </a:p>
+        </p:txBody>
+      </p:sp>
+      <p:sp>
+        <p:nvSpPr>
+          <p:cNvPr id="19" name="Principle 3 detail"/>
           <p:cNvSpPr txBox="1"/>
           <p:nvPr/>
         </p:nvSpPr>
         <p:spPr>
           <a:xfrm>
-            <a:off x="6437376" y="3566160"/>
-            <a:ext cx="2103120" cy="1371600"/>
+            <a:off x="8366760" y="4069080"/>
+            <a:ext cx="2834640" cy="1554480"/>
           </a:xfrm>
           <a:prstGeom prst="rect">
             <a:avLst/>
@@ -6493,209 +7024,14 @@
               <a:buNone/>
             </a:pPr>
             <a:r>
-              <a:rPr lang="en-US" sz="1400" dirty="0">
+              <a:rPr lang="en-US" sz="1500" dirty="0">
                 <a:solidFill>
                   <a:srgbClr val="4F5568"/>
                 </a:solidFill>
               </a:rPr>
-              <a:t>Preguntas sobre su propio trabajo. En el celular, en papel o en voz alta.</a:t>
-            </a:r>
-            <a:endParaRPr lang="en-US" sz="1400" dirty="0"/>
-          </a:p>
-        </p:txBody>
-      </p:sp>
-      <p:sp>
-        <p:nvSpPr>
-          <p:cNvPr id="20" name="Solution step 4 card"/>
-          <p:cNvSpPr/>
-          <p:nvPr/>
-        </p:nvSpPr>
-        <p:spPr>
-          <a:xfrm>
-            <a:off x="8970264" y="1783080"/>
-            <a:ext cx="2606040" cy="3246120"/>
-          </a:xfrm>
-          <a:prstGeom prst="roundRect">
-            <a:avLst>
-              <a:gd name="adj" fmla="val 4211"/>
-            </a:avLst>
-          </a:prstGeom>
-          <a:solidFill>
-            <a:srgbClr val="E7ECFB"/>
-          </a:solidFill>
-          <a:ln w="12700">
-            <a:solidFill>
-              <a:srgbClr val="E7ECFB"/>
-            </a:solidFill>
-            <a:prstDash val="solid"/>
-          </a:ln>
-        </p:spPr>
-      </p:sp>
-      <p:sp>
-        <p:nvSpPr>
-          <p:cNvPr id="21" name="Solution step 4 number"/>
-          <p:cNvSpPr txBox="1"/>
-          <p:nvPr/>
-        </p:nvSpPr>
-        <p:spPr>
-          <a:xfrm>
-            <a:off x="9244584" y="1965960"/>
-            <a:ext cx="731520" cy="731520"/>
-          </a:xfrm>
-          <a:prstGeom prst="rect">
-            <a:avLst/>
-          </a:prstGeom>
-          <a:noFill/>
-          <a:ln/>
-        </p:spPr>
-        <p:txBody>
-          <a:bodyPr wrap="square" lIns="0" tIns="0" rIns="0" bIns="0" rtlCol="0" anchor="ctr"/>
-          <a:lstStyle/>
-          <a:p>
-            <a:pPr indent="0" marL="0">
-              <a:buNone/>
-            </a:pPr>
-            <a:r>
-              <a:rPr lang="en-US" sz="4000" b="1" dirty="0">
-                <a:solidFill>
-                  <a:srgbClr val="2340B8"/>
-                </a:solidFill>
-              </a:rPr>
-              <a:t>4</a:t>
-            </a:r>
-            <a:endParaRPr lang="en-US" sz="4000" dirty="0"/>
-          </a:p>
-        </p:txBody>
-      </p:sp>
-      <p:pic>
-        <p:nvPicPr>
-          <p:cNvPr id="22" name="Image 3" descr="El docente decide">    </p:cNvPr>
-          <p:cNvPicPr>
-            <a:picLocks noChangeAspect="1"/>
-          </p:cNvPicPr>
-          <p:nvPr/>
-        </p:nvPicPr>
-        <p:blipFill>
-          <a:blip r:embed="rId4"/>
-          <a:stretch>
-            <a:fillRect/>
-          </a:stretch>
-        </p:blipFill>
-        <p:spPr>
-          <a:xfrm>
-            <a:off x="10753344" y="2103120"/>
-            <a:ext cx="548640" cy="548640"/>
-          </a:xfrm>
-          <a:prstGeom prst="rect">
-            <a:avLst/>
-          </a:prstGeom>
-        </p:spPr>
-      </p:pic>
-      <p:sp>
-        <p:nvSpPr>
-          <p:cNvPr id="23" name="Solution step 4 title"/>
-          <p:cNvSpPr txBox="1"/>
-          <p:nvPr/>
-        </p:nvSpPr>
-        <p:spPr>
-          <a:xfrm>
-            <a:off x="9244584" y="2834640"/>
-            <a:ext cx="2103120" cy="731520"/>
-          </a:xfrm>
-          <a:prstGeom prst="rect">
-            <a:avLst/>
-          </a:prstGeom>
-          <a:noFill/>
-          <a:ln/>
-        </p:spPr>
-        <p:txBody>
-          <a:bodyPr wrap="square" lIns="0" tIns="0" rIns="0" bIns="0" rtlCol="0" anchor="t"/>
-          <a:lstStyle/>
-          <a:p>
-            <a:pPr indent="0" marL="0">
-              <a:buNone/>
-            </a:pPr>
-            <a:r>
-              <a:rPr lang="en-US" sz="2000" b="1" dirty="0">
-                <a:solidFill>
-                  <a:srgbClr val="141B34"/>
-                </a:solidFill>
-              </a:rPr>
-              <a:t>El docente decide</a:t>
-            </a:r>
-            <a:endParaRPr lang="en-US" sz="2000" dirty="0"/>
-          </a:p>
-        </p:txBody>
-      </p:sp>
-      <p:sp>
-        <p:nvSpPr>
-          <p:cNvPr id="24" name="Solution step 4 detail"/>
-          <p:cNvSpPr txBox="1"/>
-          <p:nvPr/>
-        </p:nvSpPr>
-        <p:spPr>
-          <a:xfrm>
-            <a:off x="9244584" y="3566160"/>
-            <a:ext cx="2103120" cy="1371600"/>
-          </a:xfrm>
-          <a:prstGeom prst="rect">
-            <a:avLst/>
-          </a:prstGeom>
-          <a:noFill/>
-          <a:ln/>
-        </p:spPr>
-        <p:txBody>
-          <a:bodyPr wrap="square" lIns="0" tIns="0" rIns="0" bIns="0" rtlCol="0" anchor="t"/>
-          <a:lstStyle/>
-          <a:p>
-            <a:pPr indent="0" marL="0">
-              <a:buNone/>
-            </a:pPr>
-            <a:r>
-              <a:rPr lang="en-US" sz="1400" dirty="0">
-                <a:solidFill>
-                  <a:srgbClr val="4F5568"/>
-                </a:solidFill>
-              </a:rPr>
-              <a:t>Nivel sugerido con evidencia por criterio, a quién atender primero y qué volver a enseñar.</a:t>
-            </a:r>
-            <a:endParaRPr lang="en-US" sz="1400" dirty="0"/>
-          </a:p>
-        </p:txBody>
-      </p:sp>
-      <p:sp>
-        <p:nvSpPr>
-          <p:cNvPr id="25" name="Privacy line"/>
-          <p:cNvSpPr txBox="1"/>
-          <p:nvPr/>
-        </p:nvSpPr>
-        <p:spPr>
-          <a:xfrm>
-            <a:off x="548640" y="5349240"/>
-            <a:ext cx="11094415" cy="457200"/>
-          </a:xfrm>
-          <a:prstGeom prst="rect">
-            <a:avLst/>
-          </a:prstGeom>
-          <a:noFill/>
-          <a:ln/>
-        </p:spPr>
-        <p:txBody>
-          <a:bodyPr wrap="square" lIns="0" tIns="0" rIns="0" bIns="0" rtlCol="0" anchor="ctr"/>
-          <a:lstStyle/>
-          <a:p>
-            <a:pPr indent="0" marL="0">
-              <a:buNone/>
-            </a:pPr>
-            <a:r>
-              <a:rPr lang="en-US" sz="1700" dirty="0">
-                <a:solidFill>
-                  <a:srgbClr val="141B34"/>
-                </a:solidFill>
-              </a:rPr>
-              <a:t>Sin datos personales: alias y código, sin audio ni video.</a:t>
-            </a:r>
-            <a:endParaRPr lang="en-US" sz="1700" dirty="0"/>
+              <a:t>Diseñado para quedar fuera del riesgo alto del Reglamento peruano de IA: complementa, no reemplaza.</a:t>
+            </a:r>
+            <a:endParaRPr lang="en-US" sz="1500" dirty="0"/>
           </a:p>
         </p:txBody>
       </p:sp>
@@ -6801,7 +7137,7 @@
                   <a:schemeClr val="accent1"/>
                 </a:solidFill>
               </a:rPr>
-              <a:t>QUÉ · POR QUÉ ES DIFERENTE</a:t>
+              <a:t>QUÉ · LA SOLUCIÓN</a:t>
             </a:r>
             <a:endParaRPr lang="en-US" sz="1300" dirty="0"/>
           </a:p>
@@ -6839,7 +7175,7 @@
                   <a:schemeClr val="tx1"/>
                 </a:solidFill>
               </a:rPr>
-              <a:t>Nadie más combina rediseño, prueba y defensa</a:t>
+              <a:t>De la tarea de siempre a una defensa para toda la clase</a:t>
             </a:r>
             <a:endParaRPr lang="en-US" sz="3400" dirty="0"/>
           </a:p>
@@ -6877,6 +7213,862 @@
                   <a:schemeClr val="accent4"/>
                 </a:solidFill>
               </a:rPr>
+              <a:t>Demo: defiendelo.vercel.app · 9 tareas de ejemplo de 8 cursos, con su PDF</a:t>
+            </a:r>
+            <a:endParaRPr lang="en-US" sz="1000" dirty="0"/>
+          </a:p>
+        </p:txBody>
+      </p:sp>
+      <p:sp>
+        <p:nvSpPr>
+          <p:cNvPr id="5" name="Solution step 1 card"/>
+          <p:cNvSpPr/>
+          <p:nvPr/>
+        </p:nvSpPr>
+        <p:spPr>
+          <a:xfrm>
+            <a:off x="548640" y="1783080"/>
+            <a:ext cx="2606040" cy="3246120"/>
+          </a:xfrm>
+          <a:prstGeom prst="roundRect">
+            <a:avLst>
+              <a:gd name="adj" fmla="val 4211"/>
+            </a:avLst>
+          </a:prstGeom>
+          <a:solidFill>
+            <a:srgbClr val="F3F4F8"/>
+          </a:solidFill>
+          <a:ln w="12700">
+            <a:solidFill>
+              <a:srgbClr val="F3F4F8"/>
+            </a:solidFill>
+            <a:prstDash val="solid"/>
+          </a:ln>
+        </p:spPr>
+      </p:sp>
+      <p:sp>
+        <p:nvSpPr>
+          <p:cNvPr id="6" name="Solution step 1 number"/>
+          <p:cNvSpPr txBox="1"/>
+          <p:nvPr/>
+        </p:nvSpPr>
+        <p:spPr>
+          <a:xfrm>
+            <a:off x="822960" y="1965960"/>
+            <a:ext cx="731520" cy="731520"/>
+          </a:xfrm>
+          <a:prstGeom prst="rect">
+            <a:avLst/>
+          </a:prstGeom>
+          <a:noFill/>
+          <a:ln/>
+        </p:spPr>
+        <p:txBody>
+          <a:bodyPr wrap="square" lIns="0" tIns="0" rIns="0" bIns="0" rtlCol="0" anchor="ctr"/>
+          <a:lstStyle/>
+          <a:p>
+            <a:pPr indent="0" marL="0">
+              <a:buNone/>
+            </a:pPr>
+            <a:r>
+              <a:rPr lang="en-US" sz="4000" b="1" dirty="0">
+                <a:solidFill>
+                  <a:srgbClr val="2340B8"/>
+                </a:solidFill>
+              </a:rPr>
+              <a:t>1</a:t>
+            </a:r>
+            <a:endParaRPr lang="en-US" sz="4000" dirty="0"/>
+          </a:p>
+        </p:txBody>
+      </p:sp>
+      <p:pic>
+        <p:nvPicPr>
+          <p:cNvPr id="7" name="Image 0" descr="Rediseña">    </p:cNvPr>
+          <p:cNvPicPr>
+            <a:picLocks noChangeAspect="1"/>
+          </p:cNvPicPr>
+          <p:nvPr/>
+        </p:nvPicPr>
+        <p:blipFill>
+          <a:blip r:embed="rId1"/>
+          <a:stretch>
+            <a:fillRect/>
+          </a:stretch>
+        </p:blipFill>
+        <p:spPr>
+          <a:xfrm>
+            <a:off x="2331720" y="2103120"/>
+            <a:ext cx="548640" cy="548640"/>
+          </a:xfrm>
+          <a:prstGeom prst="rect">
+            <a:avLst/>
+          </a:prstGeom>
+        </p:spPr>
+      </p:pic>
+      <p:sp>
+        <p:nvSpPr>
+          <p:cNvPr id="8" name="Solution step 1 title"/>
+          <p:cNvSpPr txBox="1"/>
+          <p:nvPr/>
+        </p:nvSpPr>
+        <p:spPr>
+          <a:xfrm>
+            <a:off x="822960" y="2834640"/>
+            <a:ext cx="2103120" cy="731520"/>
+          </a:xfrm>
+          <a:prstGeom prst="rect">
+            <a:avLst/>
+          </a:prstGeom>
+          <a:noFill/>
+          <a:ln/>
+        </p:spPr>
+        <p:txBody>
+          <a:bodyPr wrap="square" lIns="0" tIns="0" rIns="0" bIns="0" rtlCol="0" anchor="t"/>
+          <a:lstStyle/>
+          <a:p>
+            <a:pPr indent="0" marL="0">
+              <a:buNone/>
+            </a:pPr>
+            <a:r>
+              <a:rPr lang="en-US" sz="2000" b="1" dirty="0">
+                <a:solidFill>
+                  <a:srgbClr val="141B34"/>
+                </a:solidFill>
+              </a:rPr>
+              <a:t>Rediseña</a:t>
+            </a:r>
+            <a:endParaRPr lang="en-US" sz="2000" dirty="0"/>
+          </a:p>
+        </p:txBody>
+      </p:sp>
+      <p:sp>
+        <p:nvSpPr>
+          <p:cNvPr id="9" name="Solution step 1 detail"/>
+          <p:cNvSpPr txBox="1"/>
+          <p:nvPr/>
+        </p:nvSpPr>
+        <p:spPr>
+          <a:xfrm>
+            <a:off x="822960" y="3566160"/>
+            <a:ext cx="2103120" cy="1371600"/>
+          </a:xfrm>
+          <a:prstGeom prst="rect">
+            <a:avLst/>
+          </a:prstGeom>
+          <a:noFill/>
+          <a:ln/>
+        </p:spPr>
+        <p:txBody>
+          <a:bodyPr wrap="square" lIns="0" tIns="0" rIns="0" bIns="0" rtlCol="0" anchor="t"/>
+          <a:lstStyle/>
+          <a:p>
+            <a:pPr indent="0" marL="0">
+              <a:buNone/>
+            </a:pPr>
+            <a:r>
+              <a:rPr lang="en-US" sz="1400" dirty="0">
+                <a:solidFill>
+                  <a:srgbClr val="4F5568"/>
+                </a:solidFill>
+              </a:rPr>
+              <a:t>El docente sube su tarea (PDF o Word). La IA mueve la nota hacia decisiones que el alumno defiende.</a:t>
+            </a:r>
+            <a:endParaRPr lang="en-US" sz="1400" dirty="0"/>
+          </a:p>
+        </p:txBody>
+      </p:sp>
+      <p:sp>
+        <p:nvSpPr>
+          <p:cNvPr id="10" name="Solution step 2 card"/>
+          <p:cNvSpPr/>
+          <p:nvPr/>
+        </p:nvSpPr>
+        <p:spPr>
+          <a:xfrm>
+            <a:off x="3355848" y="1783080"/>
+            <a:ext cx="2606040" cy="3246120"/>
+          </a:xfrm>
+          <a:prstGeom prst="roundRect">
+            <a:avLst>
+              <a:gd name="adj" fmla="val 4211"/>
+            </a:avLst>
+          </a:prstGeom>
+          <a:solidFill>
+            <a:srgbClr val="F3F4F8"/>
+          </a:solidFill>
+          <a:ln w="12700">
+            <a:solidFill>
+              <a:srgbClr val="F3F4F8"/>
+            </a:solidFill>
+            <a:prstDash val="solid"/>
+          </a:ln>
+        </p:spPr>
+      </p:sp>
+      <p:sp>
+        <p:nvSpPr>
+          <p:cNvPr id="11" name="Solution step 2 number"/>
+          <p:cNvSpPr txBox="1"/>
+          <p:nvPr/>
+        </p:nvSpPr>
+        <p:spPr>
+          <a:xfrm>
+            <a:off x="3630168" y="1965960"/>
+            <a:ext cx="731520" cy="731520"/>
+          </a:xfrm>
+          <a:prstGeom prst="rect">
+            <a:avLst/>
+          </a:prstGeom>
+          <a:noFill/>
+          <a:ln/>
+        </p:spPr>
+        <p:txBody>
+          <a:bodyPr wrap="square" lIns="0" tIns="0" rIns="0" bIns="0" rtlCol="0" anchor="ctr"/>
+          <a:lstStyle/>
+          <a:p>
+            <a:pPr indent="0" marL="0">
+              <a:buNone/>
+            </a:pPr>
+            <a:r>
+              <a:rPr lang="en-US" sz="4000" b="1" dirty="0">
+                <a:solidFill>
+                  <a:srgbClr val="2340B8"/>
+                </a:solidFill>
+              </a:rPr>
+              <a:t>2</a:t>
+            </a:r>
+            <a:endParaRPr lang="en-US" sz="4000" dirty="0"/>
+          </a:p>
+        </p:txBody>
+      </p:sp>
+      <p:pic>
+        <p:nvPicPr>
+          <p:cNvPr id="12" name="Image 1" descr="Prueba de estrés">    </p:cNvPr>
+          <p:cNvPicPr>
+            <a:picLocks noChangeAspect="1"/>
+          </p:cNvPicPr>
+          <p:nvPr/>
+        </p:nvPicPr>
+        <p:blipFill>
+          <a:blip r:embed="rId2"/>
+          <a:stretch>
+            <a:fillRect/>
+          </a:stretch>
+        </p:blipFill>
+        <p:spPr>
+          <a:xfrm>
+            <a:off x="5138928" y="2103120"/>
+            <a:ext cx="548640" cy="548640"/>
+          </a:xfrm>
+          <a:prstGeom prst="rect">
+            <a:avLst/>
+          </a:prstGeom>
+        </p:spPr>
+      </p:pic>
+      <p:sp>
+        <p:nvSpPr>
+          <p:cNvPr id="13" name="Solution step 2 title"/>
+          <p:cNvSpPr txBox="1"/>
+          <p:nvPr/>
+        </p:nvSpPr>
+        <p:spPr>
+          <a:xfrm>
+            <a:off x="3630168" y="2834640"/>
+            <a:ext cx="2103120" cy="731520"/>
+          </a:xfrm>
+          <a:prstGeom prst="rect">
+            <a:avLst/>
+          </a:prstGeom>
+          <a:noFill/>
+          <a:ln/>
+        </p:spPr>
+        <p:txBody>
+          <a:bodyPr wrap="square" lIns="0" tIns="0" rIns="0" bIns="0" rtlCol="0" anchor="t"/>
+          <a:lstStyle/>
+          <a:p>
+            <a:pPr indent="0" marL="0">
+              <a:buNone/>
+            </a:pPr>
+            <a:r>
+              <a:rPr lang="en-US" sz="2000" b="1" dirty="0">
+                <a:solidFill>
+                  <a:srgbClr val="141B34"/>
+                </a:solidFill>
+              </a:rPr>
+              <a:t>Prueba de estrés</a:t>
+            </a:r>
+            <a:endParaRPr lang="en-US" sz="2000" dirty="0"/>
+          </a:p>
+        </p:txBody>
+      </p:sp>
+      <p:sp>
+        <p:nvSpPr>
+          <p:cNvPr id="14" name="Solution step 2 detail"/>
+          <p:cNvSpPr txBox="1"/>
+          <p:nvPr/>
+        </p:nvSpPr>
+        <p:spPr>
+          <a:xfrm>
+            <a:off x="3630168" y="3566160"/>
+            <a:ext cx="2103120" cy="1371600"/>
+          </a:xfrm>
+          <a:prstGeom prst="rect">
+            <a:avLst/>
+          </a:prstGeom>
+          <a:noFill/>
+          <a:ln/>
+        </p:spPr>
+        <p:txBody>
+          <a:bodyPr wrap="square" lIns="0" tIns="0" rIns="0" bIns="0" rtlCol="0" anchor="t"/>
+          <a:lstStyle/>
+          <a:p>
+            <a:pPr indent="0" marL="0">
+              <a:buNone/>
+            </a:pPr>
+            <a:r>
+              <a:rPr lang="en-US" sz="1400" dirty="0">
+                <a:solidFill>
+                  <a:srgbClr val="4F5568"/>
+                </a:solidFill>
+              </a:rPr>
+              <a:t>La IA resuelve la tarea sola: el docente ve cuánta nota saca antes y después.</a:t>
+            </a:r>
+            <a:endParaRPr lang="en-US" sz="1400" dirty="0"/>
+          </a:p>
+        </p:txBody>
+      </p:sp>
+      <p:sp>
+        <p:nvSpPr>
+          <p:cNvPr id="15" name="Solution step 3 card"/>
+          <p:cNvSpPr/>
+          <p:nvPr/>
+        </p:nvSpPr>
+        <p:spPr>
+          <a:xfrm>
+            <a:off x="6163056" y="1783080"/>
+            <a:ext cx="2606040" cy="3246120"/>
+          </a:xfrm>
+          <a:prstGeom prst="roundRect">
+            <a:avLst>
+              <a:gd name="adj" fmla="val 4211"/>
+            </a:avLst>
+          </a:prstGeom>
+          <a:solidFill>
+            <a:srgbClr val="F3F4F8"/>
+          </a:solidFill>
+          <a:ln w="12700">
+            <a:solidFill>
+              <a:srgbClr val="F3F4F8"/>
+            </a:solidFill>
+            <a:prstDash val="solid"/>
+          </a:ln>
+        </p:spPr>
+      </p:sp>
+      <p:sp>
+        <p:nvSpPr>
+          <p:cNvPr id="16" name="Solution step 3 number"/>
+          <p:cNvSpPr txBox="1"/>
+          <p:nvPr/>
+        </p:nvSpPr>
+        <p:spPr>
+          <a:xfrm>
+            <a:off x="6437376" y="1965960"/>
+            <a:ext cx="731520" cy="731520"/>
+          </a:xfrm>
+          <a:prstGeom prst="rect">
+            <a:avLst/>
+          </a:prstGeom>
+          <a:noFill/>
+          <a:ln/>
+        </p:spPr>
+        <p:txBody>
+          <a:bodyPr wrap="square" lIns="0" tIns="0" rIns="0" bIns="0" rtlCol="0" anchor="ctr"/>
+          <a:lstStyle/>
+          <a:p>
+            <a:pPr indent="0" marL="0">
+              <a:buNone/>
+            </a:pPr>
+            <a:r>
+              <a:rPr lang="en-US" sz="4000" b="1" dirty="0">
+                <a:solidFill>
+                  <a:srgbClr val="2340B8"/>
+                </a:solidFill>
+              </a:rPr>
+              <a:t>3</a:t>
+            </a:r>
+            <a:endParaRPr lang="en-US" sz="4000" dirty="0"/>
+          </a:p>
+        </p:txBody>
+      </p:sp>
+      <p:pic>
+        <p:nvPicPr>
+          <p:cNvPr id="17" name="Image 2" descr="Entrega y defiende">    </p:cNvPr>
+          <p:cNvPicPr>
+            <a:picLocks noChangeAspect="1"/>
+          </p:cNvPicPr>
+          <p:nvPr/>
+        </p:nvPicPr>
+        <p:blipFill>
+          <a:blip r:embed="rId3"/>
+          <a:stretch>
+            <a:fillRect/>
+          </a:stretch>
+        </p:blipFill>
+        <p:spPr>
+          <a:xfrm>
+            <a:off x="7946136" y="2103120"/>
+            <a:ext cx="548640" cy="548640"/>
+          </a:xfrm>
+          <a:prstGeom prst="rect">
+            <a:avLst/>
+          </a:prstGeom>
+        </p:spPr>
+      </p:pic>
+      <p:sp>
+        <p:nvSpPr>
+          <p:cNvPr id="18" name="Solution step 3 title"/>
+          <p:cNvSpPr txBox="1"/>
+          <p:nvPr/>
+        </p:nvSpPr>
+        <p:spPr>
+          <a:xfrm>
+            <a:off x="6437376" y="2834640"/>
+            <a:ext cx="2103120" cy="731520"/>
+          </a:xfrm>
+          <a:prstGeom prst="rect">
+            <a:avLst/>
+          </a:prstGeom>
+          <a:noFill/>
+          <a:ln/>
+        </p:spPr>
+        <p:txBody>
+          <a:bodyPr wrap="square" lIns="0" tIns="0" rIns="0" bIns="0" rtlCol="0" anchor="t"/>
+          <a:lstStyle/>
+          <a:p>
+            <a:pPr indent="0" marL="0">
+              <a:buNone/>
+            </a:pPr>
+            <a:r>
+              <a:rPr lang="en-US" sz="2000" b="1" dirty="0">
+                <a:solidFill>
+                  <a:srgbClr val="141B34"/>
+                </a:solidFill>
+              </a:rPr>
+              <a:t>Entrega y defiende</a:t>
+            </a:r>
+            <a:endParaRPr lang="en-US" sz="2000" dirty="0"/>
+          </a:p>
+        </p:txBody>
+      </p:sp>
+      <p:sp>
+        <p:nvSpPr>
+          <p:cNvPr id="19" name="Solution step 3 detail"/>
+          <p:cNvSpPr txBox="1"/>
+          <p:nvPr/>
+        </p:nvSpPr>
+        <p:spPr>
+          <a:xfrm>
+            <a:off x="6437376" y="3566160"/>
+            <a:ext cx="2103120" cy="1371600"/>
+          </a:xfrm>
+          <a:prstGeom prst="rect">
+            <a:avLst/>
+          </a:prstGeom>
+          <a:noFill/>
+          <a:ln/>
+        </p:spPr>
+        <p:txBody>
+          <a:bodyPr wrap="square" lIns="0" tIns="0" rIns="0" bIns="0" rtlCol="0" anchor="t"/>
+          <a:lstStyle/>
+          <a:p>
+            <a:pPr indent="0" marL="0">
+              <a:buNone/>
+            </a:pPr>
+            <a:r>
+              <a:rPr lang="en-US" sz="1400" dirty="0">
+                <a:solidFill>
+                  <a:srgbClr val="4F5568"/>
+                </a:solidFill>
+              </a:rPr>
+              <a:t>Preguntas sobre su propio trabajo. En el celular, en papel o en voz alta.</a:t>
+            </a:r>
+            <a:endParaRPr lang="en-US" sz="1400" dirty="0"/>
+          </a:p>
+        </p:txBody>
+      </p:sp>
+      <p:sp>
+        <p:nvSpPr>
+          <p:cNvPr id="20" name="Solution step 4 card"/>
+          <p:cNvSpPr/>
+          <p:nvPr/>
+        </p:nvSpPr>
+        <p:spPr>
+          <a:xfrm>
+            <a:off x="8970264" y="1783080"/>
+            <a:ext cx="2606040" cy="3246120"/>
+          </a:xfrm>
+          <a:prstGeom prst="roundRect">
+            <a:avLst>
+              <a:gd name="adj" fmla="val 4211"/>
+            </a:avLst>
+          </a:prstGeom>
+          <a:solidFill>
+            <a:srgbClr val="E7ECFB"/>
+          </a:solidFill>
+          <a:ln w="12700">
+            <a:solidFill>
+              <a:srgbClr val="E7ECFB"/>
+            </a:solidFill>
+            <a:prstDash val="solid"/>
+          </a:ln>
+        </p:spPr>
+      </p:sp>
+      <p:sp>
+        <p:nvSpPr>
+          <p:cNvPr id="21" name="Solution step 4 number"/>
+          <p:cNvSpPr txBox="1"/>
+          <p:nvPr/>
+        </p:nvSpPr>
+        <p:spPr>
+          <a:xfrm>
+            <a:off x="9244584" y="1965960"/>
+            <a:ext cx="731520" cy="731520"/>
+          </a:xfrm>
+          <a:prstGeom prst="rect">
+            <a:avLst/>
+          </a:prstGeom>
+          <a:noFill/>
+          <a:ln/>
+        </p:spPr>
+        <p:txBody>
+          <a:bodyPr wrap="square" lIns="0" tIns="0" rIns="0" bIns="0" rtlCol="0" anchor="ctr"/>
+          <a:lstStyle/>
+          <a:p>
+            <a:pPr indent="0" marL="0">
+              <a:buNone/>
+            </a:pPr>
+            <a:r>
+              <a:rPr lang="en-US" sz="4000" b="1" dirty="0">
+                <a:solidFill>
+                  <a:srgbClr val="2340B8"/>
+                </a:solidFill>
+              </a:rPr>
+              <a:t>4</a:t>
+            </a:r>
+            <a:endParaRPr lang="en-US" sz="4000" dirty="0"/>
+          </a:p>
+        </p:txBody>
+      </p:sp>
+      <p:pic>
+        <p:nvPicPr>
+          <p:cNvPr id="22" name="Image 3" descr="El docente decide">    </p:cNvPr>
+          <p:cNvPicPr>
+            <a:picLocks noChangeAspect="1"/>
+          </p:cNvPicPr>
+          <p:nvPr/>
+        </p:nvPicPr>
+        <p:blipFill>
+          <a:blip r:embed="rId4"/>
+          <a:stretch>
+            <a:fillRect/>
+          </a:stretch>
+        </p:blipFill>
+        <p:spPr>
+          <a:xfrm>
+            <a:off x="10753344" y="2103120"/>
+            <a:ext cx="548640" cy="548640"/>
+          </a:xfrm>
+          <a:prstGeom prst="rect">
+            <a:avLst/>
+          </a:prstGeom>
+        </p:spPr>
+      </p:pic>
+      <p:sp>
+        <p:nvSpPr>
+          <p:cNvPr id="23" name="Solution step 4 title"/>
+          <p:cNvSpPr txBox="1"/>
+          <p:nvPr/>
+        </p:nvSpPr>
+        <p:spPr>
+          <a:xfrm>
+            <a:off x="9244584" y="2834640"/>
+            <a:ext cx="2103120" cy="731520"/>
+          </a:xfrm>
+          <a:prstGeom prst="rect">
+            <a:avLst/>
+          </a:prstGeom>
+          <a:noFill/>
+          <a:ln/>
+        </p:spPr>
+        <p:txBody>
+          <a:bodyPr wrap="square" lIns="0" tIns="0" rIns="0" bIns="0" rtlCol="0" anchor="t"/>
+          <a:lstStyle/>
+          <a:p>
+            <a:pPr indent="0" marL="0">
+              <a:buNone/>
+            </a:pPr>
+            <a:r>
+              <a:rPr lang="en-US" sz="2000" b="1" dirty="0">
+                <a:solidFill>
+                  <a:srgbClr val="141B34"/>
+                </a:solidFill>
+              </a:rPr>
+              <a:t>El docente decide</a:t>
+            </a:r>
+            <a:endParaRPr lang="en-US" sz="2000" dirty="0"/>
+          </a:p>
+        </p:txBody>
+      </p:sp>
+      <p:sp>
+        <p:nvSpPr>
+          <p:cNvPr id="24" name="Solution step 4 detail"/>
+          <p:cNvSpPr txBox="1"/>
+          <p:nvPr/>
+        </p:nvSpPr>
+        <p:spPr>
+          <a:xfrm>
+            <a:off x="9244584" y="3566160"/>
+            <a:ext cx="2103120" cy="1371600"/>
+          </a:xfrm>
+          <a:prstGeom prst="rect">
+            <a:avLst/>
+          </a:prstGeom>
+          <a:noFill/>
+          <a:ln/>
+        </p:spPr>
+        <p:txBody>
+          <a:bodyPr wrap="square" lIns="0" tIns="0" rIns="0" bIns="0" rtlCol="0" anchor="t"/>
+          <a:lstStyle/>
+          <a:p>
+            <a:pPr indent="0" marL="0">
+              <a:buNone/>
+            </a:pPr>
+            <a:r>
+              <a:rPr lang="en-US" sz="1400" dirty="0">
+                <a:solidFill>
+                  <a:srgbClr val="4F5568"/>
+                </a:solidFill>
+              </a:rPr>
+              <a:t>Nivel sugerido con evidencia por criterio, a quién atender primero y qué volver a enseñar.</a:t>
+            </a:r>
+            <a:endParaRPr lang="en-US" sz="1400" dirty="0"/>
+          </a:p>
+        </p:txBody>
+      </p:sp>
+      <p:sp>
+        <p:nvSpPr>
+          <p:cNvPr id="25" name="Privacy line"/>
+          <p:cNvSpPr txBox="1"/>
+          <p:nvPr/>
+        </p:nvSpPr>
+        <p:spPr>
+          <a:xfrm>
+            <a:off x="548640" y="5349240"/>
+            <a:ext cx="11094415" cy="457200"/>
+          </a:xfrm>
+          <a:prstGeom prst="rect">
+            <a:avLst/>
+          </a:prstGeom>
+          <a:noFill/>
+          <a:ln/>
+        </p:spPr>
+        <p:txBody>
+          <a:bodyPr wrap="square" lIns="0" tIns="0" rIns="0" bIns="0" rtlCol="0" anchor="ctr"/>
+          <a:lstStyle/>
+          <a:p>
+            <a:pPr indent="0" marL="0">
+              <a:buNone/>
+            </a:pPr>
+            <a:r>
+              <a:rPr lang="en-US" sz="1700" dirty="0">
+                <a:solidFill>
+                  <a:srgbClr val="141B34"/>
+                </a:solidFill>
+              </a:rPr>
+              <a:t>Sin datos personales: alias y código, sin audio ni video.</a:t>
+            </a:r>
+            <a:endParaRPr lang="en-US" sz="1700" dirty="0"/>
+          </a:p>
+        </p:txBody>
+      </p:sp>
+      <p:sp>
+        <p:nvSpPr>
+          <p:cNvPr id="25" name="Slide Number Placeholder 0"/>
+          <p:cNvSpPr>
+            <a:spLocks noGrp="1"/>
+          </p:cNvSpPr>
+          <p:nvPr>
+            <p:ph type="sldNum" sz="quarter" idx="4294967295"/>
+          </p:nvPr>
+        </p:nvSpPr>
+        <p:spPr>
+          <a:xfrm>
+            <a:off x="11277295" y="6355080"/>
+            <a:ext cx="411480" cy="320040"/>
+          </a:xfrm>
+          <a:prstGeom prst="rect">
+            <a:avLst/>
+          </a:prstGeom>
+          <a:extLst>
+            <a:ext uri="{C572A759-6A51-4108-AA02-DFA0A04FC94B}">
+              <ma14:wrappingTextBoxFlag xmlns:ma14="http://schemas.microsoft.com/office/mac/drawingml/2011/main" val="0"/>
+            </a:ext>
+          </a:extLst>
+        </p:spPr>
+        <p:txBody>
+          <a:bodyPr/>
+          <a:lstStyle>
+            <a:lvl1pPr>
+              <a:defRPr sz="1000">
+                <a:solidFill>
+                  <a:srgbClr val="4F5568"/>
+                </a:solidFill>
+              </a:defRPr>
+            </a:lvl1pPr>
+          </a:lstStyle>
+          <a:p>
+            <a:pPr algn="r"/>
+            <a:fld id="{F7021451-1387-4CA6-816F-3879F97B5CBC}" type="slidenum">
+              <a:rPr b="0" lang="en-US"/>
+              <a:t>7</a:t>
+            </a:fld>
+            <a:endParaRPr lang="en-US"/>
+          </a:p>
+        </p:txBody>
+      </p:sp>
+    </p:spTree>
+  </p:cSld>
+  <p:clrMapOvr>
+    <a:masterClrMapping/>
+  </p:clrMapOvr>
+</p:sld>
+</file>
+
+<file path=ppt/slides/slide8.xml><?xml version="1.0" encoding="utf-8"?>
+<p:sld xmlns:a="http://schemas.openxmlformats.org/drawingml/2006/main" xmlns:r="http://schemas.openxmlformats.org/officeDocument/2006/relationships" xmlns:p="http://schemas.openxmlformats.org/presentationml/2006/main">
+  <p:cSld name="Slide 8">
+    <p:spTree>
+      <p:nvGrpSpPr>
+        <p:cNvPr id="1" name=""/>
+        <p:cNvGrpSpPr/>
+        <p:nvPr/>
+      </p:nvGrpSpPr>
+      <p:grpSpPr>
+        <a:xfrm>
+          <a:off x="0" y="0"/>
+          <a:ext cx="0" cy="0"/>
+          <a:chOff x="0" y="0"/>
+          <a:chExt cx="0" cy="0"/>
+        </a:xfrm>
+      </p:grpSpPr>
+      <p:sp>
+        <p:nvSpPr>
+          <p:cNvPr id="2" name="Text 0"/>
+          <p:cNvSpPr/>
+          <p:nvPr>
+            <p:ph idx="100" type="body" hasCustomPrompt="1"/>
+          </p:nvPr>
+        </p:nvSpPr>
+        <p:spPr>
+          <a:xfrm>
+            <a:off x="548640" y="365760"/>
+            <a:ext cx="8229600" cy="320040"/>
+          </a:xfrm>
+          <a:prstGeom prst="rect">
+            <a:avLst/>
+          </a:prstGeom>
+          <a:noFill/>
+          <a:ln/>
+        </p:spPr>
+        <p:txBody>
+          <a:bodyPr wrap="square" lIns="0" tIns="0" rIns="0" bIns="0" rtlCol="0"/>
+          <a:lstStyle/>
+          <a:p>
+            <a:pPr indent="0" marL="0">
+              <a:buNone/>
+            </a:pPr>
+            <a:r>
+              <a:rPr lang="en-US" sz="1300" b="1" spc="200" kern="0" dirty="0">
+                <a:solidFill>
+                  <a:schemeClr val="accent1"/>
+                </a:solidFill>
+              </a:rPr>
+              <a:t>QUÉ · POR QUÉ ES DIFERENTE</a:t>
+            </a:r>
+            <a:endParaRPr lang="en-US" sz="1300" dirty="0"/>
+          </a:p>
+        </p:txBody>
+      </p:sp>
+      <p:sp>
+        <p:nvSpPr>
+          <p:cNvPr id="3" name="Text 0"/>
+          <p:cNvSpPr/>
+          <p:nvPr>
+            <p:ph idx="101" type="title" hasCustomPrompt="1"/>
+          </p:nvPr>
+        </p:nvSpPr>
+        <p:spPr>
+          <a:xfrm>
+            <a:off x="548640" y="685800"/>
+            <a:ext cx="11094415" cy="777240"/>
+          </a:xfrm>
+          <a:prstGeom prst="rect">
+            <a:avLst/>
+          </a:prstGeom>
+          <a:noFill/>
+          <a:ln/>
+        </p:spPr>
+        <p:txBody>
+          <a:bodyPr wrap="square" lIns="0" tIns="0" rIns="0" bIns="0" rtlCol="0" anchor="t"/>
+          <a:lstStyle/>
+          <a:p>
+            <a:pPr algn="l" indent="0" marL="0">
+              <a:buNone/>
+            </a:pPr>
+            <a:r>
+              <a:rPr lang="en-US" sz="3400" b="1" dirty="0">
+                <a:solidFill>
+                  <a:schemeClr val="tx1"/>
+                </a:solidFill>
+              </a:rPr>
+              <a:t>Nadie más combina rediseño, prueba y defensa</a:t>
+            </a:r>
+            <a:endParaRPr lang="en-US" sz="3400" dirty="0"/>
+          </a:p>
+        </p:txBody>
+      </p:sp>
+      <p:sp>
+        <p:nvSpPr>
+          <p:cNvPr id="4" name="Text 0"/>
+          <p:cNvSpPr/>
+          <p:nvPr>
+            <p:ph idx="102" type="body" hasCustomPrompt="1"/>
+          </p:nvPr>
+        </p:nvSpPr>
+        <p:spPr>
+          <a:xfrm>
+            <a:off x="548640" y="6355080"/>
+            <a:ext cx="10180015" cy="320040"/>
+          </a:xfrm>
+          <a:prstGeom prst="rect">
+            <a:avLst/>
+          </a:prstGeom>
+          <a:noFill/>
+          <a:ln/>
+        </p:spPr>
+        <p:txBody>
+          <a:bodyPr wrap="square" lIns="0" tIns="0" rIns="0" bIns="0" rtlCol="0"/>
+          <a:lstStyle/>
+          <a:p>
+            <a:pPr indent="0" marL="0">
+              <a:buNone/>
+            </a:pPr>
+            <a:r>
+              <a:rPr lang="en-US" sz="1000" dirty="0">
+                <a:solidFill>
+                  <a:schemeClr val="accent4"/>
+                </a:solidFill>
+              </a:rPr>
               <a:t>Fuentes: revisión de alternativas en docs/investigacion/mas-valor-para-defiendelo.md</a:t>
             </a:r>
             <a:endParaRPr lang="en-US" sz="1000" dirty="0"/>
@@ -6885,7 +8077,7 @@
       </p:sp>
       <p:graphicFrame>
         <p:nvGraphicFramePr>
-          <p:cNvPr id="8" name="Comparison table"/>
+          <p:cNvPr id="9" name="Comparison table"/>
           <p:cNvGraphicFramePr>
             <a:graphicFrameLocks noGrp="1"/>
           </p:cNvGraphicFramePr>
@@ -8984,724 +10176,6 @@
             <a:pPr algn="r"/>
             <a:fld id="{F7021451-1387-4CA6-816F-3879F97B5CBC}" type="slidenum">
               <a:rPr b="0" lang="en-US"/>
-              <a:t>7</a:t>
-            </a:fld>
-            <a:endParaRPr lang="en-US"/>
-          </a:p>
-        </p:txBody>
-      </p:sp>
-    </p:spTree>
-  </p:cSld>
-  <p:clrMapOvr>
-    <a:masterClrMapping/>
-  </p:clrMapOvr>
-</p:sld>
-</file>
-
-<file path=ppt/slides/slide8.xml><?xml version="1.0" encoding="utf-8"?>
-<p:sld xmlns:a="http://schemas.openxmlformats.org/drawingml/2006/main" xmlns:r="http://schemas.openxmlformats.org/officeDocument/2006/relationships" xmlns:p="http://schemas.openxmlformats.org/presentationml/2006/main">
-  <p:cSld name="Slide 8">
-    <p:spTree>
-      <p:nvGrpSpPr>
-        <p:cNvPr id="1" name=""/>
-        <p:cNvGrpSpPr/>
-        <p:nvPr/>
-      </p:nvGrpSpPr>
-      <p:grpSpPr>
-        <a:xfrm>
-          <a:off x="0" y="0"/>
-          <a:ext cx="0" cy="0"/>
-          <a:chOff x="0" y="0"/>
-          <a:chExt cx="0" cy="0"/>
-        </a:xfrm>
-      </p:grpSpPr>
-      <p:sp>
-        <p:nvSpPr>
-          <p:cNvPr id="2" name="Text 0"/>
-          <p:cNvSpPr/>
-          <p:nvPr>
-            <p:ph idx="100" type="body" hasCustomPrompt="1"/>
-          </p:nvPr>
-        </p:nvSpPr>
-        <p:spPr>
-          <a:xfrm>
-            <a:off x="548640" y="365760"/>
-            <a:ext cx="8229600" cy="320040"/>
-          </a:xfrm>
-          <a:prstGeom prst="rect">
-            <a:avLst/>
-          </a:prstGeom>
-          <a:noFill/>
-          <a:ln/>
-        </p:spPr>
-        <p:txBody>
-          <a:bodyPr wrap="square" lIns="0" tIns="0" rIns="0" bIns="0" rtlCol="0"/>
-          <a:lstStyle/>
-          <a:p>
-            <a:pPr indent="0" marL="0">
-              <a:buNone/>
-            </a:pPr>
-            <a:r>
-              <a:rPr lang="en-US" sz="1300" b="1" spc="200" kern="0" dirty="0">
-                <a:solidFill>
-                  <a:schemeClr val="accent1"/>
-                </a:solidFill>
-              </a:rPr>
-              <a:t>QUÉ · CASO DE NEGOCIO</a:t>
-            </a:r>
-            <a:endParaRPr lang="en-US" sz="1300" dirty="0"/>
-          </a:p>
-        </p:txBody>
-      </p:sp>
-      <p:sp>
-        <p:nvSpPr>
-          <p:cNvPr id="3" name="Text 0"/>
-          <p:cNvSpPr/>
-          <p:nvPr>
-            <p:ph idx="101" type="title" hasCustomPrompt="1"/>
-          </p:nvPr>
-        </p:nvSpPr>
-        <p:spPr>
-          <a:xfrm>
-            <a:off x="548640" y="685800"/>
-            <a:ext cx="11094415" cy="777240"/>
-          </a:xfrm>
-          <a:prstGeom prst="rect">
-            <a:avLst/>
-          </a:prstGeom>
-          <a:noFill/>
-          <a:ln/>
-        </p:spPr>
-        <p:txBody>
-          <a:bodyPr wrap="square" lIns="0" tIns="0" rIns="0" bIns="0" rtlCol="0" anchor="t"/>
-          <a:lstStyle/>
-          <a:p>
-            <a:pPr algn="l" indent="0" marL="0">
-              <a:buNone/>
-            </a:pPr>
-            <a:r>
-              <a:rPr lang="en-US" sz="3400" b="1" dirty="0">
-                <a:solidFill>
-                  <a:schemeClr val="tx1"/>
-                </a:solidFill>
-              </a:rPr>
-              <a:t>Gratis para el docente; la institución paga por evidencia</a:t>
-            </a:r>
-            <a:endParaRPr lang="en-US" sz="3400" dirty="0"/>
-          </a:p>
-        </p:txBody>
-      </p:sp>
-      <p:sp>
-        <p:nvSpPr>
-          <p:cNvPr id="4" name="Text 0"/>
-          <p:cNvSpPr/>
-          <p:nvPr>
-            <p:ph idx="102" type="body" hasCustomPrompt="1"/>
-          </p:nvPr>
-        </p:nvSpPr>
-        <p:spPr>
-          <a:xfrm>
-            <a:off x="548640" y="6355080"/>
-            <a:ext cx="10180015" cy="320040"/>
-          </a:xfrm>
-          <a:prstGeom prst="rect">
-            <a:avLst/>
-          </a:prstGeom>
-          <a:noFill/>
-          <a:ln/>
-        </p:spPr>
-        <p:txBody>
-          <a:bodyPr wrap="square" lIns="0" tIns="0" rIns="0" bIns="0" rtlCol="0"/>
-          <a:lstStyle/>
-          <a:p>
-            <a:pPr indent="0" marL="0">
-              <a:buNone/>
-            </a:pPr>
-            <a:r>
-              <a:rPr lang="en-US" sz="1000" dirty="0">
-                <a:solidFill>
-                  <a:schemeClr val="accent4"/>
-                </a:solidFill>
-              </a:rPr>
-              <a:t>Precio del modelo verificado; tokens por defensa = estimación propia. Turnitin: contratos de California (Sacra). Detalle en docs/investigacion/</a:t>
-            </a:r>
-            <a:endParaRPr lang="en-US" sz="1000" dirty="0"/>
-          </a:p>
-        </p:txBody>
-      </p:sp>
-      <p:sp>
-        <p:nvSpPr>
-          <p:cNvPr id="5" name="Cost card"/>
-          <p:cNvSpPr/>
-          <p:nvPr/>
-        </p:nvSpPr>
-        <p:spPr>
-          <a:xfrm>
-            <a:off x="548640" y="1783080"/>
-            <a:ext cx="3840480" cy="3931920"/>
-          </a:xfrm>
-          <a:prstGeom prst="roundRect">
-            <a:avLst>
-              <a:gd name="adj" fmla="val 2857"/>
-            </a:avLst>
-          </a:prstGeom>
-          <a:solidFill>
-            <a:srgbClr val="141B34"/>
-          </a:solidFill>
-          <a:ln w="12700">
-            <a:solidFill>
-              <a:srgbClr val="141B34"/>
-            </a:solidFill>
-            <a:prstDash val="solid"/>
-          </a:ln>
-        </p:spPr>
-      </p:sp>
-      <p:sp>
-        <p:nvSpPr>
-          <p:cNvPr id="6" name="Cost stat"/>
-          <p:cNvSpPr txBox="1"/>
-          <p:nvPr/>
-        </p:nvSpPr>
-        <p:spPr>
-          <a:xfrm>
-            <a:off x="868680" y="2011680"/>
-            <a:ext cx="3291840" cy="1188720"/>
-          </a:xfrm>
-          <a:prstGeom prst="rect">
-            <a:avLst/>
-          </a:prstGeom>
-          <a:noFill/>
-          <a:ln/>
-        </p:spPr>
-        <p:txBody>
-          <a:bodyPr wrap="square" lIns="0" tIns="0" rIns="0" bIns="0" rtlCol="0" anchor="ctr"/>
-          <a:lstStyle/>
-          <a:p>
-            <a:pPr indent="0" marL="0">
-              <a:buNone/>
-            </a:pPr>
-            <a:r>
-              <a:rPr lang="en-US" sz="6400" b="1" dirty="0">
-                <a:solidFill>
-                  <a:srgbClr val="E9B949"/>
-                </a:solidFill>
-              </a:rPr>
-              <a:t>&lt; ½ ¢</a:t>
-            </a:r>
-            <a:endParaRPr lang="en-US" sz="6400" dirty="0"/>
-          </a:p>
-        </p:txBody>
-      </p:sp>
-      <p:sp>
-        <p:nvSpPr>
-          <p:cNvPr id="7" name="Cost label"/>
-          <p:cNvSpPr txBox="1"/>
-          <p:nvPr/>
-        </p:nvSpPr>
-        <p:spPr>
-          <a:xfrm>
-            <a:off x="868680" y="3200400"/>
-            <a:ext cx="3200400" cy="914400"/>
-          </a:xfrm>
-          <a:prstGeom prst="rect">
-            <a:avLst/>
-          </a:prstGeom>
-          <a:noFill/>
-          <a:ln/>
-        </p:spPr>
-        <p:txBody>
-          <a:bodyPr wrap="square" lIns="0" tIns="0" rIns="0" bIns="0" rtlCol="0" anchor="t"/>
-          <a:lstStyle/>
-          <a:p>
-            <a:pPr indent="0" marL="0">
-              <a:buNone/>
-            </a:pPr>
-            <a:r>
-              <a:rPr lang="en-US" sz="1600" dirty="0">
-                <a:solidFill>
-                  <a:srgbClr val="FFFFFF"/>
-                </a:solidFill>
-              </a:rPr>
-              <a:t>de dólar cuesta una defensa en IA (estimación propia)</a:t>
-            </a:r>
-            <a:endParaRPr lang="en-US" sz="1600" dirty="0"/>
-          </a:p>
-        </p:txBody>
-      </p:sp>
-      <p:sp>
-        <p:nvSpPr>
-          <p:cNvPr id="8" name="Price anchor"/>
-          <p:cNvSpPr txBox="1"/>
-          <p:nvPr/>
-        </p:nvSpPr>
-        <p:spPr>
-          <a:xfrm>
-            <a:off x="868680" y="4297680"/>
-            <a:ext cx="3200400" cy="1188720"/>
-          </a:xfrm>
-          <a:prstGeom prst="rect">
-            <a:avLst/>
-          </a:prstGeom>
-          <a:noFill/>
-          <a:ln/>
-        </p:spPr>
-        <p:txBody>
-          <a:bodyPr wrap="square" lIns="0" tIns="0" rIns="0" bIns="0" rtlCol="0" anchor="t"/>
-          <a:lstStyle/>
-          <a:p>
-            <a:pPr indent="0" marL="0">
-              <a:buNone/>
-            </a:pPr>
-            <a:r>
-              <a:rPr lang="en-US" sz="1500" dirty="0">
-                <a:solidFill>
-                  <a:srgbClr val="E7ECFB"/>
-                </a:solidFill>
-              </a:rPr>
-              <a:t>Turnitin: USD 1,79–6,50 por alumno al año. Cobramos por debajo.</a:t>
-            </a:r>
-            <a:endParaRPr lang="en-US" sz="1500" dirty="0"/>
-          </a:p>
-        </p:txBody>
-      </p:sp>
-      <p:sp>
-        <p:nvSpPr>
-          <p:cNvPr id="9" name="Route 1 dot"/>
-          <p:cNvSpPr/>
-          <p:nvPr/>
-        </p:nvSpPr>
-        <p:spPr>
-          <a:xfrm>
-            <a:off x="4800600" y="1920240"/>
-            <a:ext cx="457200" cy="457200"/>
-          </a:xfrm>
-          <a:prstGeom prst="ellipse">
-            <a:avLst/>
-          </a:prstGeom>
-          <a:solidFill>
-            <a:srgbClr val="2340B8"/>
-          </a:solidFill>
-          <a:ln w="12700">
-            <a:solidFill>
-              <a:srgbClr val="2340B8"/>
-            </a:solidFill>
-            <a:prstDash val="solid"/>
-          </a:ln>
-        </p:spPr>
-      </p:sp>
-      <p:sp>
-        <p:nvSpPr>
-          <p:cNvPr id="10" name="Route 1 number"/>
-          <p:cNvSpPr txBox="1"/>
-          <p:nvPr/>
-        </p:nvSpPr>
-        <p:spPr>
-          <a:xfrm>
-            <a:off x="4800600" y="1920240"/>
-            <a:ext cx="457200" cy="457200"/>
-          </a:xfrm>
-          <a:prstGeom prst="rect">
-            <a:avLst/>
-          </a:prstGeom>
-          <a:noFill/>
-          <a:ln/>
-        </p:spPr>
-        <p:txBody>
-          <a:bodyPr wrap="square" lIns="0" tIns="0" rIns="0" bIns="0" rtlCol="0" anchor="ctr"/>
-          <a:lstStyle/>
-          <a:p>
-            <a:pPr algn="ctr" indent="0" marL="0">
-              <a:buNone/>
-            </a:pPr>
-            <a:r>
-              <a:rPr lang="en-US" sz="1600" b="1" dirty="0">
-                <a:solidFill>
-                  <a:srgbClr val="FFFFFF"/>
-                </a:solidFill>
-              </a:rPr>
-              <a:t>1</a:t>
-            </a:r>
-            <a:endParaRPr lang="en-US" sz="1600" dirty="0"/>
-          </a:p>
-        </p:txBody>
-      </p:sp>
-      <p:sp>
-        <p:nvSpPr>
-          <p:cNvPr id="11" name="Route 1 title"/>
-          <p:cNvSpPr txBox="1"/>
-          <p:nvPr/>
-        </p:nvSpPr>
-        <p:spPr>
-          <a:xfrm>
-            <a:off x="5486400" y="1828800"/>
-            <a:ext cx="6126480" cy="457200"/>
-          </a:xfrm>
-          <a:prstGeom prst="rect">
-            <a:avLst/>
-          </a:prstGeom>
-          <a:noFill/>
-          <a:ln/>
-        </p:spPr>
-        <p:txBody>
-          <a:bodyPr wrap="square" lIns="0" tIns="0" rIns="0" bIns="0" rtlCol="0" anchor="ctr"/>
-          <a:lstStyle/>
-          <a:p>
-            <a:pPr indent="0" marL="0">
-              <a:buNone/>
-            </a:pPr>
-            <a:r>
-              <a:rPr lang="en-US" sz="2000" b="1" dirty="0">
-                <a:solidFill>
-                  <a:srgbClr val="141B34"/>
-                </a:solidFill>
-              </a:rPr>
-              <a:t>0–6 meses</a:t>
-            </a:r>
-            <a:endParaRPr lang="en-US" sz="2000" dirty="0"/>
-          </a:p>
-        </p:txBody>
-      </p:sp>
-      <p:sp>
-        <p:nvSpPr>
-          <p:cNvPr id="12" name="Route 1 detail"/>
-          <p:cNvSpPr txBox="1"/>
-          <p:nvPr/>
-        </p:nvSpPr>
-        <p:spPr>
-          <a:xfrm>
-            <a:off x="5486400" y="2286000"/>
-            <a:ext cx="6126480" cy="685800"/>
-          </a:xfrm>
-          <a:prstGeom prst="rect">
-            <a:avLst/>
-          </a:prstGeom>
-          <a:noFill/>
-          <a:ln/>
-        </p:spPr>
-        <p:txBody>
-          <a:bodyPr wrap="square" lIns="0" tIns="0" rIns="0" bIns="0" rtlCol="0" anchor="t"/>
-          <a:lstStyle/>
-          <a:p>
-            <a:pPr indent="0" marL="0">
-              <a:buNone/>
-            </a:pPr>
-            <a:r>
-              <a:rPr lang="en-US" sz="1500" dirty="0">
-                <a:solidFill>
-                  <a:srgbClr val="4F5568"/>
-                </a:solidFill>
-              </a:rPr>
-              <a:t>Docentes individuales, gratis con un límite mensual.</a:t>
-            </a:r>
-            <a:endParaRPr lang="en-US" sz="1500" dirty="0"/>
-          </a:p>
-        </p:txBody>
-      </p:sp>
-      <p:sp>
-        <p:nvSpPr>
-          <p:cNvPr id="13" name="Route 2 dot"/>
-          <p:cNvSpPr/>
-          <p:nvPr/>
-        </p:nvSpPr>
-        <p:spPr>
-          <a:xfrm>
-            <a:off x="4800600" y="3246120"/>
-            <a:ext cx="457200" cy="457200"/>
-          </a:xfrm>
-          <a:prstGeom prst="ellipse">
-            <a:avLst/>
-          </a:prstGeom>
-          <a:solidFill>
-            <a:srgbClr val="2340B8"/>
-          </a:solidFill>
-          <a:ln w="12700">
-            <a:solidFill>
-              <a:srgbClr val="2340B8"/>
-            </a:solidFill>
-            <a:prstDash val="solid"/>
-          </a:ln>
-        </p:spPr>
-      </p:sp>
-      <p:sp>
-        <p:nvSpPr>
-          <p:cNvPr id="14" name="Route 2 number"/>
-          <p:cNvSpPr txBox="1"/>
-          <p:nvPr/>
-        </p:nvSpPr>
-        <p:spPr>
-          <a:xfrm>
-            <a:off x="4800600" y="3246120"/>
-            <a:ext cx="457200" cy="457200"/>
-          </a:xfrm>
-          <a:prstGeom prst="rect">
-            <a:avLst/>
-          </a:prstGeom>
-          <a:noFill/>
-          <a:ln/>
-        </p:spPr>
-        <p:txBody>
-          <a:bodyPr wrap="square" lIns="0" tIns="0" rIns="0" bIns="0" rtlCol="0" anchor="ctr"/>
-          <a:lstStyle/>
-          <a:p>
-            <a:pPr algn="ctr" indent="0" marL="0">
-              <a:buNone/>
-            </a:pPr>
-            <a:r>
-              <a:rPr lang="en-US" sz="1600" b="1" dirty="0">
-                <a:solidFill>
-                  <a:srgbClr val="FFFFFF"/>
-                </a:solidFill>
-              </a:rPr>
-              <a:t>2</a:t>
-            </a:r>
-            <a:endParaRPr lang="en-US" sz="1600" dirty="0"/>
-          </a:p>
-        </p:txBody>
-      </p:sp>
-      <p:sp>
-        <p:nvSpPr>
-          <p:cNvPr id="15" name="Route 2 title"/>
-          <p:cNvSpPr txBox="1"/>
-          <p:nvPr/>
-        </p:nvSpPr>
-        <p:spPr>
-          <a:xfrm>
-            <a:off x="5486400" y="3154680"/>
-            <a:ext cx="6126480" cy="457200"/>
-          </a:xfrm>
-          <a:prstGeom prst="rect">
-            <a:avLst/>
-          </a:prstGeom>
-          <a:noFill/>
-          <a:ln/>
-        </p:spPr>
-        <p:txBody>
-          <a:bodyPr wrap="square" lIns="0" tIns="0" rIns="0" bIns="0" rtlCol="0" anchor="ctr"/>
-          <a:lstStyle/>
-          <a:p>
-            <a:pPr indent="0" marL="0">
-              <a:buNone/>
-            </a:pPr>
-            <a:r>
-              <a:rPr lang="en-US" sz="2000" b="1" dirty="0">
-                <a:solidFill>
-                  <a:srgbClr val="141B34"/>
-                </a:solidFill>
-              </a:rPr>
-              <a:t>6–18 meses</a:t>
-            </a:r>
-            <a:endParaRPr lang="en-US" sz="2000" dirty="0"/>
-          </a:p>
-        </p:txBody>
-      </p:sp>
-      <p:sp>
-        <p:nvSpPr>
-          <p:cNvPr id="16" name="Route 2 detail"/>
-          <p:cNvSpPr txBox="1"/>
-          <p:nvPr/>
-        </p:nvSpPr>
-        <p:spPr>
-          <a:xfrm>
-            <a:off x="5486400" y="3611880"/>
-            <a:ext cx="6126480" cy="685800"/>
-          </a:xfrm>
-          <a:prstGeom prst="rect">
-            <a:avLst/>
-          </a:prstGeom>
-          <a:noFill/>
-          <a:ln/>
-        </p:spPr>
-        <p:txBody>
-          <a:bodyPr wrap="square" lIns="0" tIns="0" rIns="0" bIns="0" rtlCol="0" anchor="t"/>
-          <a:lstStyle/>
-          <a:p>
-            <a:pPr indent="0" marL="0">
-              <a:buNone/>
-            </a:pPr>
-            <a:r>
-              <a:rPr lang="en-US" sz="1500" dirty="0">
-                <a:solidFill>
-                  <a:srgbClr val="4F5568"/>
-                </a:solidFill>
-              </a:rPr>
-              <a:t>Colegios privados y facultades: licencia por alumno al año cuando 3+ docentes lo usan.</a:t>
-            </a:r>
-            <a:endParaRPr lang="en-US" sz="1500" dirty="0"/>
-          </a:p>
-        </p:txBody>
-      </p:sp>
-      <p:sp>
-        <p:nvSpPr>
-          <p:cNvPr id="17" name="Route 3 dot"/>
-          <p:cNvSpPr/>
-          <p:nvPr/>
-        </p:nvSpPr>
-        <p:spPr>
-          <a:xfrm>
-            <a:off x="4800600" y="4572000"/>
-            <a:ext cx="457200" cy="457200"/>
-          </a:xfrm>
-          <a:prstGeom prst="ellipse">
-            <a:avLst/>
-          </a:prstGeom>
-          <a:solidFill>
-            <a:srgbClr val="2340B8"/>
-          </a:solidFill>
-          <a:ln w="12700">
-            <a:solidFill>
-              <a:srgbClr val="2340B8"/>
-            </a:solidFill>
-            <a:prstDash val="solid"/>
-          </a:ln>
-        </p:spPr>
-      </p:sp>
-      <p:sp>
-        <p:nvSpPr>
-          <p:cNvPr id="18" name="Route 3 number"/>
-          <p:cNvSpPr txBox="1"/>
-          <p:nvPr/>
-        </p:nvSpPr>
-        <p:spPr>
-          <a:xfrm>
-            <a:off x="4800600" y="4572000"/>
-            <a:ext cx="457200" cy="457200"/>
-          </a:xfrm>
-          <a:prstGeom prst="rect">
-            <a:avLst/>
-          </a:prstGeom>
-          <a:noFill/>
-          <a:ln/>
-        </p:spPr>
-        <p:txBody>
-          <a:bodyPr wrap="square" lIns="0" tIns="0" rIns="0" bIns="0" rtlCol="0" anchor="ctr"/>
-          <a:lstStyle/>
-          <a:p>
-            <a:pPr algn="ctr" indent="0" marL="0">
-              <a:buNone/>
-            </a:pPr>
-            <a:r>
-              <a:rPr lang="en-US" sz="1600" b="1" dirty="0">
-                <a:solidFill>
-                  <a:srgbClr val="FFFFFF"/>
-                </a:solidFill>
-              </a:rPr>
-              <a:t>3</a:t>
-            </a:r>
-            <a:endParaRPr lang="en-US" sz="1600" dirty="0"/>
-          </a:p>
-        </p:txBody>
-      </p:sp>
-      <p:sp>
-        <p:nvSpPr>
-          <p:cNvPr id="19" name="Route 3 title"/>
-          <p:cNvSpPr txBox="1"/>
-          <p:nvPr/>
-        </p:nvSpPr>
-        <p:spPr>
-          <a:xfrm>
-            <a:off x="5486400" y="4480560"/>
-            <a:ext cx="6126480" cy="457200"/>
-          </a:xfrm>
-          <a:prstGeom prst="rect">
-            <a:avLst/>
-          </a:prstGeom>
-          <a:noFill/>
-          <a:ln/>
-        </p:spPr>
-        <p:txBody>
-          <a:bodyPr wrap="square" lIns="0" tIns="0" rIns="0" bIns="0" rtlCol="0" anchor="ctr"/>
-          <a:lstStyle/>
-          <a:p>
-            <a:pPr indent="0" marL="0">
-              <a:buNone/>
-            </a:pPr>
-            <a:r>
-              <a:rPr lang="en-US" sz="2000" b="1" dirty="0">
-                <a:solidFill>
-                  <a:srgbClr val="141B34"/>
-                </a:solidFill>
-              </a:rPr>
-              <a:t>18+ meses</a:t>
-            </a:r>
-            <a:endParaRPr lang="en-US" sz="2000" dirty="0"/>
-          </a:p>
-        </p:txBody>
-      </p:sp>
-      <p:sp>
-        <p:nvSpPr>
-          <p:cNvPr id="20" name="Route 3 detail"/>
-          <p:cNvSpPr txBox="1"/>
-          <p:nvPr/>
-        </p:nvSpPr>
-        <p:spPr>
-          <a:xfrm>
-            <a:off x="5486400" y="4937760"/>
-            <a:ext cx="6126480" cy="685800"/>
-          </a:xfrm>
-          <a:prstGeom prst="rect">
-            <a:avLst/>
-          </a:prstGeom>
-          <a:noFill/>
-          <a:ln/>
-        </p:spPr>
-        <p:txBody>
-          <a:bodyPr wrap="square" lIns="0" tIns="0" rIns="0" bIns="0" rtlCol="0" anchor="t"/>
-          <a:lstStyle/>
-          <a:p>
-            <a:pPr indent="0" marL="0">
-              <a:buNone/>
-            </a:pPr>
-            <a:r>
-              <a:rPr lang="en-US" sz="1500" dirty="0">
-                <a:solidFill>
-                  <a:srgbClr val="4F5568"/>
-                </a:solidFill>
-              </a:rPr>
-              <a:t>Sector público: pilotos con UGEL, con fondos de innovación o cooperación.</a:t>
-            </a:r>
-            <a:endParaRPr lang="en-US" sz="1500" dirty="0"/>
-          </a:p>
-        </p:txBody>
-      </p:sp>
-      <p:sp>
-        <p:nvSpPr>
-          <p:cNvPr id="25" name="Slide Number Placeholder 0"/>
-          <p:cNvSpPr>
-            <a:spLocks noGrp="1"/>
-          </p:cNvSpPr>
-          <p:nvPr>
-            <p:ph type="sldNum" sz="quarter" idx="4294967295"/>
-          </p:nvPr>
-        </p:nvSpPr>
-        <p:spPr>
-          <a:xfrm>
-            <a:off x="11277295" y="6355080"/>
-            <a:ext cx="411480" cy="320040"/>
-          </a:xfrm>
-          <a:prstGeom prst="rect">
-            <a:avLst/>
-          </a:prstGeom>
-          <a:extLst>
-            <a:ext uri="{C572A759-6A51-4108-AA02-DFA0A04FC94B}">
-              <ma14:wrappingTextBoxFlag xmlns:ma14="http://schemas.microsoft.com/office/mac/drawingml/2011/main" val="0"/>
-            </a:ext>
-          </a:extLst>
-        </p:spPr>
-        <p:txBody>
-          <a:bodyPr/>
-          <a:lstStyle>
-            <a:lvl1pPr>
-              <a:defRPr sz="1000">
-                <a:solidFill>
-                  <a:srgbClr val="4F5568"/>
-                </a:solidFill>
-              </a:defRPr>
-            </a:lvl1pPr>
-          </a:lstStyle>
-          <a:p>
-            <a:pPr algn="r"/>
-            <a:fld id="{F7021451-1387-4CA6-816F-3879F97B5CBC}" type="slidenum">
-              <a:rPr b="0" lang="en-US"/>
               <a:t>8</a:t>
             </a:fld>
             <a:endParaRPr lang="en-US"/>
@@ -9765,7 +10239,7 @@
                   <a:schemeClr val="accent1"/>
                 </a:solidFill>
               </a:rPr>
-              <a:t>QUÉ · DÓNDE ESTAMOS</a:t>
+              <a:t>QUÉ · CASO DE NEGOCIO</a:t>
             </a:r>
             <a:endParaRPr lang="en-US" sz="1300" dirty="0"/>
           </a:p>
@@ -9803,7 +10277,7 @@
                   <a:schemeClr val="tx1"/>
                 </a:solidFill>
               </a:rPr>
-              <a:t>Un MVP que funciona hoy, listo para validar</a:t>
+              <a:t>Gratis para el docente; la institución paga por evidencia</a:t>
             </a:r>
             <a:endParaRPr lang="en-US" sz="3400" dirty="0"/>
           </a:p>
@@ -9841,7 +10315,7 @@
                   <a:schemeClr val="accent4"/>
                 </a:solidFill>
               </a:rPr>
-              <a:t>Validación sin menores de edad. Métricas del piloto definidas en el README del repositorio.</a:t>
+              <a:t>Precio del modelo verificado; tokens por defensa = estimación propia. Turnitin: contratos de California (Sacra). Detalle en docs/investigacion/</a:t>
             </a:r>
             <a:endParaRPr lang="en-US" sz="1000" dirty="0"/>
           </a:p>
@@ -9849,250 +10323,26 @@
       </p:sp>
       <p:sp>
         <p:nvSpPr>
-          <p:cNvPr id="5" name="Done title"/>
-          <p:cNvSpPr txBox="1"/>
+          <p:cNvPr id="5" name="Cost card"/>
+          <p:cNvSpPr/>
           <p:nvPr/>
         </p:nvSpPr>
         <p:spPr>
           <a:xfrm>
             <a:off x="548640" y="1783080"/>
-            <a:ext cx="5303520" cy="502920"/>
-          </a:xfrm>
-          <a:prstGeom prst="rect">
-            <a:avLst/>
-          </a:prstGeom>
-          <a:noFill/>
-          <a:ln/>
-        </p:spPr>
-        <p:txBody>
-          <a:bodyPr wrap="square" lIns="0" tIns="0" rIns="0" bIns="0" rtlCol="0" anchor="ctr"/>
-          <a:lstStyle/>
-          <a:p>
-            <a:pPr indent="0" marL="0">
-              <a:buNone/>
-            </a:pPr>
-            <a:r>
-              <a:rPr lang="en-US" sz="2200" b="1" dirty="0">
-                <a:solidFill>
-                  <a:srgbClr val="2340B8"/>
-                </a:solidFill>
-              </a:rPr>
-              <a:t>Ya funciona</a:t>
-            </a:r>
-            <a:endParaRPr lang="en-US" sz="2200" dirty="0"/>
-          </a:p>
-        </p:txBody>
-      </p:sp>
-      <p:sp>
-        <p:nvSpPr>
-          <p:cNvPr id="6" name="Done list"/>
-          <p:cNvSpPr txBox="1"/>
-          <p:nvPr/>
-        </p:nvSpPr>
-        <p:spPr>
-          <a:xfrm>
-            <a:off x="548640" y="2377440"/>
-            <a:ext cx="5303520" cy="2743200"/>
-          </a:xfrm>
-          <a:prstGeom prst="rect">
-            <a:avLst/>
-          </a:prstGeom>
-          <a:noFill/>
-          <a:ln/>
-        </p:spPr>
-        <p:txBody>
-          <a:bodyPr wrap="square" rtlCol="0" anchor="t"/>
-          <a:lstStyle/>
-          <a:p>
-            <a:pPr marL="342900" indent="-342900">
-              <a:spcAft>
-                <a:spcPts val="1200"/>
-              </a:spcAft>
-              <a:buSzPct val="100000"/>
-              <a:buChar char="•"/>
-            </a:pPr>
-            <a:r>
-              <a:rPr lang="en-US" sz="1700" dirty="0">
-                <a:solidFill>
-                  <a:srgbClr val="141B34"/>
-                </a:solidFill>
-              </a:rPr>
-              <a:t>MVP desplegado: rediseño, prueba de estrés, defensa y revisión docente</a:t>
-            </a:r>
-            <a:endParaRPr lang="en-US" sz="1700" dirty="0"/>
-          </a:p>
-          <a:p>
-            <a:pPr marL="342900" indent="-342900">
-              <a:spcAft>
-                <a:spcPts val="1200"/>
-              </a:spcAft>
-              <a:buSzPct val="100000"/>
-              <a:buChar char="•"/>
-            </a:pPr>
-            <a:r>
-              <a:rPr lang="en-US" sz="1700" dirty="0">
-                <a:solidFill>
-                  <a:srgbClr val="141B34"/>
-                </a:solidFill>
-              </a:rPr>
-              <a:t>9 tareas de ejemplo de 8 cursos, con PDF y clases simuladas</a:t>
-            </a:r>
-            <a:endParaRPr lang="en-US" sz="1700" dirty="0"/>
-          </a:p>
-          <a:p>
-            <a:pPr marL="342900" indent="-342900">
-              <a:spcAft>
-                <a:spcPts val="1200"/>
-              </a:spcAft>
-              <a:buSzPct val="100000"/>
-              <a:buChar char="•"/>
-            </a:pPr>
-            <a:r>
-              <a:rPr lang="en-US" sz="1700" dirty="0">
-                <a:solidFill>
-                  <a:srgbClr val="141B34"/>
-                </a:solidFill>
-              </a:rPr>
-              <a:t>154 tests automáticos; funciona sin clave de IA en modo demo</a:t>
-            </a:r>
-            <a:endParaRPr lang="en-US" sz="1700" dirty="0"/>
-          </a:p>
-        </p:txBody>
-      </p:sp>
-      <p:sp>
-        <p:nvSpPr>
-          <p:cNvPr id="7" name="Next title"/>
-          <p:cNvSpPr txBox="1"/>
-          <p:nvPr/>
-        </p:nvSpPr>
-        <p:spPr>
-          <a:xfrm>
-            <a:off x="6309360" y="1783080"/>
-            <a:ext cx="5303520" cy="502920"/>
-          </a:xfrm>
-          <a:prstGeom prst="rect">
-            <a:avLst/>
-          </a:prstGeom>
-          <a:noFill/>
-          <a:ln/>
-        </p:spPr>
-        <p:txBody>
-          <a:bodyPr wrap="square" lIns="0" tIns="0" rIns="0" bIns="0" rtlCol="0" anchor="ctr"/>
-          <a:lstStyle/>
-          <a:p>
-            <a:pPr indent="0" marL="0">
-              <a:buNone/>
-            </a:pPr>
-            <a:r>
-              <a:rPr lang="en-US" sz="2200" b="1" dirty="0">
-                <a:solidFill>
-                  <a:srgbClr val="B8461F"/>
-                </a:solidFill>
-              </a:rPr>
-              <a:t>Siguiente paso: validar</a:t>
-            </a:r>
-            <a:endParaRPr lang="en-US" sz="2200" dirty="0"/>
-          </a:p>
-        </p:txBody>
-      </p:sp>
-      <p:sp>
-        <p:nvSpPr>
-          <p:cNvPr id="8" name="Next list"/>
-          <p:cNvSpPr txBox="1"/>
-          <p:nvPr/>
-        </p:nvSpPr>
-        <p:spPr>
-          <a:xfrm>
-            <a:off x="6309360" y="2377440"/>
-            <a:ext cx="5303520" cy="2743200"/>
-          </a:xfrm>
-          <a:prstGeom prst="rect">
-            <a:avLst/>
-          </a:prstGeom>
-          <a:noFill/>
-          <a:ln/>
-        </p:spPr>
-        <p:txBody>
-          <a:bodyPr wrap="square" rtlCol="0" anchor="t"/>
-          <a:lstStyle/>
-          <a:p>
-            <a:pPr marL="342900" indent="-342900">
-              <a:spcAft>
-                <a:spcPts val="1200"/>
-              </a:spcAft>
-              <a:buSzPct val="100000"/>
-              <a:buChar char="•"/>
-            </a:pPr>
-            <a:r>
-              <a:rPr lang="en-US" sz="1700" dirty="0">
-                <a:solidFill>
-                  <a:srgbClr val="141B34"/>
-                </a:solidFill>
-              </a:rPr>
-              <a:t>Probar con 1–2 docentes y 5–10 estudiantes reales</a:t>
-            </a:r>
-            <a:endParaRPr lang="en-US" sz="1700" dirty="0"/>
-          </a:p>
-          <a:p>
-            <a:pPr marL="342900" indent="-342900">
-              <a:spcAft>
-                <a:spcPts val="1200"/>
-              </a:spcAft>
-              <a:buSzPct val="100000"/>
-              <a:buChar char="•"/>
-            </a:pPr>
-            <a:r>
-              <a:rPr lang="en-US" sz="1700" dirty="0">
-                <a:solidFill>
-                  <a:srgbClr val="141B34"/>
-                </a:solidFill>
-              </a:rPr>
-              <a:t>Medir la brecha entre lo entregado y lo explicado</a:t>
-            </a:r>
-            <a:endParaRPr lang="en-US" sz="1700" dirty="0"/>
-          </a:p>
-          <a:p>
-            <a:pPr marL="342900" indent="-342900">
-              <a:spcAft>
-                <a:spcPts val="1200"/>
-              </a:spcAft>
-              <a:buSzPct val="100000"/>
-              <a:buChar char="•"/>
-            </a:pPr>
-            <a:r>
-              <a:rPr lang="en-US" sz="1700" dirty="0">
-                <a:solidFill>
-                  <a:srgbClr val="141B34"/>
-                </a:solidFill>
-              </a:rPr>
-              <a:t>Medir cuántas sugerencias de la IA cambia el docente</a:t>
-            </a:r>
-            <a:endParaRPr lang="en-US" sz="1700" dirty="0"/>
-          </a:p>
-        </p:txBody>
-      </p:sp>
-      <p:sp>
-        <p:nvSpPr>
-          <p:cNvPr id="9" name="Pilot goal card"/>
-          <p:cNvSpPr/>
-          <p:nvPr/>
-        </p:nvSpPr>
-        <p:spPr>
-          <a:xfrm>
-            <a:off x="548640" y="5212080"/>
-            <a:ext cx="11094415" cy="868680"/>
+            <a:ext cx="3840480" cy="3931920"/>
           </a:xfrm>
           <a:prstGeom prst="roundRect">
             <a:avLst>
-              <a:gd name="adj" fmla="val 12632"/>
+              <a:gd name="adj" fmla="val 2857"/>
             </a:avLst>
           </a:prstGeom>
           <a:solidFill>
-            <a:srgbClr val="FBF0D4"/>
+            <a:srgbClr val="141B34"/>
           </a:solidFill>
           <a:ln w="12700">
             <a:solidFill>
-              <a:srgbClr val="FBF0D4"/>
+              <a:srgbClr val="141B34"/>
             </a:solidFill>
             <a:prstDash val="solid"/>
           </a:ln>
@@ -10100,14 +10350,14 @@
       </p:sp>
       <p:sp>
         <p:nvSpPr>
-          <p:cNvPr id="10" name="Pilot goal"/>
+          <p:cNvPr id="6" name="Cost stat"/>
           <p:cNvSpPr txBox="1"/>
           <p:nvPr/>
         </p:nvSpPr>
         <p:spPr>
           <a:xfrm>
-            <a:off x="822960" y="5257800"/>
-            <a:ext cx="10545775" cy="777240"/>
+            <a:off x="868680" y="2011680"/>
+            <a:ext cx="3291840" cy="1188720"/>
           </a:xfrm>
           <a:prstGeom prst="rect">
             <a:avLst/>
@@ -10123,25 +10373,485 @@
               <a:buNone/>
             </a:pPr>
             <a:r>
-              <a:rPr lang="en-US" sz="1800" b="1" dirty="0">
+              <a:rPr lang="en-US" sz="6400" b="1" dirty="0">
+                <a:solidFill>
+                  <a:srgbClr val="E9B949"/>
+                </a:solidFill>
+              </a:rPr>
+              <a:t>&lt; ½ ¢</a:t>
+            </a:r>
+            <a:endParaRPr lang="en-US" sz="6400" dirty="0"/>
+          </a:p>
+        </p:txBody>
+      </p:sp>
+      <p:sp>
+        <p:nvSpPr>
+          <p:cNvPr id="7" name="Cost label"/>
+          <p:cNvSpPr txBox="1"/>
+          <p:nvPr/>
+        </p:nvSpPr>
+        <p:spPr>
+          <a:xfrm>
+            <a:off x="868680" y="3200400"/>
+            <a:ext cx="3200400" cy="914400"/>
+          </a:xfrm>
+          <a:prstGeom prst="rect">
+            <a:avLst/>
+          </a:prstGeom>
+          <a:noFill/>
+          <a:ln/>
+        </p:spPr>
+        <p:txBody>
+          <a:bodyPr wrap="square" lIns="0" tIns="0" rIns="0" bIns="0" rtlCol="0" anchor="t"/>
+          <a:lstStyle/>
+          <a:p>
+            <a:pPr indent="0" marL="0">
+              <a:buNone/>
+            </a:pPr>
+            <a:r>
+              <a:rPr lang="en-US" sz="1600" dirty="0">
+                <a:solidFill>
+                  <a:srgbClr val="FFFFFF"/>
+                </a:solidFill>
+              </a:rPr>
+              <a:t>de dólar cuesta una defensa en IA (estimación propia)</a:t>
+            </a:r>
+            <a:endParaRPr lang="en-US" sz="1600" dirty="0"/>
+          </a:p>
+        </p:txBody>
+      </p:sp>
+      <p:sp>
+        <p:nvSpPr>
+          <p:cNvPr id="8" name="Price anchor"/>
+          <p:cNvSpPr txBox="1"/>
+          <p:nvPr/>
+        </p:nvSpPr>
+        <p:spPr>
+          <a:xfrm>
+            <a:off x="868680" y="4297680"/>
+            <a:ext cx="3200400" cy="1188720"/>
+          </a:xfrm>
+          <a:prstGeom prst="rect">
+            <a:avLst/>
+          </a:prstGeom>
+          <a:noFill/>
+          <a:ln/>
+        </p:spPr>
+        <p:txBody>
+          <a:bodyPr wrap="square" lIns="0" tIns="0" rIns="0" bIns="0" rtlCol="0" anchor="t"/>
+          <a:lstStyle/>
+          <a:p>
+            <a:pPr indent="0" marL="0">
+              <a:buNone/>
+            </a:pPr>
+            <a:r>
+              <a:rPr lang="en-US" sz="1500" dirty="0">
+                <a:solidFill>
+                  <a:srgbClr val="E7ECFB"/>
+                </a:solidFill>
+              </a:rPr>
+              <a:t>Turnitin: USD 1,79–6,50 por alumno al año. Cobramos por debajo.</a:t>
+            </a:r>
+            <a:endParaRPr lang="en-US" sz="1500" dirty="0"/>
+          </a:p>
+        </p:txBody>
+      </p:sp>
+      <p:sp>
+        <p:nvSpPr>
+          <p:cNvPr id="9" name="Route 1 dot"/>
+          <p:cNvSpPr/>
+          <p:nvPr/>
+        </p:nvSpPr>
+        <p:spPr>
+          <a:xfrm>
+            <a:off x="4800600" y="1920240"/>
+            <a:ext cx="457200" cy="457200"/>
+          </a:xfrm>
+          <a:prstGeom prst="ellipse">
+            <a:avLst/>
+          </a:prstGeom>
+          <a:solidFill>
+            <a:srgbClr val="2340B8"/>
+          </a:solidFill>
+          <a:ln w="12700">
+            <a:solidFill>
+              <a:srgbClr val="2340B8"/>
+            </a:solidFill>
+            <a:prstDash val="solid"/>
+          </a:ln>
+        </p:spPr>
+      </p:sp>
+      <p:sp>
+        <p:nvSpPr>
+          <p:cNvPr id="10" name="Route 1 number"/>
+          <p:cNvSpPr txBox="1"/>
+          <p:nvPr/>
+        </p:nvSpPr>
+        <p:spPr>
+          <a:xfrm>
+            <a:off x="4800600" y="1920240"/>
+            <a:ext cx="457200" cy="457200"/>
+          </a:xfrm>
+          <a:prstGeom prst="rect">
+            <a:avLst/>
+          </a:prstGeom>
+          <a:noFill/>
+          <a:ln/>
+        </p:spPr>
+        <p:txBody>
+          <a:bodyPr wrap="square" lIns="0" tIns="0" rIns="0" bIns="0" rtlCol="0" anchor="ctr"/>
+          <a:lstStyle/>
+          <a:p>
+            <a:pPr algn="ctr" indent="0" marL="0">
+              <a:buNone/>
+            </a:pPr>
+            <a:r>
+              <a:rPr lang="en-US" sz="1600" b="1" dirty="0">
+                <a:solidFill>
+                  <a:srgbClr val="FFFFFF"/>
+                </a:solidFill>
+              </a:rPr>
+              <a:t>1</a:t>
+            </a:r>
+            <a:endParaRPr lang="en-US" sz="1600" dirty="0"/>
+          </a:p>
+        </p:txBody>
+      </p:sp>
+      <p:sp>
+        <p:nvSpPr>
+          <p:cNvPr id="11" name="Route 1 title"/>
+          <p:cNvSpPr txBox="1"/>
+          <p:nvPr/>
+        </p:nvSpPr>
+        <p:spPr>
+          <a:xfrm>
+            <a:off x="5486400" y="1828800"/>
+            <a:ext cx="6126480" cy="457200"/>
+          </a:xfrm>
+          <a:prstGeom prst="rect">
+            <a:avLst/>
+          </a:prstGeom>
+          <a:noFill/>
+          <a:ln/>
+        </p:spPr>
+        <p:txBody>
+          <a:bodyPr wrap="square" lIns="0" tIns="0" rIns="0" bIns="0" rtlCol="0" anchor="ctr"/>
+          <a:lstStyle/>
+          <a:p>
+            <a:pPr indent="0" marL="0">
+              <a:buNone/>
+            </a:pPr>
+            <a:r>
+              <a:rPr lang="en-US" sz="2000" b="1" dirty="0">
                 <a:solidFill>
                   <a:srgbClr val="141B34"/>
                 </a:solidFill>
               </a:rPr>
-              <a:t>Meta del piloto: </a:t>
-            </a:r>
+              <a:t>0–6 meses</a:t>
+            </a:r>
+            <a:endParaRPr lang="en-US" sz="2000" dirty="0"/>
+          </a:p>
+        </p:txBody>
+      </p:sp>
+      <p:sp>
+        <p:nvSpPr>
+          <p:cNvPr id="12" name="Route 1 detail"/>
+          <p:cNvSpPr txBox="1"/>
+          <p:nvPr/>
+        </p:nvSpPr>
+        <p:spPr>
+          <a:xfrm>
+            <a:off x="5486400" y="2286000"/>
+            <a:ext cx="6126480" cy="685800"/>
+          </a:xfrm>
+          <a:prstGeom prst="rect">
+            <a:avLst/>
+          </a:prstGeom>
+          <a:noFill/>
+          <a:ln/>
+        </p:spPr>
+        <p:txBody>
+          <a:bodyPr wrap="square" lIns="0" tIns="0" rIns="0" bIns="0" rtlCol="0" anchor="t"/>
+          <a:lstStyle/>
+          <a:p>
             <a:pPr indent="0" marL="0">
               <a:buNone/>
             </a:pPr>
             <a:r>
-              <a:rPr lang="en-US" sz="1800" dirty="0">
+              <a:rPr lang="en-US" sz="1500" dirty="0">
+                <a:solidFill>
+                  <a:srgbClr val="4F5568"/>
+                </a:solidFill>
+              </a:rPr>
+              <a:t>Docentes individuales, gratis con un límite mensual.</a:t>
+            </a:r>
+            <a:endParaRPr lang="en-US" sz="1500" dirty="0"/>
+          </a:p>
+        </p:txBody>
+      </p:sp>
+      <p:sp>
+        <p:nvSpPr>
+          <p:cNvPr id="13" name="Route 2 dot"/>
+          <p:cNvSpPr/>
+          <p:nvPr/>
+        </p:nvSpPr>
+        <p:spPr>
+          <a:xfrm>
+            <a:off x="4800600" y="3246120"/>
+            <a:ext cx="457200" cy="457200"/>
+          </a:xfrm>
+          <a:prstGeom prst="ellipse">
+            <a:avLst/>
+          </a:prstGeom>
+          <a:solidFill>
+            <a:srgbClr val="2340B8"/>
+          </a:solidFill>
+          <a:ln w="12700">
+            <a:solidFill>
+              <a:srgbClr val="2340B8"/>
+            </a:solidFill>
+            <a:prstDash val="solid"/>
+          </a:ln>
+        </p:spPr>
+      </p:sp>
+      <p:sp>
+        <p:nvSpPr>
+          <p:cNvPr id="14" name="Route 2 number"/>
+          <p:cNvSpPr txBox="1"/>
+          <p:nvPr/>
+        </p:nvSpPr>
+        <p:spPr>
+          <a:xfrm>
+            <a:off x="4800600" y="3246120"/>
+            <a:ext cx="457200" cy="457200"/>
+          </a:xfrm>
+          <a:prstGeom prst="rect">
+            <a:avLst/>
+          </a:prstGeom>
+          <a:noFill/>
+          <a:ln/>
+        </p:spPr>
+        <p:txBody>
+          <a:bodyPr wrap="square" lIns="0" tIns="0" rIns="0" bIns="0" rtlCol="0" anchor="ctr"/>
+          <a:lstStyle/>
+          <a:p>
+            <a:pPr algn="ctr" indent="0" marL="0">
+              <a:buNone/>
+            </a:pPr>
+            <a:r>
+              <a:rPr lang="en-US" sz="1600" b="1" dirty="0">
+                <a:solidFill>
+                  <a:srgbClr val="FFFFFF"/>
+                </a:solidFill>
+              </a:rPr>
+              <a:t>2</a:t>
+            </a:r>
+            <a:endParaRPr lang="en-US" sz="1600" dirty="0"/>
+          </a:p>
+        </p:txBody>
+      </p:sp>
+      <p:sp>
+        <p:nvSpPr>
+          <p:cNvPr id="15" name="Route 2 title"/>
+          <p:cNvSpPr txBox="1"/>
+          <p:nvPr/>
+        </p:nvSpPr>
+        <p:spPr>
+          <a:xfrm>
+            <a:off x="5486400" y="3154680"/>
+            <a:ext cx="6126480" cy="457200"/>
+          </a:xfrm>
+          <a:prstGeom prst="rect">
+            <a:avLst/>
+          </a:prstGeom>
+          <a:noFill/>
+          <a:ln/>
+        </p:spPr>
+        <p:txBody>
+          <a:bodyPr wrap="square" lIns="0" tIns="0" rIns="0" bIns="0" rtlCol="0" anchor="ctr"/>
+          <a:lstStyle/>
+          <a:p>
+            <a:pPr indent="0" marL="0">
+              <a:buNone/>
+            </a:pPr>
+            <a:r>
+              <a:rPr lang="en-US" sz="2000" b="1" dirty="0">
                 <a:solidFill>
                   <a:srgbClr val="141B34"/>
                 </a:solidFill>
               </a:rPr>
-              <a:t>que la IA sola saque menos de la mitad de la nota en la tarea rediseñada.</a:t>
-            </a:r>
-            <a:endParaRPr lang="en-US" sz="1800" dirty="0"/>
+              <a:t>6–18 meses</a:t>
+            </a:r>
+            <a:endParaRPr lang="en-US" sz="2000" dirty="0"/>
+          </a:p>
+        </p:txBody>
+      </p:sp>
+      <p:sp>
+        <p:nvSpPr>
+          <p:cNvPr id="16" name="Route 2 detail"/>
+          <p:cNvSpPr txBox="1"/>
+          <p:nvPr/>
+        </p:nvSpPr>
+        <p:spPr>
+          <a:xfrm>
+            <a:off x="5486400" y="3611880"/>
+            <a:ext cx="6126480" cy="685800"/>
+          </a:xfrm>
+          <a:prstGeom prst="rect">
+            <a:avLst/>
+          </a:prstGeom>
+          <a:noFill/>
+          <a:ln/>
+        </p:spPr>
+        <p:txBody>
+          <a:bodyPr wrap="square" lIns="0" tIns="0" rIns="0" bIns="0" rtlCol="0" anchor="t"/>
+          <a:lstStyle/>
+          <a:p>
+            <a:pPr indent="0" marL="0">
+              <a:buNone/>
+            </a:pPr>
+            <a:r>
+              <a:rPr lang="en-US" sz="1500" dirty="0">
+                <a:solidFill>
+                  <a:srgbClr val="4F5568"/>
+                </a:solidFill>
+              </a:rPr>
+              <a:t>Colegios privados y facultades: licencia por alumno al año cuando 3+ docentes lo usan.</a:t>
+            </a:r>
+            <a:endParaRPr lang="en-US" sz="1500" dirty="0"/>
+          </a:p>
+        </p:txBody>
+      </p:sp>
+      <p:sp>
+        <p:nvSpPr>
+          <p:cNvPr id="17" name="Route 3 dot"/>
+          <p:cNvSpPr/>
+          <p:nvPr/>
+        </p:nvSpPr>
+        <p:spPr>
+          <a:xfrm>
+            <a:off x="4800600" y="4572000"/>
+            <a:ext cx="457200" cy="457200"/>
+          </a:xfrm>
+          <a:prstGeom prst="ellipse">
+            <a:avLst/>
+          </a:prstGeom>
+          <a:solidFill>
+            <a:srgbClr val="2340B8"/>
+          </a:solidFill>
+          <a:ln w="12700">
+            <a:solidFill>
+              <a:srgbClr val="2340B8"/>
+            </a:solidFill>
+            <a:prstDash val="solid"/>
+          </a:ln>
+        </p:spPr>
+      </p:sp>
+      <p:sp>
+        <p:nvSpPr>
+          <p:cNvPr id="18" name="Route 3 number"/>
+          <p:cNvSpPr txBox="1"/>
+          <p:nvPr/>
+        </p:nvSpPr>
+        <p:spPr>
+          <a:xfrm>
+            <a:off x="4800600" y="4572000"/>
+            <a:ext cx="457200" cy="457200"/>
+          </a:xfrm>
+          <a:prstGeom prst="rect">
+            <a:avLst/>
+          </a:prstGeom>
+          <a:noFill/>
+          <a:ln/>
+        </p:spPr>
+        <p:txBody>
+          <a:bodyPr wrap="square" lIns="0" tIns="0" rIns="0" bIns="0" rtlCol="0" anchor="ctr"/>
+          <a:lstStyle/>
+          <a:p>
+            <a:pPr algn="ctr" indent="0" marL="0">
+              <a:buNone/>
+            </a:pPr>
+            <a:r>
+              <a:rPr lang="en-US" sz="1600" b="1" dirty="0">
+                <a:solidFill>
+                  <a:srgbClr val="FFFFFF"/>
+                </a:solidFill>
+              </a:rPr>
+              <a:t>3</a:t>
+            </a:r>
+            <a:endParaRPr lang="en-US" sz="1600" dirty="0"/>
+          </a:p>
+        </p:txBody>
+      </p:sp>
+      <p:sp>
+        <p:nvSpPr>
+          <p:cNvPr id="19" name="Route 3 title"/>
+          <p:cNvSpPr txBox="1"/>
+          <p:nvPr/>
+        </p:nvSpPr>
+        <p:spPr>
+          <a:xfrm>
+            <a:off x="5486400" y="4480560"/>
+            <a:ext cx="6126480" cy="457200"/>
+          </a:xfrm>
+          <a:prstGeom prst="rect">
+            <a:avLst/>
+          </a:prstGeom>
+          <a:noFill/>
+          <a:ln/>
+        </p:spPr>
+        <p:txBody>
+          <a:bodyPr wrap="square" lIns="0" tIns="0" rIns="0" bIns="0" rtlCol="0" anchor="ctr"/>
+          <a:lstStyle/>
+          <a:p>
+            <a:pPr indent="0" marL="0">
+              <a:buNone/>
+            </a:pPr>
+            <a:r>
+              <a:rPr lang="en-US" sz="2000" b="1" dirty="0">
+                <a:solidFill>
+                  <a:srgbClr val="141B34"/>
+                </a:solidFill>
+              </a:rPr>
+              <a:t>18+ meses</a:t>
+            </a:r>
+            <a:endParaRPr lang="en-US" sz="2000" dirty="0"/>
+          </a:p>
+        </p:txBody>
+      </p:sp>
+      <p:sp>
+        <p:nvSpPr>
+          <p:cNvPr id="20" name="Route 3 detail"/>
+          <p:cNvSpPr txBox="1"/>
+          <p:nvPr/>
+        </p:nvSpPr>
+        <p:spPr>
+          <a:xfrm>
+            <a:off x="5486400" y="4937760"/>
+            <a:ext cx="6126480" cy="685800"/>
+          </a:xfrm>
+          <a:prstGeom prst="rect">
+            <a:avLst/>
+          </a:prstGeom>
+          <a:noFill/>
+          <a:ln/>
+        </p:spPr>
+        <p:txBody>
+          <a:bodyPr wrap="square" lIns="0" tIns="0" rIns="0" bIns="0" rtlCol="0" anchor="t"/>
+          <a:lstStyle/>
+          <a:p>
+            <a:pPr indent="0" marL="0">
+              <a:buNone/>
+            </a:pPr>
+            <a:r>
+              <a:rPr lang="en-US" sz="1500" dirty="0">
+                <a:solidFill>
+                  <a:srgbClr val="4F5568"/>
+                </a:solidFill>
+              </a:rPr>
+              <a:t>Sector público: pilotos con UGEL, con fondos de innovación o cooperación.</a:t>
+            </a:r>
+            <a:endParaRPr lang="en-US" sz="1500" dirty="0"/>
           </a:p>
         </p:txBody>
       </p:sp>
